--- a/docs/reports/[FlowGuide AI]_발표자료.pptx
+++ b/docs/reports/[FlowGuide AI]_발표자료.pptx
@@ -19,9 +19,11 @@
     <p:sldId id="267" r:id="rId13"/>
     <p:sldId id="268" r:id="rId14"/>
     <p:sldId id="269" r:id="rId15"/>
+    <p:sldId id="270" r:id="rId16"/>
+    <p:sldId id="271" r:id="rId17"/>
   </p:sldIdLst>
   <p:notesMasterIdLst>
-    <p:notesMasterId r:id="rId16"/>
+    <p:notesMasterId r:id="rId18"/>
   </p:notesMasterIdLst>
   <p:sldSz cx="12191695" cy="6858000"/>
   <p:notesSz cx="6858000" cy="12191695"/>
@@ -979,6 +981,182 @@
             <a:fld id="{F7021451-1387-4CA6-816F-3879F97B5CBC}" type="slidenum">
               <a:rPr lang="en-US"/>
               <a:t>14</a:t>
+            </a:fld>
+            <a:endParaRPr lang="en-US"/>
+          </a:p>
+        </p:txBody>
+      </p:sp>
+    </p:spTree>
+    <p:extLst>
+      <p:ext uri="{BB962C8B-B14F-4D97-AF65-F5344CB8AC3E}">
+        <p14:creationId xmlns:p14="http://schemas.microsoft.com/office/powerpoint/2010/main" val="1024086991"/>
+      </p:ext>
+    </p:extLst>
+  </p:cSld>
+  <p:clrMapOvr>
+    <a:masterClrMapping/>
+  </p:clrMapOvr>
+</p:notes>
+</file>
+
+<file path=ppt/notesSlides/notesSlide15.xml><?xml version="1.0" encoding="utf-8"?>
+<p:notes xmlns:a="http://schemas.openxmlformats.org/drawingml/2006/main" xmlns:r="http://schemas.openxmlformats.org/officeDocument/2006/relationships" xmlns:p="http://schemas.openxmlformats.org/presentationml/2006/main">
+  <p:cSld>
+    <p:spTree>
+      <p:nvGrpSpPr>
+        <p:cNvPr id="1" name=""/>
+        <p:cNvGrpSpPr/>
+        <p:nvPr/>
+      </p:nvGrpSpPr>
+      <p:grpSpPr>
+        <a:xfrm>
+          <a:off x="0" y="0"/>
+          <a:ext cx="0" cy="0"/>
+          <a:chOff x="0" y="0"/>
+          <a:chExt cx="0" cy="0"/>
+        </a:xfrm>
+      </p:grpSpPr>
+      <p:sp>
+        <p:nvSpPr>
+          <p:cNvPr id="2" name="Slide Image Placeholder 1"/>
+          <p:cNvSpPr>
+            <a:spLocks noGrp="1" noRot="1" noChangeAspect="1"/>
+          </p:cNvSpPr>
+          <p:nvPr>
+            <p:ph type="sldImg"/>
+          </p:nvPr>
+        </p:nvSpPr>
+        <p:spPr/>
+      </p:sp>
+      <p:sp>
+        <p:nvSpPr>
+          <p:cNvPr id="3" name="Notes Placeholder 2"/>
+          <p:cNvSpPr>
+            <a:spLocks noGrp="1"/>
+          </p:cNvSpPr>
+          <p:nvPr>
+            <p:ph type="body" idx="1"/>
+          </p:nvPr>
+        </p:nvSpPr>
+        <p:spPr/>
+        <p:txBody>
+          <a:bodyPr/>
+          <a:lstStyle/>
+          <a:p>
+            <a:r>
+              <a:rPr lang="en-US" dirty="0"/>
+              <a:t/>
+            </a:r>
+            <a:endParaRPr lang="en-US" dirty="0"/>
+          </a:p>
+        </p:txBody>
+      </p:sp>
+      <p:sp>
+        <p:nvSpPr>
+          <p:cNvPr id="4" name="Slide Number Placeholder 3"/>
+          <p:cNvSpPr>
+            <a:spLocks noGrp="1"/>
+          </p:cNvSpPr>
+          <p:nvPr>
+            <p:ph type="sldNum" sz="quarter" idx="10"/>
+          </p:nvPr>
+        </p:nvSpPr>
+        <p:spPr/>
+        <p:txBody>
+          <a:bodyPr/>
+          <a:lstStyle/>
+          <a:p>
+            <a:fld id="{F7021451-1387-4CA6-816F-3879F97B5CBC}" type="slidenum">
+              <a:rPr lang="en-US"/>
+              <a:t>15</a:t>
+            </a:fld>
+            <a:endParaRPr lang="en-US"/>
+          </a:p>
+        </p:txBody>
+      </p:sp>
+    </p:spTree>
+    <p:extLst>
+      <p:ext uri="{BB962C8B-B14F-4D97-AF65-F5344CB8AC3E}">
+        <p14:creationId xmlns:p14="http://schemas.microsoft.com/office/powerpoint/2010/main" val="1024086991"/>
+      </p:ext>
+    </p:extLst>
+  </p:cSld>
+  <p:clrMapOvr>
+    <a:masterClrMapping/>
+  </p:clrMapOvr>
+</p:notes>
+</file>
+
+<file path=ppt/notesSlides/notesSlide16.xml><?xml version="1.0" encoding="utf-8"?>
+<p:notes xmlns:a="http://schemas.openxmlformats.org/drawingml/2006/main" xmlns:r="http://schemas.openxmlformats.org/officeDocument/2006/relationships" xmlns:p="http://schemas.openxmlformats.org/presentationml/2006/main">
+  <p:cSld>
+    <p:spTree>
+      <p:nvGrpSpPr>
+        <p:cNvPr id="1" name=""/>
+        <p:cNvGrpSpPr/>
+        <p:nvPr/>
+      </p:nvGrpSpPr>
+      <p:grpSpPr>
+        <a:xfrm>
+          <a:off x="0" y="0"/>
+          <a:ext cx="0" cy="0"/>
+          <a:chOff x="0" y="0"/>
+          <a:chExt cx="0" cy="0"/>
+        </a:xfrm>
+      </p:grpSpPr>
+      <p:sp>
+        <p:nvSpPr>
+          <p:cNvPr id="2" name="Slide Image Placeholder 1"/>
+          <p:cNvSpPr>
+            <a:spLocks noGrp="1" noRot="1" noChangeAspect="1"/>
+          </p:cNvSpPr>
+          <p:nvPr>
+            <p:ph type="sldImg"/>
+          </p:nvPr>
+        </p:nvSpPr>
+        <p:spPr/>
+      </p:sp>
+      <p:sp>
+        <p:nvSpPr>
+          <p:cNvPr id="3" name="Notes Placeholder 2"/>
+          <p:cNvSpPr>
+            <a:spLocks noGrp="1"/>
+          </p:cNvSpPr>
+          <p:nvPr>
+            <p:ph type="body" idx="1"/>
+          </p:nvPr>
+        </p:nvSpPr>
+        <p:spPr/>
+        <p:txBody>
+          <a:bodyPr/>
+          <a:lstStyle/>
+          <a:p>
+            <a:r>
+              <a:rPr lang="en-US" dirty="0"/>
+              <a:t/>
+            </a:r>
+            <a:endParaRPr lang="en-US" dirty="0"/>
+          </a:p>
+        </p:txBody>
+      </p:sp>
+      <p:sp>
+        <p:nvSpPr>
+          <p:cNvPr id="4" name="Slide Number Placeholder 3"/>
+          <p:cNvSpPr>
+            <a:spLocks noGrp="1"/>
+          </p:cNvSpPr>
+          <p:nvPr>
+            <p:ph type="sldNum" sz="quarter" idx="10"/>
+          </p:nvPr>
+        </p:nvSpPr>
+        <p:spPr/>
+        <p:txBody>
+          <a:bodyPr/>
+          <a:lstStyle/>
+          <a:p>
+            <a:fld id="{F7021451-1387-4CA6-816F-3879F97B5CBC}" type="slidenum">
+              <a:rPr lang="en-US"/>
+              <a:t>16</a:t>
             </a:fld>
             <a:endParaRPr lang="en-US"/>
           </a:p>
@@ -3244,7 +3422,7 @@
                 <a:ea typeface="Calibri" pitchFamily="34" charset="-122"/>
                 <a:cs typeface="Calibri" pitchFamily="34" charset="-120"/>
               </a:rPr>
-              <a:t>08  </a:t>
+              <a:t>07  </a:t>
             </a:r>
             <a:pPr algn="ctr" indent="0" marL="0">
               <a:buNone/>
@@ -3258,7 +3436,7 @@
                 <a:ea typeface="Calibri" pitchFamily="34" charset="-122"/>
                 <a:cs typeface="Calibri" pitchFamily="34" charset="-120"/>
               </a:rPr>
-              <a:t>추진 경과</a:t>
+              <a:t>성능 지표</a:t>
             </a:r>
             <a:endParaRPr lang="en-US" sz="1200" dirty="0"/>
           </a:p>
@@ -3297,7 +3475,7 @@
                 <a:ea typeface="Calibri" pitchFamily="34" charset="-122"/>
                 <a:cs typeface="Calibri" pitchFamily="34" charset="-120"/>
               </a:rPr>
-              <a:t>TIMELINE</a:t>
+              <a:t>BENCHMARK</a:t>
             </a:r>
             <a:endParaRPr lang="en-US" sz="1300" dirty="0"/>
           </a:p>
@@ -3336,7 +3514,7 @@
                 <a:ea typeface="Cambria" pitchFamily="34" charset="-122"/>
                 <a:cs typeface="Cambria" pitchFamily="34" charset="-120"/>
               </a:rPr>
-              <a:t>5단계로 완성했습니다</a:t>
+              <a:t>정량 지표로 검증했습니다</a:t>
             </a:r>
             <a:endParaRPr lang="en-US" sz="3000" dirty="0"/>
           </a:p>
@@ -3344,20 +3522,63 @@
       </p:sp>
       <p:sp>
         <p:nvSpPr>
-          <p:cNvPr id="6" name="Shape 4"/>
+          <p:cNvPr id="6" name="Text 4"/>
+          <p:cNvSpPr txBox="1"/>
+          <p:nvPr/>
+        </p:nvSpPr>
+        <p:spPr>
+          <a:xfrm>
+            <a:off x="640080" y="1600200"/>
+            <a:ext cx="10881360" cy="365760"/>
+          </a:xfrm>
+          <a:prstGeom prst="rect">
+            <a:avLst/>
+          </a:prstGeom>
+          <a:noFill/>
+          <a:ln/>
+        </p:spPr>
+        <p:txBody>
+          <a:bodyPr wrap="square" lIns="0" tIns="0" rIns="0" bIns="0" rtlCol="0" anchor="ctr"/>
+          <a:lstStyle/>
+          <a:p>
+            <a:pPr indent="0" marL="0">
+              <a:buNone/>
+            </a:pPr>
+            <a:r>
+              <a:rPr lang="en-US" sz="1150" i="1" dirty="0">
+                <a:solidFill>
+                  <a:srgbClr val="8A93A8"/>
+                </a:solidFill>
+                <a:latin typeface="Calibri" pitchFamily="34" charset="0"/>
+                <a:ea typeface="Calibri" pitchFamily="34" charset="-122"/>
+                <a:cs typeface="Calibri" pitchFamily="34" charset="-120"/>
+              </a:rPr>
+              <a:t>각 항목을 3회씩 반복 측정하고, Wilson 신뢰구간(95%)을 함께 표기했습니다. (naito.chat 백엔드에 직접 요청 — 실사용 환경과 동일)</a:t>
+            </a:r>
+            <a:endParaRPr lang="en-US" sz="1150" dirty="0"/>
+          </a:p>
+        </p:txBody>
+      </p:sp>
+      <p:sp>
+        <p:nvSpPr>
+          <p:cNvPr id="7" name="Shape 5"/>
           <p:cNvSpPr/>
           <p:nvPr/>
         </p:nvSpPr>
         <p:spPr>
           <a:xfrm>
-            <a:off x="1051560" y="2167128"/>
-            <a:ext cx="0" cy="3364992"/>
-          </a:xfrm>
-          <a:prstGeom prst="line">
-            <a:avLst/>
-          </a:prstGeom>
-          <a:noFill/>
-          <a:ln w="25400">
+            <a:off x="640080" y="2057400"/>
+            <a:ext cx="3429000" cy="1691640"/>
+          </a:xfrm>
+          <a:prstGeom prst="roundRect">
+            <a:avLst>
+              <a:gd name="adj" fmla="val 4324"/>
+            </a:avLst>
+          </a:prstGeom>
+          <a:solidFill>
+            <a:srgbClr val="F3F5FA"/>
+          </a:solidFill>
+          <a:ln w="12700">
             <a:solidFill>
               <a:srgbClr val="E3E7F0"/>
             </a:solidFill>
@@ -3367,50 +3588,216 @@
       </p:sp>
       <p:sp>
         <p:nvSpPr>
-          <p:cNvPr id="7" name="Shape 5"/>
+          <p:cNvPr id="8" name="Text 6"/>
+          <p:cNvSpPr txBox="1"/>
+          <p:nvPr/>
+        </p:nvSpPr>
+        <p:spPr>
+          <a:xfrm>
+            <a:off x="896112" y="2203704"/>
+            <a:ext cx="2916936" cy="566928"/>
+          </a:xfrm>
+          <a:prstGeom prst="rect">
+            <a:avLst/>
+          </a:prstGeom>
+          <a:noFill/>
+          <a:ln/>
+        </p:spPr>
+        <p:txBody>
+          <a:bodyPr wrap="square" lIns="0" tIns="0" rIns="0" bIns="0" rtlCol="0" anchor="ctr"/>
+          <a:lstStyle/>
+          <a:p>
+            <a:pPr indent="0" marL="0">
+              <a:buNone/>
+            </a:pPr>
+            <a:r>
+              <a:rPr lang="en-US" sz="3200" b="1" dirty="0">
+                <a:solidFill>
+                  <a:srgbClr val="EA4B71"/>
+                </a:solidFill>
+                <a:latin typeface="Cambria" pitchFamily="34" charset="0"/>
+                <a:ea typeface="Cambria" pitchFamily="34" charset="-122"/>
+                <a:cs typeface="Cambria" pitchFamily="34" charset="-120"/>
+              </a:rPr>
+              <a:t>97.9%</a:t>
+            </a:r>
+            <a:endParaRPr lang="en-US" sz="3200" dirty="0"/>
+          </a:p>
+        </p:txBody>
+      </p:sp>
+      <p:sp>
+        <p:nvSpPr>
+          <p:cNvPr id="9" name="Text 7"/>
+          <p:cNvSpPr txBox="1"/>
+          <p:nvPr/>
+        </p:nvSpPr>
+        <p:spPr>
+          <a:xfrm>
+            <a:off x="896112" y="2770632"/>
+            <a:ext cx="2916936" cy="292608"/>
+          </a:xfrm>
+          <a:prstGeom prst="rect">
+            <a:avLst/>
+          </a:prstGeom>
+          <a:noFill/>
+          <a:ln/>
+        </p:spPr>
+        <p:txBody>
+          <a:bodyPr wrap="square" lIns="0" tIns="0" rIns="0" bIns="0" rtlCol="0" anchor="ctr"/>
+          <a:lstStyle/>
+          <a:p>
+            <a:pPr indent="0" marL="0">
+              <a:buNone/>
+            </a:pPr>
+            <a:r>
+              <a:rPr lang="en-US" sz="1250" b="1" dirty="0">
+                <a:solidFill>
+                  <a:srgbClr val="1E2761"/>
+                </a:solidFill>
+                <a:latin typeface="Calibri" pitchFamily="34" charset="0"/>
+                <a:ea typeface="Calibri" pitchFamily="34" charset="-122"/>
+                <a:cs typeface="Calibri" pitchFamily="34" charset="-120"/>
+              </a:rPr>
+              <a:t>의도 분류 정확도</a:t>
+            </a:r>
+            <a:endParaRPr lang="en-US" sz="1250" dirty="0"/>
+          </a:p>
+        </p:txBody>
+      </p:sp>
+      <p:sp>
+        <p:nvSpPr>
+          <p:cNvPr id="10" name="Text 8"/>
+          <p:cNvSpPr txBox="1"/>
+          <p:nvPr/>
+        </p:nvSpPr>
+        <p:spPr>
+          <a:xfrm>
+            <a:off x="896112" y="3044952"/>
+            <a:ext cx="2916936" cy="256032"/>
+          </a:xfrm>
+          <a:prstGeom prst="rect">
+            <a:avLst/>
+          </a:prstGeom>
+          <a:noFill/>
+          <a:ln/>
+        </p:spPr>
+        <p:txBody>
+          <a:bodyPr wrap="square" lIns="0" tIns="0" rIns="0" bIns="0" rtlCol="0" anchor="ctr"/>
+          <a:lstStyle/>
+          <a:p>
+            <a:pPr indent="0" marL="0">
+              <a:buNone/>
+            </a:pPr>
+            <a:r>
+              <a:rPr lang="en-US" sz="950" b="1" dirty="0">
+                <a:solidFill>
+                  <a:srgbClr val="0EA5E9"/>
+                </a:solidFill>
+                <a:latin typeface="Calibri" pitchFamily="34" charset="0"/>
+                <a:ea typeface="Calibri" pitchFamily="34" charset="-122"/>
+                <a:cs typeface="Calibri" pitchFamily="34" charset="-120"/>
+              </a:rPr>
+              <a:t>95% CI 94.1–99.3%</a:t>
+            </a:r>
+            <a:endParaRPr lang="en-US" sz="950" dirty="0"/>
+          </a:p>
+        </p:txBody>
+      </p:sp>
+      <p:sp>
+        <p:nvSpPr>
+          <p:cNvPr id="11" name="Text 9"/>
+          <p:cNvSpPr txBox="1"/>
+          <p:nvPr/>
+        </p:nvSpPr>
+        <p:spPr>
+          <a:xfrm>
+            <a:off x="896112" y="3310128"/>
+            <a:ext cx="2916936" cy="411480"/>
+          </a:xfrm>
+          <a:prstGeom prst="rect">
+            <a:avLst/>
+          </a:prstGeom>
+          <a:noFill/>
+          <a:ln/>
+        </p:spPr>
+        <p:txBody>
+          <a:bodyPr wrap="square" lIns="0" tIns="0" rIns="0" bIns="0" rtlCol="0" anchor="ctr"/>
+          <a:lstStyle/>
+          <a:p>
+            <a:pPr indent="0" marL="0">
+              <a:lnSpc>
+                <a:spcPct val="110000"/>
+              </a:lnSpc>
+              <a:buNone/>
+            </a:pPr>
+            <a:r>
+              <a:rPr lang="en-US" sz="830" dirty="0">
+                <a:solidFill>
+                  <a:srgbClr val="8A93A8"/>
+                </a:solidFill>
+                <a:latin typeface="Calibri" pitchFamily="34" charset="0"/>
+                <a:ea typeface="Calibri" pitchFamily="34" charset="-122"/>
+                <a:cs typeface="Calibri" pitchFamily="34" charset="-120"/>
+              </a:rPr>
+              <a:t>144건 시행 (48개 질문 × 3회), 3회 반복 모두 동일 예측(완전 일관) 100%</a:t>
+            </a:r>
+            <a:endParaRPr lang="en-US" sz="830" dirty="0"/>
+          </a:p>
+        </p:txBody>
+      </p:sp>
+      <p:sp>
+        <p:nvSpPr>
+          <p:cNvPr id="12" name="Shape 10"/>
           <p:cNvSpPr/>
           <p:nvPr/>
         </p:nvSpPr>
         <p:spPr>
           <a:xfrm>
-            <a:off x="777240" y="1965960"/>
-            <a:ext cx="548640" cy="548640"/>
-          </a:xfrm>
-          <a:prstGeom prst="ellipse">
-            <a:avLst/>
+            <a:off x="4343400" y="2057400"/>
+            <a:ext cx="3429000" cy="1691640"/>
+          </a:xfrm>
+          <a:prstGeom prst="roundRect">
+            <a:avLst>
+              <a:gd name="adj" fmla="val 4324"/>
+            </a:avLst>
           </a:prstGeom>
           <a:solidFill>
             <a:srgbClr val="1E2761"/>
           </a:solidFill>
-          <a:ln/>
-        </p:spPr>
-      </p:sp>
-      <p:sp>
-        <p:nvSpPr>
-          <p:cNvPr id="8" name="Text 6"/>
-          <p:cNvSpPr txBox="1"/>
-          <p:nvPr/>
-        </p:nvSpPr>
-        <p:spPr>
-          <a:xfrm>
-            <a:off x="777240" y="1965960"/>
-            <a:ext cx="548640" cy="548640"/>
-          </a:xfrm>
-          <a:prstGeom prst="rect">
-            <a:avLst/>
-          </a:prstGeom>
-          <a:noFill/>
-          <a:ln/>
-        </p:spPr>
-        <p:txBody>
-          <a:bodyPr wrap="square" lIns="0" tIns="0" rIns="0" bIns="0" rtlCol="0" anchor="ctr"/>
-          <a:lstStyle/>
-          <a:p>
-            <a:pPr algn="ctr" indent="0" marL="0">
-              <a:buNone/>
-            </a:pPr>
-            <a:r>
-              <a:rPr lang="en-US" sz="1600" b="1" dirty="0">
+          <a:ln w="12700">
+            <a:solidFill>
+              <a:srgbClr val="1E2761"/>
+            </a:solidFill>
+            <a:prstDash val="solid"/>
+          </a:ln>
+        </p:spPr>
+      </p:sp>
+      <p:sp>
+        <p:nvSpPr>
+          <p:cNvPr id="13" name="Text 11"/>
+          <p:cNvSpPr txBox="1"/>
+          <p:nvPr/>
+        </p:nvSpPr>
+        <p:spPr>
+          <a:xfrm>
+            <a:off x="4599432" y="2203704"/>
+            <a:ext cx="2916936" cy="566928"/>
+          </a:xfrm>
+          <a:prstGeom prst="rect">
+            <a:avLst/>
+          </a:prstGeom>
+          <a:noFill/>
+          <a:ln/>
+        </p:spPr>
+        <p:txBody>
+          <a:bodyPr wrap="square" lIns="0" tIns="0" rIns="0" bIns="0" rtlCol="0" anchor="ctr"/>
+          <a:lstStyle/>
+          <a:p>
+            <a:pPr indent="0" marL="0">
+              <a:buNone/>
+            </a:pPr>
+            <a:r>
+              <a:rPr lang="en-US" sz="3200" b="1" dirty="0">
                 <a:solidFill>
                   <a:srgbClr val="FFFFFF"/>
                 </a:solidFill>
@@ -3418,38 +3805,224 @@
                 <a:ea typeface="Cambria" pitchFamily="34" charset="-122"/>
                 <a:cs typeface="Cambria" pitchFamily="34" charset="-120"/>
               </a:rPr>
-              <a:t>1</a:t>
-            </a:r>
-            <a:endParaRPr lang="en-US" sz="1600" dirty="0"/>
-          </a:p>
-        </p:txBody>
-      </p:sp>
-      <p:sp>
-        <p:nvSpPr>
-          <p:cNvPr id="9" name="Text 7"/>
-          <p:cNvSpPr txBox="1"/>
-          <p:nvPr/>
-        </p:nvSpPr>
-        <p:spPr>
-          <a:xfrm>
-            <a:off x="1600200" y="1947672"/>
-            <a:ext cx="3291840" cy="365760"/>
-          </a:xfrm>
-          <a:prstGeom prst="rect">
-            <a:avLst/>
-          </a:prstGeom>
-          <a:noFill/>
-          <a:ln/>
-        </p:spPr>
-        <p:txBody>
-          <a:bodyPr wrap="square" lIns="0" tIns="0" rIns="0" bIns="0" rtlCol="0" anchor="ctr"/>
-          <a:lstStyle/>
-          <a:p>
-            <a:pPr indent="0" marL="0">
-              <a:buNone/>
-            </a:pPr>
-            <a:r>
-              <a:rPr lang="en-US" sz="1450" b="1" dirty="0">
+              <a:t>91.7%</a:t>
+            </a:r>
+            <a:endParaRPr lang="en-US" sz="3200" dirty="0"/>
+          </a:p>
+        </p:txBody>
+      </p:sp>
+      <p:sp>
+        <p:nvSpPr>
+          <p:cNvPr id="14" name="Text 12"/>
+          <p:cNvSpPr txBox="1"/>
+          <p:nvPr/>
+        </p:nvSpPr>
+        <p:spPr>
+          <a:xfrm>
+            <a:off x="4599432" y="2770632"/>
+            <a:ext cx="2916936" cy="292608"/>
+          </a:xfrm>
+          <a:prstGeom prst="rect">
+            <a:avLst/>
+          </a:prstGeom>
+          <a:noFill/>
+          <a:ln/>
+        </p:spPr>
+        <p:txBody>
+          <a:bodyPr wrap="square" lIns="0" tIns="0" rIns="0" bIns="0" rtlCol="0" anchor="ctr"/>
+          <a:lstStyle/>
+          <a:p>
+            <a:pPr indent="0" marL="0">
+              <a:buNone/>
+            </a:pPr>
+            <a:r>
+              <a:rPr lang="en-US" sz="1250" b="1" dirty="0">
+                <a:solidFill>
+                  <a:srgbClr val="FFFFFF"/>
+                </a:solidFill>
+                <a:latin typeface="Calibri" pitchFamily="34" charset="0"/>
+                <a:ea typeface="Calibri" pitchFamily="34" charset="-122"/>
+                <a:cs typeface="Calibri" pitchFamily="34" charset="-120"/>
+              </a:rPr>
+              <a:t>RAG 검색 적중률</a:t>
+            </a:r>
+            <a:endParaRPr lang="en-US" sz="1250" dirty="0"/>
+          </a:p>
+        </p:txBody>
+      </p:sp>
+      <p:sp>
+        <p:nvSpPr>
+          <p:cNvPr id="15" name="Text 13"/>
+          <p:cNvSpPr txBox="1"/>
+          <p:nvPr/>
+        </p:nvSpPr>
+        <p:spPr>
+          <a:xfrm>
+            <a:off x="4599432" y="3044952"/>
+            <a:ext cx="2916936" cy="256032"/>
+          </a:xfrm>
+          <a:prstGeom prst="rect">
+            <a:avLst/>
+          </a:prstGeom>
+          <a:noFill/>
+          <a:ln/>
+        </p:spPr>
+        <p:txBody>
+          <a:bodyPr wrap="square" lIns="0" tIns="0" rIns="0" bIns="0" rtlCol="0" anchor="ctr"/>
+          <a:lstStyle/>
+          <a:p>
+            <a:pPr indent="0" marL="0">
+              <a:buNone/>
+            </a:pPr>
+            <a:r>
+              <a:rPr lang="en-US" sz="950" b="1" dirty="0">
+                <a:solidFill>
+                  <a:srgbClr val="CBD9FA"/>
+                </a:solidFill>
+                <a:latin typeface="Calibri" pitchFamily="34" charset="0"/>
+                <a:ea typeface="Calibri" pitchFamily="34" charset="-122"/>
+                <a:cs typeface="Calibri" pitchFamily="34" charset="-120"/>
+              </a:rPr>
+              <a:t>95% CI 83.0–96.1%</a:t>
+            </a:r>
+            <a:endParaRPr lang="en-US" sz="950" dirty="0"/>
+          </a:p>
+        </p:txBody>
+      </p:sp>
+      <p:sp>
+        <p:nvSpPr>
+          <p:cNvPr id="16" name="Text 14"/>
+          <p:cNvSpPr txBox="1"/>
+          <p:nvPr/>
+        </p:nvSpPr>
+        <p:spPr>
+          <a:xfrm>
+            <a:off x="4599432" y="3310128"/>
+            <a:ext cx="2916936" cy="411480"/>
+          </a:xfrm>
+          <a:prstGeom prst="rect">
+            <a:avLst/>
+          </a:prstGeom>
+          <a:noFill/>
+          <a:ln/>
+        </p:spPr>
+        <p:txBody>
+          <a:bodyPr wrap="square" lIns="0" tIns="0" rIns="0" bIns="0" rtlCol="0" anchor="ctr"/>
+          <a:lstStyle/>
+          <a:p>
+            <a:pPr indent="0" marL="0">
+              <a:lnSpc>
+                <a:spcPct val="110000"/>
+              </a:lnSpc>
+              <a:buNone/>
+            </a:pPr>
+            <a:r>
+              <a:rPr lang="en-US" sz="830" dirty="0">
+                <a:solidFill>
+                  <a:srgbClr val="CBD9FA"/>
+                </a:solidFill>
+                <a:latin typeface="Calibri" pitchFamily="34" charset="0"/>
+                <a:ea typeface="Calibri" pitchFamily="34" charset="-122"/>
+                <a:cs typeface="Calibri" pitchFamily="34" charset="-120"/>
+              </a:rPr>
+              <a:t>72건 시행 (24개 질문 × 3회), 24개 중 22개는 3회 모두 적중</a:t>
+            </a:r>
+            <a:endParaRPr lang="en-US" sz="830" dirty="0"/>
+          </a:p>
+        </p:txBody>
+      </p:sp>
+      <p:sp>
+        <p:nvSpPr>
+          <p:cNvPr id="17" name="Shape 15"/>
+          <p:cNvSpPr/>
+          <p:nvPr/>
+        </p:nvSpPr>
+        <p:spPr>
+          <a:xfrm>
+            <a:off x="8046720" y="2057400"/>
+            <a:ext cx="3429000" cy="1691640"/>
+          </a:xfrm>
+          <a:prstGeom prst="roundRect">
+            <a:avLst>
+              <a:gd name="adj" fmla="val 4324"/>
+            </a:avLst>
+          </a:prstGeom>
+          <a:solidFill>
+            <a:srgbClr val="F3F5FA"/>
+          </a:solidFill>
+          <a:ln w="12700">
+            <a:solidFill>
+              <a:srgbClr val="E3E7F0"/>
+            </a:solidFill>
+            <a:prstDash val="solid"/>
+          </a:ln>
+        </p:spPr>
+      </p:sp>
+      <p:sp>
+        <p:nvSpPr>
+          <p:cNvPr id="18" name="Text 16"/>
+          <p:cNvSpPr txBox="1"/>
+          <p:nvPr/>
+        </p:nvSpPr>
+        <p:spPr>
+          <a:xfrm>
+            <a:off x="8302752" y="2203704"/>
+            <a:ext cx="2916936" cy="566928"/>
+          </a:xfrm>
+          <a:prstGeom prst="rect">
+            <a:avLst/>
+          </a:prstGeom>
+          <a:noFill/>
+          <a:ln/>
+        </p:spPr>
+        <p:txBody>
+          <a:bodyPr wrap="square" lIns="0" tIns="0" rIns="0" bIns="0" rtlCol="0" anchor="ctr"/>
+          <a:lstStyle/>
+          <a:p>
+            <a:pPr indent="0" marL="0">
+              <a:buNone/>
+            </a:pPr>
+            <a:r>
+              <a:rPr lang="en-US" sz="3200" b="1" dirty="0">
+                <a:solidFill>
+                  <a:srgbClr val="EA4B71"/>
+                </a:solidFill>
+                <a:latin typeface="Cambria" pitchFamily="34" charset="0"/>
+                <a:ea typeface="Cambria" pitchFamily="34" charset="-122"/>
+                <a:cs typeface="Cambria" pitchFamily="34" charset="-120"/>
+              </a:rPr>
+              <a:t>7.35초</a:t>
+            </a:r>
+            <a:endParaRPr lang="en-US" sz="3200" dirty="0"/>
+          </a:p>
+        </p:txBody>
+      </p:sp>
+      <p:sp>
+        <p:nvSpPr>
+          <p:cNvPr id="19" name="Text 17"/>
+          <p:cNvSpPr txBox="1"/>
+          <p:nvPr/>
+        </p:nvSpPr>
+        <p:spPr>
+          <a:xfrm>
+            <a:off x="8302752" y="2770632"/>
+            <a:ext cx="2916936" cy="292608"/>
+          </a:xfrm>
+          <a:prstGeom prst="rect">
+            <a:avLst/>
+          </a:prstGeom>
+          <a:noFill/>
+          <a:ln/>
+        </p:spPr>
+        <p:txBody>
+          <a:bodyPr wrap="square" lIns="0" tIns="0" rIns="0" bIns="0" rtlCol="0" anchor="ctr"/>
+          <a:lstStyle/>
+          <a:p>
+            <a:pPr indent="0" marL="0">
+              <a:buNone/>
+            </a:pPr>
+            <a:r>
+              <a:rPr lang="en-US" sz="1250" b="1" dirty="0">
                 <a:solidFill>
                   <a:srgbClr val="1E2761"/>
                 </a:solidFill>
@@ -3457,38 +4030,38 @@
                 <a:ea typeface="Calibri" pitchFamily="34" charset="-122"/>
                 <a:cs typeface="Calibri" pitchFamily="34" charset="-120"/>
               </a:rPr>
-              <a:t>온톨로지 설계</a:t>
-            </a:r>
-            <a:endParaRPr lang="en-US" sz="1450" dirty="0"/>
-          </a:p>
-        </p:txBody>
-      </p:sp>
-      <p:sp>
-        <p:nvSpPr>
-          <p:cNvPr id="10" name="Text 8"/>
-          <p:cNvSpPr txBox="1"/>
-          <p:nvPr/>
-        </p:nvSpPr>
-        <p:spPr>
-          <a:xfrm>
-            <a:off x="1600200" y="2286000"/>
-            <a:ext cx="3291840" cy="274320"/>
-          </a:xfrm>
-          <a:prstGeom prst="rect">
-            <a:avLst/>
-          </a:prstGeom>
-          <a:noFill/>
-          <a:ln/>
-        </p:spPr>
-        <p:txBody>
-          <a:bodyPr wrap="square" lIns="0" tIns="0" rIns="0" bIns="0" rtlCol="0" anchor="ctr"/>
-          <a:lstStyle/>
-          <a:p>
-            <a:pPr indent="0" marL="0">
-              <a:buNone/>
-            </a:pPr>
-            <a:r>
-              <a:rPr lang="en-US" sz="1050" b="1" dirty="0">
+              <a:t>평균 응답 시간</a:t>
+            </a:r>
+            <a:endParaRPr lang="en-US" sz="1250" dirty="0"/>
+          </a:p>
+        </p:txBody>
+      </p:sp>
+      <p:sp>
+        <p:nvSpPr>
+          <p:cNvPr id="20" name="Text 18"/>
+          <p:cNvSpPr txBox="1"/>
+          <p:nvPr/>
+        </p:nvSpPr>
+        <p:spPr>
+          <a:xfrm>
+            <a:off x="8302752" y="3044952"/>
+            <a:ext cx="2916936" cy="256032"/>
+          </a:xfrm>
+          <a:prstGeom prst="rect">
+            <a:avLst/>
+          </a:prstGeom>
+          <a:noFill/>
+          <a:ln/>
+        </p:spPr>
+        <p:txBody>
+          <a:bodyPr wrap="square" lIns="0" tIns="0" rIns="0" bIns="0" rtlCol="0" anchor="ctr"/>
+          <a:lstStyle/>
+          <a:p>
+            <a:pPr indent="0" marL="0">
+              <a:buNone/>
+            </a:pPr>
+            <a:r>
+              <a:rPr lang="en-US" sz="950" b="1" dirty="0">
                 <a:solidFill>
                   <a:srgbClr val="0EA5E9"/>
                 </a:solidFill>
@@ -3496,22 +4069,717 @@
                 <a:ea typeface="Calibri" pitchFamily="34" charset="-122"/>
                 <a:cs typeface="Calibri" pitchFamily="34" charset="-120"/>
               </a:rPr>
-              <a:t>07.22 – 07.25</a:t>
-            </a:r>
-            <a:endParaRPr lang="en-US" sz="1050" dirty="0"/>
-          </a:p>
-        </p:txBody>
-      </p:sp>
-      <p:sp>
-        <p:nvSpPr>
-          <p:cNvPr id="11" name="Text 9"/>
-          <p:cNvSpPr txBox="1"/>
-          <p:nvPr/>
-        </p:nvSpPr>
-        <p:spPr>
-          <a:xfrm>
-            <a:off x="5074920" y="1965960"/>
-            <a:ext cx="6492240" cy="640080"/>
+              <a:t>중앙값 7.03초 · 표준편차 2.92초</a:t>
+            </a:r>
+            <a:endParaRPr lang="en-US" sz="950" dirty="0"/>
+          </a:p>
+        </p:txBody>
+      </p:sp>
+      <p:sp>
+        <p:nvSpPr>
+          <p:cNvPr id="21" name="Text 19"/>
+          <p:cNvSpPr txBox="1"/>
+          <p:nvPr/>
+        </p:nvSpPr>
+        <p:spPr>
+          <a:xfrm>
+            <a:off x="8302752" y="3310128"/>
+            <a:ext cx="2916936" cy="411480"/>
+          </a:xfrm>
+          <a:prstGeom prst="rect">
+            <a:avLst/>
+          </a:prstGeom>
+          <a:noFill/>
+          <a:ln/>
+        </p:spPr>
+        <p:txBody>
+          <a:bodyPr wrap="square" lIns="0" tIns="0" rIns="0" bIns="0" rtlCol="0" anchor="ctr"/>
+          <a:lstStyle/>
+          <a:p>
+            <a:pPr indent="0" marL="0">
+              <a:lnSpc>
+                <a:spcPct val="110000"/>
+              </a:lnSpc>
+              <a:buNone/>
+            </a:pPr>
+            <a:r>
+              <a:rPr lang="en-US" sz="830" dirty="0">
+                <a:solidFill>
+                  <a:srgbClr val="8A93A8"/>
+                </a:solidFill>
+                <a:latin typeface="Calibri" pitchFamily="34" charset="0"/>
+                <a:ea typeface="Calibri" pitchFamily="34" charset="-122"/>
+                <a:cs typeface="Calibri" pitchFamily="34" charset="-120"/>
+              </a:rPr>
+              <a:t>75건 시행 (5개 의도 × 5개 질문 × 3회), 첫 토큰까지는 평균 0.6초</a:t>
+            </a:r>
+            <a:endParaRPr lang="en-US" sz="830" dirty="0"/>
+          </a:p>
+        </p:txBody>
+      </p:sp>
+      <p:sp>
+        <p:nvSpPr>
+          <p:cNvPr id="22" name="Text 20"/>
+          <p:cNvSpPr txBox="1"/>
+          <p:nvPr/>
+        </p:nvSpPr>
+        <p:spPr>
+          <a:xfrm>
+            <a:off x="640080" y="3913632"/>
+            <a:ext cx="3657600" cy="274320"/>
+          </a:xfrm>
+          <a:prstGeom prst="rect">
+            <a:avLst/>
+          </a:prstGeom>
+          <a:noFill/>
+          <a:ln/>
+        </p:spPr>
+        <p:txBody>
+          <a:bodyPr wrap="square" lIns="0" tIns="0" rIns="0" bIns="0" rtlCol="0" anchor="ctr"/>
+          <a:lstStyle/>
+          <a:p>
+            <a:pPr indent="0" marL="0">
+              <a:buNone/>
+            </a:pPr>
+            <a:r>
+              <a:rPr lang="en-US" sz="1150" b="1" dirty="0">
+                <a:solidFill>
+                  <a:srgbClr val="1E2761"/>
+                </a:solidFill>
+                <a:latin typeface="Calibri" pitchFamily="34" charset="0"/>
+                <a:ea typeface="Calibri" pitchFamily="34" charset="-122"/>
+                <a:cs typeface="Calibri" pitchFamily="34" charset="-120"/>
+              </a:rPr>
+              <a:t>의도별 응답 시간 (평균)</a:t>
+            </a:r>
+            <a:endParaRPr lang="en-US" sz="1150" dirty="0"/>
+          </a:p>
+        </p:txBody>
+      </p:sp>
+      <p:sp>
+        <p:nvSpPr>
+          <p:cNvPr id="23" name="Shape 21"/>
+          <p:cNvSpPr/>
+          <p:nvPr/>
+        </p:nvSpPr>
+        <p:spPr>
+          <a:xfrm>
+            <a:off x="640080" y="4224528"/>
+            <a:ext cx="1975104" cy="658368"/>
+          </a:xfrm>
+          <a:prstGeom prst="roundRect">
+            <a:avLst>
+              <a:gd name="adj" fmla="val 8333"/>
+            </a:avLst>
+          </a:prstGeom>
+          <a:solidFill>
+            <a:srgbClr val="F3F5FA"/>
+          </a:solidFill>
+          <a:ln w="9525">
+            <a:solidFill>
+              <a:srgbClr val="E3E7F0"/>
+            </a:solidFill>
+            <a:prstDash val="solid"/>
+          </a:ln>
+        </p:spPr>
+      </p:sp>
+      <p:sp>
+        <p:nvSpPr>
+          <p:cNvPr id="24" name="Text 22"/>
+          <p:cNvSpPr txBox="1"/>
+          <p:nvPr/>
+        </p:nvSpPr>
+        <p:spPr>
+          <a:xfrm>
+            <a:off x="640080" y="4279392"/>
+            <a:ext cx="1975104" cy="320040"/>
+          </a:xfrm>
+          <a:prstGeom prst="rect">
+            <a:avLst/>
+          </a:prstGeom>
+          <a:noFill/>
+          <a:ln/>
+        </p:spPr>
+        <p:txBody>
+          <a:bodyPr wrap="square" lIns="0" tIns="0" rIns="0" bIns="0" rtlCol="0" anchor="ctr"/>
+          <a:lstStyle/>
+          <a:p>
+            <a:pPr algn="ctr" indent="0" marL="0">
+              <a:buNone/>
+            </a:pPr>
+            <a:r>
+              <a:rPr lang="en-US" sz="1550" b="1" dirty="0">
+                <a:solidFill>
+                  <a:srgbClr val="0EA5E9"/>
+                </a:solidFill>
+                <a:latin typeface="Cambria" pitchFamily="34" charset="0"/>
+                <a:ea typeface="Cambria" pitchFamily="34" charset="-122"/>
+                <a:cs typeface="Cambria" pitchFamily="34" charset="-120"/>
+              </a:rPr>
+              <a:t>6.50초</a:t>
+            </a:r>
+            <a:endParaRPr lang="en-US" sz="1550" dirty="0"/>
+          </a:p>
+        </p:txBody>
+      </p:sp>
+      <p:sp>
+        <p:nvSpPr>
+          <p:cNvPr id="25" name="Text 23"/>
+          <p:cNvSpPr txBox="1"/>
+          <p:nvPr/>
+        </p:nvSpPr>
+        <p:spPr>
+          <a:xfrm>
+            <a:off x="640080" y="4590288"/>
+            <a:ext cx="1975104" cy="274320"/>
+          </a:xfrm>
+          <a:prstGeom prst="rect">
+            <a:avLst/>
+          </a:prstGeom>
+          <a:noFill/>
+          <a:ln/>
+        </p:spPr>
+        <p:txBody>
+          <a:bodyPr wrap="square" lIns="0" tIns="0" rIns="0" bIns="0" rtlCol="0" anchor="ctr"/>
+          <a:lstStyle/>
+          <a:p>
+            <a:pPr algn="ctr" indent="0" marL="0">
+              <a:buNone/>
+            </a:pPr>
+            <a:r>
+              <a:rPr lang="en-US" sz="900" dirty="0">
+                <a:solidFill>
+                  <a:srgbClr val="3F4A63"/>
+                </a:solidFill>
+                <a:latin typeface="Calibri" pitchFamily="34" charset="0"/>
+                <a:ea typeface="Calibri" pitchFamily="34" charset="-122"/>
+                <a:cs typeface="Calibri" pitchFamily="34" charset="-120"/>
+              </a:rPr>
+              <a:t>일반 질문</a:t>
+            </a:r>
+            <a:endParaRPr lang="en-US" sz="900" dirty="0"/>
+          </a:p>
+        </p:txBody>
+      </p:sp>
+      <p:sp>
+        <p:nvSpPr>
+          <p:cNvPr id="26" name="Shape 24"/>
+          <p:cNvSpPr/>
+          <p:nvPr/>
+        </p:nvSpPr>
+        <p:spPr>
+          <a:xfrm>
+            <a:off x="2724912" y="4224528"/>
+            <a:ext cx="1975104" cy="658368"/>
+          </a:xfrm>
+          <a:prstGeom prst="roundRect">
+            <a:avLst>
+              <a:gd name="adj" fmla="val 8333"/>
+            </a:avLst>
+          </a:prstGeom>
+          <a:solidFill>
+            <a:srgbClr val="F3F5FA"/>
+          </a:solidFill>
+          <a:ln w="9525">
+            <a:solidFill>
+              <a:srgbClr val="E3E7F0"/>
+            </a:solidFill>
+            <a:prstDash val="solid"/>
+          </a:ln>
+        </p:spPr>
+      </p:sp>
+      <p:sp>
+        <p:nvSpPr>
+          <p:cNvPr id="27" name="Text 25"/>
+          <p:cNvSpPr txBox="1"/>
+          <p:nvPr/>
+        </p:nvSpPr>
+        <p:spPr>
+          <a:xfrm>
+            <a:off x="2724912" y="4279392"/>
+            <a:ext cx="1975104" cy="320040"/>
+          </a:xfrm>
+          <a:prstGeom prst="rect">
+            <a:avLst/>
+          </a:prstGeom>
+          <a:noFill/>
+          <a:ln/>
+        </p:spPr>
+        <p:txBody>
+          <a:bodyPr wrap="square" lIns="0" tIns="0" rIns="0" bIns="0" rtlCol="0" anchor="ctr"/>
+          <a:lstStyle/>
+          <a:p>
+            <a:pPr algn="ctr" indent="0" marL="0">
+              <a:buNone/>
+            </a:pPr>
+            <a:r>
+              <a:rPr lang="en-US" sz="1550" b="1" dirty="0">
+                <a:solidFill>
+                  <a:srgbClr val="0EA5E9"/>
+                </a:solidFill>
+                <a:latin typeface="Cambria" pitchFamily="34" charset="0"/>
+                <a:ea typeface="Cambria" pitchFamily="34" charset="-122"/>
+                <a:cs typeface="Cambria" pitchFamily="34" charset="-120"/>
+              </a:rPr>
+              <a:t>12.03초</a:t>
+            </a:r>
+            <a:endParaRPr lang="en-US" sz="1550" dirty="0"/>
+          </a:p>
+        </p:txBody>
+      </p:sp>
+      <p:sp>
+        <p:nvSpPr>
+          <p:cNvPr id="28" name="Text 26"/>
+          <p:cNvSpPr txBox="1"/>
+          <p:nvPr/>
+        </p:nvSpPr>
+        <p:spPr>
+          <a:xfrm>
+            <a:off x="2724912" y="4590288"/>
+            <a:ext cx="1975104" cy="274320"/>
+          </a:xfrm>
+          <a:prstGeom prst="rect">
+            <a:avLst/>
+          </a:prstGeom>
+          <a:noFill/>
+          <a:ln/>
+        </p:spPr>
+        <p:txBody>
+          <a:bodyPr wrap="square" lIns="0" tIns="0" rIns="0" bIns="0" rtlCol="0" anchor="ctr"/>
+          <a:lstStyle/>
+          <a:p>
+            <a:pPr algn="ctr" indent="0" marL="0">
+              <a:buNone/>
+            </a:pPr>
+            <a:r>
+              <a:rPr lang="en-US" sz="900" dirty="0">
+                <a:solidFill>
+                  <a:srgbClr val="3F4A63"/>
+                </a:solidFill>
+                <a:latin typeface="Calibri" pitchFamily="34" charset="0"/>
+                <a:ea typeface="Calibri" pitchFamily="34" charset="-122"/>
+                <a:cs typeface="Calibri" pitchFamily="34" charset="-120"/>
+              </a:rPr>
+              <a:t>워크플로우 생성</a:t>
+            </a:r>
+            <a:endParaRPr lang="en-US" sz="900" dirty="0"/>
+          </a:p>
+        </p:txBody>
+      </p:sp>
+      <p:sp>
+        <p:nvSpPr>
+          <p:cNvPr id="29" name="Shape 27"/>
+          <p:cNvSpPr/>
+          <p:nvPr/>
+        </p:nvSpPr>
+        <p:spPr>
+          <a:xfrm>
+            <a:off x="4809744" y="4224528"/>
+            <a:ext cx="1975104" cy="658368"/>
+          </a:xfrm>
+          <a:prstGeom prst="roundRect">
+            <a:avLst>
+              <a:gd name="adj" fmla="val 8333"/>
+            </a:avLst>
+          </a:prstGeom>
+          <a:solidFill>
+            <a:srgbClr val="F3F5FA"/>
+          </a:solidFill>
+          <a:ln w="9525">
+            <a:solidFill>
+              <a:srgbClr val="E3E7F0"/>
+            </a:solidFill>
+            <a:prstDash val="solid"/>
+          </a:ln>
+        </p:spPr>
+      </p:sp>
+      <p:sp>
+        <p:nvSpPr>
+          <p:cNvPr id="30" name="Text 28"/>
+          <p:cNvSpPr txBox="1"/>
+          <p:nvPr/>
+        </p:nvSpPr>
+        <p:spPr>
+          <a:xfrm>
+            <a:off x="4809744" y="4279392"/>
+            <a:ext cx="1975104" cy="320040"/>
+          </a:xfrm>
+          <a:prstGeom prst="rect">
+            <a:avLst/>
+          </a:prstGeom>
+          <a:noFill/>
+          <a:ln/>
+        </p:spPr>
+        <p:txBody>
+          <a:bodyPr wrap="square" lIns="0" tIns="0" rIns="0" bIns="0" rtlCol="0" anchor="ctr"/>
+          <a:lstStyle/>
+          <a:p>
+            <a:pPr algn="ctr" indent="0" marL="0">
+              <a:buNone/>
+            </a:pPr>
+            <a:r>
+              <a:rPr lang="en-US" sz="1550" b="1" dirty="0">
+                <a:solidFill>
+                  <a:srgbClr val="0EA5E9"/>
+                </a:solidFill>
+                <a:latin typeface="Cambria" pitchFamily="34" charset="0"/>
+                <a:ea typeface="Cambria" pitchFamily="34" charset="-122"/>
+                <a:cs typeface="Cambria" pitchFamily="34" charset="-120"/>
+              </a:rPr>
+              <a:t>7.49초</a:t>
+            </a:r>
+            <a:endParaRPr lang="en-US" sz="1550" dirty="0"/>
+          </a:p>
+        </p:txBody>
+      </p:sp>
+      <p:sp>
+        <p:nvSpPr>
+          <p:cNvPr id="31" name="Text 29"/>
+          <p:cNvSpPr txBox="1"/>
+          <p:nvPr/>
+        </p:nvSpPr>
+        <p:spPr>
+          <a:xfrm>
+            <a:off x="4809744" y="4590288"/>
+            <a:ext cx="1975104" cy="274320"/>
+          </a:xfrm>
+          <a:prstGeom prst="rect">
+            <a:avLst/>
+          </a:prstGeom>
+          <a:noFill/>
+          <a:ln/>
+        </p:spPr>
+        <p:txBody>
+          <a:bodyPr wrap="square" lIns="0" tIns="0" rIns="0" bIns="0" rtlCol="0" anchor="ctr"/>
+          <a:lstStyle/>
+          <a:p>
+            <a:pPr algn="ctr" indent="0" marL="0">
+              <a:buNone/>
+            </a:pPr>
+            <a:r>
+              <a:rPr lang="en-US" sz="900" dirty="0">
+                <a:solidFill>
+                  <a:srgbClr val="3F4A63"/>
+                </a:solidFill>
+                <a:latin typeface="Calibri" pitchFamily="34" charset="0"/>
+                <a:ea typeface="Calibri" pitchFamily="34" charset="-122"/>
+                <a:cs typeface="Calibri" pitchFamily="34" charset="-120"/>
+              </a:rPr>
+              <a:t>에러 진단</a:t>
+            </a:r>
+            <a:endParaRPr lang="en-US" sz="900" dirty="0"/>
+          </a:p>
+        </p:txBody>
+      </p:sp>
+      <p:sp>
+        <p:nvSpPr>
+          <p:cNvPr id="32" name="Shape 30"/>
+          <p:cNvSpPr/>
+          <p:nvPr/>
+        </p:nvSpPr>
+        <p:spPr>
+          <a:xfrm>
+            <a:off x="6894576" y="4224528"/>
+            <a:ext cx="1975104" cy="658368"/>
+          </a:xfrm>
+          <a:prstGeom prst="roundRect">
+            <a:avLst>
+              <a:gd name="adj" fmla="val 8333"/>
+            </a:avLst>
+          </a:prstGeom>
+          <a:solidFill>
+            <a:srgbClr val="F3F5FA"/>
+          </a:solidFill>
+          <a:ln w="9525">
+            <a:solidFill>
+              <a:srgbClr val="E3E7F0"/>
+            </a:solidFill>
+            <a:prstDash val="solid"/>
+          </a:ln>
+        </p:spPr>
+      </p:sp>
+      <p:sp>
+        <p:nvSpPr>
+          <p:cNvPr id="33" name="Text 31"/>
+          <p:cNvSpPr txBox="1"/>
+          <p:nvPr/>
+        </p:nvSpPr>
+        <p:spPr>
+          <a:xfrm>
+            <a:off x="6894576" y="4279392"/>
+            <a:ext cx="1975104" cy="320040"/>
+          </a:xfrm>
+          <a:prstGeom prst="rect">
+            <a:avLst/>
+          </a:prstGeom>
+          <a:noFill/>
+          <a:ln/>
+        </p:spPr>
+        <p:txBody>
+          <a:bodyPr wrap="square" lIns="0" tIns="0" rIns="0" bIns="0" rtlCol="0" anchor="ctr"/>
+          <a:lstStyle/>
+          <a:p>
+            <a:pPr algn="ctr" indent="0" marL="0">
+              <a:buNone/>
+            </a:pPr>
+            <a:r>
+              <a:rPr lang="en-US" sz="1550" b="1" dirty="0">
+                <a:solidFill>
+                  <a:srgbClr val="0EA5E9"/>
+                </a:solidFill>
+                <a:latin typeface="Cambria" pitchFamily="34" charset="0"/>
+                <a:ea typeface="Cambria" pitchFamily="34" charset="-122"/>
+                <a:cs typeface="Cambria" pitchFamily="34" charset="-120"/>
+              </a:rPr>
+              <a:t>6.84초</a:t>
+            </a:r>
+            <a:endParaRPr lang="en-US" sz="1550" dirty="0"/>
+          </a:p>
+        </p:txBody>
+      </p:sp>
+      <p:sp>
+        <p:nvSpPr>
+          <p:cNvPr id="34" name="Text 32"/>
+          <p:cNvSpPr txBox="1"/>
+          <p:nvPr/>
+        </p:nvSpPr>
+        <p:spPr>
+          <a:xfrm>
+            <a:off x="6894576" y="4590288"/>
+            <a:ext cx="1975104" cy="274320"/>
+          </a:xfrm>
+          <a:prstGeom prst="rect">
+            <a:avLst/>
+          </a:prstGeom>
+          <a:noFill/>
+          <a:ln/>
+        </p:spPr>
+        <p:txBody>
+          <a:bodyPr wrap="square" lIns="0" tIns="0" rIns="0" bIns="0" rtlCol="0" anchor="ctr"/>
+          <a:lstStyle/>
+          <a:p>
+            <a:pPr algn="ctr" indent="0" marL="0">
+              <a:buNone/>
+            </a:pPr>
+            <a:r>
+              <a:rPr lang="en-US" sz="900" dirty="0">
+                <a:solidFill>
+                  <a:srgbClr val="3F4A63"/>
+                </a:solidFill>
+                <a:latin typeface="Calibri" pitchFamily="34" charset="0"/>
+                <a:ea typeface="Calibri" pitchFamily="34" charset="-122"/>
+                <a:cs typeface="Calibri" pitchFamily="34" charset="-120"/>
+              </a:rPr>
+              <a:t>커리큘럼</a:t>
+            </a:r>
+            <a:endParaRPr lang="en-US" sz="900" dirty="0"/>
+          </a:p>
+        </p:txBody>
+      </p:sp>
+      <p:sp>
+        <p:nvSpPr>
+          <p:cNvPr id="35" name="Shape 33"/>
+          <p:cNvSpPr/>
+          <p:nvPr/>
+        </p:nvSpPr>
+        <p:spPr>
+          <a:xfrm>
+            <a:off x="8979408" y="4224528"/>
+            <a:ext cx="1975104" cy="658368"/>
+          </a:xfrm>
+          <a:prstGeom prst="roundRect">
+            <a:avLst>
+              <a:gd name="adj" fmla="val 8333"/>
+            </a:avLst>
+          </a:prstGeom>
+          <a:solidFill>
+            <a:srgbClr val="F3F5FA"/>
+          </a:solidFill>
+          <a:ln w="9525">
+            <a:solidFill>
+              <a:srgbClr val="E3E7F0"/>
+            </a:solidFill>
+            <a:prstDash val="solid"/>
+          </a:ln>
+        </p:spPr>
+      </p:sp>
+      <p:sp>
+        <p:nvSpPr>
+          <p:cNvPr id="36" name="Text 34"/>
+          <p:cNvSpPr txBox="1"/>
+          <p:nvPr/>
+        </p:nvSpPr>
+        <p:spPr>
+          <a:xfrm>
+            <a:off x="8979408" y="4279392"/>
+            <a:ext cx="1975104" cy="320040"/>
+          </a:xfrm>
+          <a:prstGeom prst="rect">
+            <a:avLst/>
+          </a:prstGeom>
+          <a:noFill/>
+          <a:ln/>
+        </p:spPr>
+        <p:txBody>
+          <a:bodyPr wrap="square" lIns="0" tIns="0" rIns="0" bIns="0" rtlCol="0" anchor="ctr"/>
+          <a:lstStyle/>
+          <a:p>
+            <a:pPr algn="ctr" indent="0" marL="0">
+              <a:buNone/>
+            </a:pPr>
+            <a:r>
+              <a:rPr lang="en-US" sz="1550" b="1" dirty="0">
+                <a:solidFill>
+                  <a:srgbClr val="0EA5E9"/>
+                </a:solidFill>
+                <a:latin typeface="Cambria" pitchFamily="34" charset="0"/>
+                <a:ea typeface="Cambria" pitchFamily="34" charset="-122"/>
+                <a:cs typeface="Cambria" pitchFamily="34" charset="-120"/>
+              </a:rPr>
+              <a:t>3.91초</a:t>
+            </a:r>
+            <a:endParaRPr lang="en-US" sz="1550" dirty="0"/>
+          </a:p>
+        </p:txBody>
+      </p:sp>
+      <p:sp>
+        <p:nvSpPr>
+          <p:cNvPr id="37" name="Text 35"/>
+          <p:cNvSpPr txBox="1"/>
+          <p:nvPr/>
+        </p:nvSpPr>
+        <p:spPr>
+          <a:xfrm>
+            <a:off x="8979408" y="4590288"/>
+            <a:ext cx="1975104" cy="274320"/>
+          </a:xfrm>
+          <a:prstGeom prst="rect">
+            <a:avLst/>
+          </a:prstGeom>
+          <a:noFill/>
+          <a:ln/>
+        </p:spPr>
+        <p:txBody>
+          <a:bodyPr wrap="square" lIns="0" tIns="0" rIns="0" bIns="0" rtlCol="0" anchor="ctr"/>
+          <a:lstStyle/>
+          <a:p>
+            <a:pPr algn="ctr" indent="0" marL="0">
+              <a:buNone/>
+            </a:pPr>
+            <a:r>
+              <a:rPr lang="en-US" sz="900" dirty="0">
+                <a:solidFill>
+                  <a:srgbClr val="3F4A63"/>
+                </a:solidFill>
+                <a:latin typeface="Calibri" pitchFamily="34" charset="0"/>
+                <a:ea typeface="Calibri" pitchFamily="34" charset="-122"/>
+                <a:cs typeface="Calibri" pitchFamily="34" charset="-120"/>
+              </a:rPr>
+              <a:t>표현식 생성</a:t>
+            </a:r>
+            <a:endParaRPr lang="en-US" sz="900" dirty="0"/>
+          </a:p>
+        </p:txBody>
+      </p:sp>
+      <p:sp>
+        <p:nvSpPr>
+          <p:cNvPr id="38" name="Shape 36"/>
+          <p:cNvSpPr/>
+          <p:nvPr/>
+        </p:nvSpPr>
+        <p:spPr>
+          <a:xfrm>
+            <a:off x="640080" y="5047488"/>
+            <a:ext cx="10881360" cy="530352"/>
+          </a:xfrm>
+          <a:prstGeom prst="roundRect">
+            <a:avLst>
+              <a:gd name="adj" fmla="val 13793"/>
+            </a:avLst>
+          </a:prstGeom>
+          <a:solidFill>
+            <a:srgbClr val="1E2761"/>
+          </a:solidFill>
+          <a:ln/>
+        </p:spPr>
+      </p:sp>
+      <p:sp>
+        <p:nvSpPr>
+          <p:cNvPr id="39" name="Text 37"/>
+          <p:cNvSpPr txBox="1"/>
+          <p:nvPr/>
+        </p:nvSpPr>
+        <p:spPr>
+          <a:xfrm>
+            <a:off x="868680" y="5047488"/>
+            <a:ext cx="10424160" cy="530352"/>
+          </a:xfrm>
+          <a:prstGeom prst="rect">
+            <a:avLst/>
+          </a:prstGeom>
+          <a:noFill/>
+          <a:ln/>
+        </p:spPr>
+        <p:txBody>
+          <a:bodyPr wrap="square" lIns="0" tIns="0" rIns="0" bIns="0" rtlCol="0" anchor="ctr"/>
+          <a:lstStyle/>
+          <a:p>
+            <a:pPr indent="0" marL="0">
+              <a:buNone/>
+            </a:pPr>
+            <a:r>
+              <a:rPr lang="en-US" sz="1100" b="1" dirty="0">
+                <a:solidFill>
+                  <a:srgbClr val="CBD9FA"/>
+                </a:solidFill>
+                <a:latin typeface="Calibri" pitchFamily="34" charset="0"/>
+                <a:ea typeface="Calibri" pitchFamily="34" charset="-122"/>
+                <a:cs typeface="Calibri" pitchFamily="34" charset="-120"/>
+              </a:rPr>
+              <a:t>워크플로우 생성 → n8n 실제 반영 성공률  </a:t>
+            </a:r>
+            <a:pPr indent="0" marL="0">
+              <a:buNone/>
+            </a:pPr>
+            <a:r>
+              <a:rPr lang="en-US" sz="1600" b="1" dirty="0">
+                <a:solidFill>
+                  <a:srgbClr val="FFFFFF"/>
+                </a:solidFill>
+                <a:latin typeface="Calibri" pitchFamily="34" charset="0"/>
+                <a:ea typeface="Calibri" pitchFamily="34" charset="-122"/>
+                <a:cs typeface="Calibri" pitchFamily="34" charset="-120"/>
+              </a:rPr>
+              <a:t>100%</a:t>
+            </a:r>
+            <a:pPr indent="0" marL="0">
+              <a:buNone/>
+            </a:pPr>
+            <a:r>
+              <a:rPr lang="en-US" sz="1050" dirty="0">
+                <a:solidFill>
+                  <a:srgbClr val="CBD9FA"/>
+                </a:solidFill>
+                <a:latin typeface="Calibri" pitchFamily="34" charset="0"/>
+                <a:ea typeface="Calibri" pitchFamily="34" charset="-122"/>
+                <a:cs typeface="Calibri" pitchFamily="34" charset="-120"/>
+              </a:rPr>
+              <a:t>  (21/21, 95% CI 84.5–100%) · REG 자동 수정 평균 2.33건/건</a:t>
+            </a:r>
+            <a:endParaRPr lang="en-US" sz="1100" dirty="0"/>
+          </a:p>
+        </p:txBody>
+      </p:sp>
+      <p:sp>
+        <p:nvSpPr>
+          <p:cNvPr id="40" name="Text 38"/>
+          <p:cNvSpPr txBox="1"/>
+          <p:nvPr/>
+        </p:nvSpPr>
+        <p:spPr>
+          <a:xfrm>
+            <a:off x="640080" y="5742432"/>
+            <a:ext cx="10881360" cy="548640"/>
           </a:xfrm>
           <a:prstGeom prst="rect">
             <a:avLst/>
@@ -3530,105 +4798,7 @@
               <a:buNone/>
             </a:pPr>
             <a:r>
-              <a:rPr lang="en-US" sz="1150" dirty="0">
-                <a:solidFill>
-                  <a:srgbClr val="3F4A63"/>
-                </a:solidFill>
-                <a:latin typeface="Calibri" pitchFamily="34" charset="0"/>
-                <a:ea typeface="Calibri" pitchFamily="34" charset="-122"/>
-                <a:cs typeface="Calibri" pitchFamily="34" charset="-120"/>
-              </a:rPr>
-              <a:t>453개 노드의 관계·제약조건·모범 패턴을 정리한 지식 데이터베이스 완성</a:t>
-            </a:r>
-            <a:endParaRPr lang="en-US" sz="1150" dirty="0"/>
-          </a:p>
-        </p:txBody>
-      </p:sp>
-      <p:sp>
-        <p:nvSpPr>
-          <p:cNvPr id="12" name="Shape 10"/>
-          <p:cNvSpPr/>
-          <p:nvPr/>
-        </p:nvSpPr>
-        <p:spPr>
-          <a:xfrm>
-            <a:off x="777240" y="2807208"/>
-            <a:ext cx="548640" cy="548640"/>
-          </a:xfrm>
-          <a:prstGeom prst="ellipse">
-            <a:avLst/>
-          </a:prstGeom>
-          <a:solidFill>
-            <a:srgbClr val="1E2761"/>
-          </a:solidFill>
-          <a:ln/>
-        </p:spPr>
-      </p:sp>
-      <p:sp>
-        <p:nvSpPr>
-          <p:cNvPr id="13" name="Text 11"/>
-          <p:cNvSpPr txBox="1"/>
-          <p:nvPr/>
-        </p:nvSpPr>
-        <p:spPr>
-          <a:xfrm>
-            <a:off x="777240" y="2807208"/>
-            <a:ext cx="548640" cy="548640"/>
-          </a:xfrm>
-          <a:prstGeom prst="rect">
-            <a:avLst/>
-          </a:prstGeom>
-          <a:noFill/>
-          <a:ln/>
-        </p:spPr>
-        <p:txBody>
-          <a:bodyPr wrap="square" lIns="0" tIns="0" rIns="0" bIns="0" rtlCol="0" anchor="ctr"/>
-          <a:lstStyle/>
-          <a:p>
-            <a:pPr algn="ctr" indent="0" marL="0">
-              <a:buNone/>
-            </a:pPr>
-            <a:r>
-              <a:rPr lang="en-US" sz="1600" b="1" dirty="0">
-                <a:solidFill>
-                  <a:srgbClr val="FFFFFF"/>
-                </a:solidFill>
-                <a:latin typeface="Cambria" pitchFamily="34" charset="0"/>
-                <a:ea typeface="Cambria" pitchFamily="34" charset="-122"/>
-                <a:cs typeface="Cambria" pitchFamily="34" charset="-120"/>
-              </a:rPr>
-              <a:t>2</a:t>
-            </a:r>
-            <a:endParaRPr lang="en-US" sz="1600" dirty="0"/>
-          </a:p>
-        </p:txBody>
-      </p:sp>
-      <p:sp>
-        <p:nvSpPr>
-          <p:cNvPr id="14" name="Text 12"/>
-          <p:cNvSpPr txBox="1"/>
-          <p:nvPr/>
-        </p:nvSpPr>
-        <p:spPr>
-          <a:xfrm>
-            <a:off x="1600200" y="2788920"/>
-            <a:ext cx="3291840" cy="365760"/>
-          </a:xfrm>
-          <a:prstGeom prst="rect">
-            <a:avLst/>
-          </a:prstGeom>
-          <a:noFill/>
-          <a:ln/>
-        </p:spPr>
-        <p:txBody>
-          <a:bodyPr wrap="square" lIns="0" tIns="0" rIns="0" bIns="0" rtlCol="0" anchor="ctr"/>
-          <a:lstStyle/>
-          <a:p>
-            <a:pPr indent="0" marL="0">
-              <a:buNone/>
-            </a:pPr>
-            <a:r>
-              <a:rPr lang="en-US" sz="1450" b="1" dirty="0">
+              <a:rPr lang="en-US" sz="1050" b="1" dirty="0">
                 <a:solidFill>
                   <a:srgbClr val="1E2761"/>
                 </a:solidFill>
@@ -3636,72 +4806,8 @@
                 <a:ea typeface="Calibri" pitchFamily="34" charset="-122"/>
                 <a:cs typeface="Calibri" pitchFamily="34" charset="-120"/>
               </a:rPr>
-              <a:t>RAG &amp; 검증 엔진 개발</a:t>
-            </a:r>
-            <a:endParaRPr lang="en-US" sz="1450" dirty="0"/>
-          </a:p>
-        </p:txBody>
-      </p:sp>
-      <p:sp>
-        <p:nvSpPr>
-          <p:cNvPr id="15" name="Text 13"/>
-          <p:cNvSpPr txBox="1"/>
-          <p:nvPr/>
-        </p:nvSpPr>
-        <p:spPr>
-          <a:xfrm>
-            <a:off x="1600200" y="3127248"/>
-            <a:ext cx="3291840" cy="274320"/>
-          </a:xfrm>
-          <a:prstGeom prst="rect">
-            <a:avLst/>
-          </a:prstGeom>
-          <a:noFill/>
-          <a:ln/>
-        </p:spPr>
-        <p:txBody>
-          <a:bodyPr wrap="square" lIns="0" tIns="0" rIns="0" bIns="0" rtlCol="0" anchor="ctr"/>
-          <a:lstStyle/>
-          <a:p>
-            <a:pPr indent="0" marL="0">
-              <a:buNone/>
-            </a:pPr>
-            <a:r>
-              <a:rPr lang="en-US" sz="1050" b="1" dirty="0">
-                <a:solidFill>
-                  <a:srgbClr val="0EA5E9"/>
-                </a:solidFill>
-                <a:latin typeface="Calibri" pitchFamily="34" charset="0"/>
-                <a:ea typeface="Calibri" pitchFamily="34" charset="-122"/>
-                <a:cs typeface="Calibri" pitchFamily="34" charset="-120"/>
-              </a:rPr>
-              <a:t>07.26 – 07.30</a:t>
-            </a:r>
-            <a:endParaRPr lang="en-US" sz="1050" dirty="0"/>
-          </a:p>
-        </p:txBody>
-      </p:sp>
-      <p:sp>
-        <p:nvSpPr>
-          <p:cNvPr id="16" name="Text 14"/>
-          <p:cNvSpPr txBox="1"/>
-          <p:nvPr/>
-        </p:nvSpPr>
-        <p:spPr>
-          <a:xfrm>
-            <a:off x="5074920" y="2807208"/>
-            <a:ext cx="6492240" cy="640080"/>
-          </a:xfrm>
-          <a:prstGeom prst="rect">
-            <a:avLst/>
-          </a:prstGeom>
-          <a:noFill/>
-          <a:ln/>
-        </p:spPr>
-        <p:txBody>
-          <a:bodyPr wrap="square" lIns="0" tIns="0" rIns="0" bIns="0" rtlCol="0" anchor="ctr"/>
-          <a:lstStyle/>
-          <a:p>
+              <a:t>발견한 개선점 — </a:t>
+            </a:r>
             <a:pPr indent="0" marL="0">
               <a:lnSpc>
                 <a:spcPct val="120000"/>
@@ -3709,7 +4815,7 @@
               <a:buNone/>
             </a:pPr>
             <a:r>
-              <a:rPr lang="en-US" sz="1150" dirty="0">
+              <a:rPr lang="en-US" sz="1050" dirty="0">
                 <a:solidFill>
                   <a:srgbClr val="3F4A63"/>
                 </a:solidFill>
@@ -3717,144 +4823,7 @@
                 <a:ea typeface="Calibri" pitchFamily="34" charset="-122"/>
                 <a:cs typeface="Calibri" pitchFamily="34" charset="-120"/>
               </a:rPr>
-              <a:t>하이브리드 RAG 검색 엔진, 오타 자동 보정, 4단계 검증 과정 구현</a:t>
-            </a:r>
-            <a:endParaRPr lang="en-US" sz="1150" dirty="0"/>
-          </a:p>
-        </p:txBody>
-      </p:sp>
-      <p:sp>
-        <p:nvSpPr>
-          <p:cNvPr id="17" name="Shape 15"/>
-          <p:cNvSpPr/>
-          <p:nvPr/>
-        </p:nvSpPr>
-        <p:spPr>
-          <a:xfrm>
-            <a:off x="777240" y="3648456"/>
-            <a:ext cx="548640" cy="548640"/>
-          </a:xfrm>
-          <a:prstGeom prst="ellipse">
-            <a:avLst/>
-          </a:prstGeom>
-          <a:solidFill>
-            <a:srgbClr val="1E2761"/>
-          </a:solidFill>
-          <a:ln/>
-        </p:spPr>
-      </p:sp>
-      <p:sp>
-        <p:nvSpPr>
-          <p:cNvPr id="18" name="Text 16"/>
-          <p:cNvSpPr txBox="1"/>
-          <p:nvPr/>
-        </p:nvSpPr>
-        <p:spPr>
-          <a:xfrm>
-            <a:off x="777240" y="3648456"/>
-            <a:ext cx="548640" cy="548640"/>
-          </a:xfrm>
-          <a:prstGeom prst="rect">
-            <a:avLst/>
-          </a:prstGeom>
-          <a:noFill/>
-          <a:ln/>
-        </p:spPr>
-        <p:txBody>
-          <a:bodyPr wrap="square" lIns="0" tIns="0" rIns="0" bIns="0" rtlCol="0" anchor="ctr"/>
-          <a:lstStyle/>
-          <a:p>
-            <a:pPr algn="ctr" indent="0" marL="0">
-              <a:buNone/>
-            </a:pPr>
-            <a:r>
-              <a:rPr lang="en-US" sz="1600" b="1" dirty="0">
-                <a:solidFill>
-                  <a:srgbClr val="FFFFFF"/>
-                </a:solidFill>
-                <a:latin typeface="Cambria" pitchFamily="34" charset="0"/>
-                <a:ea typeface="Cambria" pitchFamily="34" charset="-122"/>
-                <a:cs typeface="Cambria" pitchFamily="34" charset="-120"/>
-              </a:rPr>
-              <a:t>3</a:t>
-            </a:r>
-            <a:endParaRPr lang="en-US" sz="1600" dirty="0"/>
-          </a:p>
-        </p:txBody>
-      </p:sp>
-      <p:sp>
-        <p:nvSpPr>
-          <p:cNvPr id="19" name="Text 17"/>
-          <p:cNvSpPr txBox="1"/>
-          <p:nvPr/>
-        </p:nvSpPr>
-        <p:spPr>
-          <a:xfrm>
-            <a:off x="1600200" y="3630168"/>
-            <a:ext cx="3291840" cy="365760"/>
-          </a:xfrm>
-          <a:prstGeom prst="rect">
-            <a:avLst/>
-          </a:prstGeom>
-          <a:noFill/>
-          <a:ln/>
-        </p:spPr>
-        <p:txBody>
-          <a:bodyPr wrap="square" lIns="0" tIns="0" rIns="0" bIns="0" rtlCol="0" anchor="ctr"/>
-          <a:lstStyle/>
-          <a:p>
-            <a:pPr indent="0" marL="0">
-              <a:buNone/>
-            </a:pPr>
-            <a:r>
-              <a:rPr lang="en-US" sz="1450" b="1" dirty="0">
-                <a:solidFill>
-                  <a:srgbClr val="1E2761"/>
-                </a:solidFill>
-                <a:latin typeface="Calibri" pitchFamily="34" charset="0"/>
-                <a:ea typeface="Calibri" pitchFamily="34" charset="-122"/>
-                <a:cs typeface="Calibri" pitchFamily="34" charset="-120"/>
-              </a:rPr>
-              <a:t>웹 플랫폼 &amp; 확장 연동</a:t>
-            </a:r>
-            <a:endParaRPr lang="en-US" sz="1450" dirty="0"/>
-          </a:p>
-        </p:txBody>
-      </p:sp>
-      <p:sp>
-        <p:nvSpPr>
-          <p:cNvPr id="20" name="Text 18"/>
-          <p:cNvSpPr txBox="1"/>
-          <p:nvPr/>
-        </p:nvSpPr>
-        <p:spPr>
-          <a:xfrm>
-            <a:off x="1600200" y="3968496"/>
-            <a:ext cx="3291840" cy="274320"/>
-          </a:xfrm>
-          <a:prstGeom prst="rect">
-            <a:avLst/>
-          </a:prstGeom>
-          <a:noFill/>
-          <a:ln/>
-        </p:spPr>
-        <p:txBody>
-          <a:bodyPr wrap="square" lIns="0" tIns="0" rIns="0" bIns="0" rtlCol="0" anchor="ctr"/>
-          <a:lstStyle/>
-          <a:p>
-            <a:pPr indent="0" marL="0">
-              <a:buNone/>
-            </a:pPr>
-            <a:r>
-              <a:rPr lang="en-US" sz="1050" b="1" dirty="0">
-                <a:solidFill>
-                  <a:srgbClr val="0EA5E9"/>
-                </a:solidFill>
-                <a:latin typeface="Calibri" pitchFamily="34" charset="0"/>
-                <a:ea typeface="Calibri" pitchFamily="34" charset="-122"/>
-                <a:cs typeface="Calibri" pitchFamily="34" charset="-120"/>
-              </a:rPr>
-              <a:t>07.31 – 08.04</a:t>
+              <a:t>MySQL·MongoDB 관련 질문은 지식베이스에 관련 문서가 있는데도(각 123개·84개 청크) 검색 상위에 노출되지 않는 경우가 있어, 검색 랭킹 로직 보완이 필요합니다.</a:t>
             </a:r>
             <a:endParaRPr lang="en-US" sz="1050" dirty="0"/>
           </a:p>
@@ -3862,329 +4831,7 @@
       </p:sp>
       <p:sp>
         <p:nvSpPr>
-          <p:cNvPr id="21" name="Text 19"/>
-          <p:cNvSpPr txBox="1"/>
-          <p:nvPr/>
-        </p:nvSpPr>
-        <p:spPr>
-          <a:xfrm>
-            <a:off x="5074920" y="3648456"/>
-            <a:ext cx="6492240" cy="640080"/>
-          </a:xfrm>
-          <a:prstGeom prst="rect">
-            <a:avLst/>
-          </a:prstGeom>
-          <a:noFill/>
-          <a:ln/>
-        </p:spPr>
-        <p:txBody>
-          <a:bodyPr wrap="square" lIns="0" tIns="0" rIns="0" bIns="0" rtlCol="0" anchor="ctr"/>
-          <a:lstStyle/>
-          <a:p>
-            <a:pPr indent="0" marL="0">
-              <a:lnSpc>
-                <a:spcPct val="120000"/>
-              </a:lnSpc>
-              <a:buNone/>
-            </a:pPr>
-            <a:r>
-              <a:rPr lang="en-US" sz="1150" dirty="0">
-                <a:solidFill>
-                  <a:srgbClr val="3F4A63"/>
-                </a:solidFill>
-                <a:latin typeface="Calibri" pitchFamily="34" charset="0"/>
-                <a:ea typeface="Calibri" pitchFamily="34" charset="-122"/>
-                <a:cs typeface="Calibri" pitchFamily="34" charset="-120"/>
-              </a:rPr>
-              <a:t>Next.js 챗봇 · FastAPI 백엔드 · Chrome 확장을 실제 도메인에 배포</a:t>
-            </a:r>
-            <a:endParaRPr lang="en-US" sz="1150" dirty="0"/>
-          </a:p>
-        </p:txBody>
-      </p:sp>
-      <p:sp>
-        <p:nvSpPr>
-          <p:cNvPr id="22" name="Shape 20"/>
-          <p:cNvSpPr/>
-          <p:nvPr/>
-        </p:nvSpPr>
-        <p:spPr>
-          <a:xfrm>
-            <a:off x="777240" y="4489704"/>
-            <a:ext cx="548640" cy="548640"/>
-          </a:xfrm>
-          <a:prstGeom prst="ellipse">
-            <a:avLst/>
-          </a:prstGeom>
-          <a:solidFill>
-            <a:srgbClr val="EA4B71"/>
-          </a:solidFill>
-          <a:ln/>
-        </p:spPr>
-      </p:sp>
-      <p:sp>
-        <p:nvSpPr>
-          <p:cNvPr id="23" name="Text 21"/>
-          <p:cNvSpPr txBox="1"/>
-          <p:nvPr/>
-        </p:nvSpPr>
-        <p:spPr>
-          <a:xfrm>
-            <a:off x="777240" y="4489704"/>
-            <a:ext cx="548640" cy="548640"/>
-          </a:xfrm>
-          <a:prstGeom prst="rect">
-            <a:avLst/>
-          </a:prstGeom>
-          <a:noFill/>
-          <a:ln/>
-        </p:spPr>
-        <p:txBody>
-          <a:bodyPr wrap="square" lIns="0" tIns="0" rIns="0" bIns="0" rtlCol="0" anchor="ctr"/>
-          <a:lstStyle/>
-          <a:p>
-            <a:pPr algn="ctr" indent="0" marL="0">
-              <a:buNone/>
-            </a:pPr>
-            <a:r>
-              <a:rPr lang="en-US" sz="1600" b="1" dirty="0">
-                <a:solidFill>
-                  <a:srgbClr val="FFFFFF"/>
-                </a:solidFill>
-                <a:latin typeface="Cambria" pitchFamily="34" charset="0"/>
-                <a:ea typeface="Cambria" pitchFamily="34" charset="-122"/>
-                <a:cs typeface="Cambria" pitchFamily="34" charset="-120"/>
-              </a:rPr>
-              <a:t>4</a:t>
-            </a:r>
-            <a:endParaRPr lang="en-US" sz="1600" dirty="0"/>
-          </a:p>
-        </p:txBody>
-      </p:sp>
-      <p:sp>
-        <p:nvSpPr>
-          <p:cNvPr id="24" name="Text 22"/>
-          <p:cNvSpPr txBox="1"/>
-          <p:nvPr/>
-        </p:nvSpPr>
-        <p:spPr>
-          <a:xfrm>
-            <a:off x="1600200" y="4471416"/>
-            <a:ext cx="3291840" cy="365760"/>
-          </a:xfrm>
-          <a:prstGeom prst="rect">
-            <a:avLst/>
-          </a:prstGeom>
-          <a:noFill/>
-          <a:ln/>
-        </p:spPr>
-        <p:txBody>
-          <a:bodyPr wrap="square" lIns="0" tIns="0" rIns="0" bIns="0" rtlCol="0" anchor="ctr"/>
-          <a:lstStyle/>
-          <a:p>
-            <a:pPr indent="0" marL="0">
-              <a:buNone/>
-            </a:pPr>
-            <a:r>
-              <a:rPr lang="en-US" sz="1450" b="1" dirty="0">
-                <a:solidFill>
-                  <a:srgbClr val="1E2761"/>
-                </a:solidFill>
-                <a:latin typeface="Calibri" pitchFamily="34" charset="0"/>
-                <a:ea typeface="Calibri" pitchFamily="34" charset="-122"/>
-                <a:cs typeface="Calibri" pitchFamily="34" charset="-120"/>
-              </a:rPr>
-              <a:t>통합 테스트 및 품질 점검</a:t>
-            </a:r>
-            <a:endParaRPr lang="en-US" sz="1450" dirty="0"/>
-          </a:p>
-        </p:txBody>
-      </p:sp>
-      <p:sp>
-        <p:nvSpPr>
-          <p:cNvPr id="25" name="Text 23"/>
-          <p:cNvSpPr txBox="1"/>
-          <p:nvPr/>
-        </p:nvSpPr>
-        <p:spPr>
-          <a:xfrm>
-            <a:off x="5074920" y="4489704"/>
-            <a:ext cx="6492240" cy="640080"/>
-          </a:xfrm>
-          <a:prstGeom prst="rect">
-            <a:avLst/>
-          </a:prstGeom>
-          <a:noFill/>
-          <a:ln/>
-        </p:spPr>
-        <p:txBody>
-          <a:bodyPr wrap="square" lIns="0" tIns="0" rIns="0" bIns="0" rtlCol="0" anchor="ctr"/>
-          <a:lstStyle/>
-          <a:p>
-            <a:pPr indent="0" marL="0">
-              <a:lnSpc>
-                <a:spcPct val="120000"/>
-              </a:lnSpc>
-              <a:buNone/>
-            </a:pPr>
-            <a:r>
-              <a:rPr lang="en-US" sz="1150" dirty="0">
-                <a:solidFill>
-                  <a:srgbClr val="3F4A63"/>
-                </a:solidFill>
-                <a:latin typeface="Calibri" pitchFamily="34" charset="0"/>
-                <a:ea typeface="Calibri" pitchFamily="34" charset="-122"/>
-                <a:cs typeface="Calibri" pitchFamily="34" charset="-120"/>
-              </a:rPr>
-              <a:t>8개 이상 시나리오 QA로 실제 결함 10건 이상 발견 및 수정</a:t>
-            </a:r>
-            <a:endParaRPr lang="en-US" sz="1150" dirty="0"/>
-          </a:p>
-        </p:txBody>
-      </p:sp>
-      <p:sp>
-        <p:nvSpPr>
-          <p:cNvPr id="26" name="Shape 24"/>
-          <p:cNvSpPr/>
-          <p:nvPr/>
-        </p:nvSpPr>
-        <p:spPr>
-          <a:xfrm>
-            <a:off x="777240" y="5330952"/>
-            <a:ext cx="548640" cy="548640"/>
-          </a:xfrm>
-          <a:prstGeom prst="ellipse">
-            <a:avLst/>
-          </a:prstGeom>
-          <a:solidFill>
-            <a:srgbClr val="EA4B71"/>
-          </a:solidFill>
-          <a:ln/>
-        </p:spPr>
-      </p:sp>
-      <p:sp>
-        <p:nvSpPr>
-          <p:cNvPr id="27" name="Text 25"/>
-          <p:cNvSpPr txBox="1"/>
-          <p:nvPr/>
-        </p:nvSpPr>
-        <p:spPr>
-          <a:xfrm>
-            <a:off x="777240" y="5330952"/>
-            <a:ext cx="548640" cy="548640"/>
-          </a:xfrm>
-          <a:prstGeom prst="rect">
-            <a:avLst/>
-          </a:prstGeom>
-          <a:noFill/>
-          <a:ln/>
-        </p:spPr>
-        <p:txBody>
-          <a:bodyPr wrap="square" lIns="0" tIns="0" rIns="0" bIns="0" rtlCol="0" anchor="ctr"/>
-          <a:lstStyle/>
-          <a:p>
-            <a:pPr algn="ctr" indent="0" marL="0">
-              <a:buNone/>
-            </a:pPr>
-            <a:r>
-              <a:rPr lang="en-US" sz="1600" b="1" dirty="0">
-                <a:solidFill>
-                  <a:srgbClr val="FFFFFF"/>
-                </a:solidFill>
-                <a:latin typeface="Cambria" pitchFamily="34" charset="0"/>
-                <a:ea typeface="Cambria" pitchFamily="34" charset="-122"/>
-                <a:cs typeface="Cambria" pitchFamily="34" charset="-120"/>
-              </a:rPr>
-              <a:t>5</a:t>
-            </a:r>
-            <a:endParaRPr lang="en-US" sz="1600" dirty="0"/>
-          </a:p>
-        </p:txBody>
-      </p:sp>
-      <p:sp>
-        <p:nvSpPr>
-          <p:cNvPr id="28" name="Text 26"/>
-          <p:cNvSpPr txBox="1"/>
-          <p:nvPr/>
-        </p:nvSpPr>
-        <p:spPr>
-          <a:xfrm>
-            <a:off x="1600200" y="5312664"/>
-            <a:ext cx="3291840" cy="365760"/>
-          </a:xfrm>
-          <a:prstGeom prst="rect">
-            <a:avLst/>
-          </a:prstGeom>
-          <a:noFill/>
-          <a:ln/>
-        </p:spPr>
-        <p:txBody>
-          <a:bodyPr wrap="square" lIns="0" tIns="0" rIns="0" bIns="0" rtlCol="0" anchor="ctr"/>
-          <a:lstStyle/>
-          <a:p>
-            <a:pPr indent="0" marL="0">
-              <a:buNone/>
-            </a:pPr>
-            <a:r>
-              <a:rPr lang="en-US" sz="1450" b="1" dirty="0">
-                <a:solidFill>
-                  <a:srgbClr val="1E2761"/>
-                </a:solidFill>
-                <a:latin typeface="Calibri" pitchFamily="34" charset="0"/>
-                <a:ea typeface="Calibri" pitchFamily="34" charset="-122"/>
-                <a:cs typeface="Calibri" pitchFamily="34" charset="-120"/>
-              </a:rPr>
-              <a:t>최종 검증 및 시연 준비</a:t>
-            </a:r>
-            <a:endParaRPr lang="en-US" sz="1450" dirty="0"/>
-          </a:p>
-        </p:txBody>
-      </p:sp>
-      <p:sp>
-        <p:nvSpPr>
-          <p:cNvPr id="29" name="Text 27"/>
-          <p:cNvSpPr txBox="1"/>
-          <p:nvPr/>
-        </p:nvSpPr>
-        <p:spPr>
-          <a:xfrm>
-            <a:off x="5074920" y="5330952"/>
-            <a:ext cx="6492240" cy="640080"/>
-          </a:xfrm>
-          <a:prstGeom prst="rect">
-            <a:avLst/>
-          </a:prstGeom>
-          <a:noFill/>
-          <a:ln/>
-        </p:spPr>
-        <p:txBody>
-          <a:bodyPr wrap="square" lIns="0" tIns="0" rIns="0" bIns="0" rtlCol="0" anchor="ctr"/>
-          <a:lstStyle/>
-          <a:p>
-            <a:pPr indent="0" marL="0">
-              <a:lnSpc>
-                <a:spcPct val="120000"/>
-              </a:lnSpc>
-              <a:buNone/>
-            </a:pPr>
-            <a:r>
-              <a:rPr lang="en-US" sz="1150" dirty="0">
-                <a:solidFill>
-                  <a:srgbClr val="3F4A63"/>
-                </a:solidFill>
-                <a:latin typeface="Calibri" pitchFamily="34" charset="0"/>
-                <a:ea typeface="Calibri" pitchFamily="34" charset="-122"/>
-                <a:cs typeface="Calibri" pitchFamily="34" charset="-120"/>
-              </a:rPr>
-              <a:t>회원가입부터 워크플로우 자동 생성까지 전 과정 정상 동작 최종 확인</a:t>
-            </a:r>
-            <a:endParaRPr lang="en-US" sz="1150" dirty="0"/>
-          </a:p>
-        </p:txBody>
-      </p:sp>
-      <p:sp>
-        <p:nvSpPr>
-          <p:cNvPr id="30" name="Text 28"/>
+          <p:cNvPr id="41" name="Text 39"/>
           <p:cNvSpPr txBox="1"/>
           <p:nvPr/>
         </p:nvSpPr>
@@ -4223,7 +4870,7 @@
       </p:sp>
       <p:sp>
         <p:nvSpPr>
-          <p:cNvPr id="31" name="Text 29"/>
+          <p:cNvPr id="42" name="Text 40"/>
           <p:cNvSpPr txBox="1"/>
           <p:nvPr/>
         </p:nvSpPr>
@@ -4340,7 +4987,7 @@
                 <a:ea typeface="Calibri" pitchFamily="34" charset="-122"/>
                 <a:cs typeface="Calibri" pitchFamily="34" charset="-120"/>
               </a:rPr>
-              <a:t>08  </a:t>
+              <a:t>07  </a:t>
             </a:r>
             <a:pPr algn="ctr" indent="0" marL="0">
               <a:buNone/>
@@ -4354,7 +5001,7 @@
                 <a:ea typeface="Calibri" pitchFamily="34" charset="-122"/>
                 <a:cs typeface="Calibri" pitchFamily="34" charset="-120"/>
               </a:rPr>
-              <a:t>기대효과 · 향후 계획</a:t>
+              <a:t>벤치마크 비교</a:t>
             </a:r>
             <a:endParaRPr lang="en-US" sz="1200" dirty="0"/>
           </a:p>
@@ -4393,7 +5040,7 @@
                 <a:ea typeface="Calibri" pitchFamily="34" charset="-122"/>
                 <a:cs typeface="Calibri" pitchFamily="34" charset="-120"/>
               </a:rPr>
-              <a:t>NEXT</a:t>
+              <a:t>VS. LLM ONLY</a:t>
             </a:r>
             <a:endParaRPr lang="en-US" sz="1300" dirty="0"/>
           </a:p>
@@ -4432,7 +5079,7 @@
                 <a:ea typeface="Cambria" pitchFamily="34" charset="-122"/>
                 <a:cs typeface="Cambria" pitchFamily="34" charset="-120"/>
               </a:rPr>
-              <a:t>여기서 더 나아갈 계획입니다</a:t>
+              <a:t>일반 LLM만 썼다면 어땠을까?</a:t>
             </a:r>
             <a:endParaRPr lang="en-US" sz="3000" dirty="0"/>
           </a:p>
@@ -4440,23 +5087,127 @@
       </p:sp>
       <p:sp>
         <p:nvSpPr>
-          <p:cNvPr id="6" name="Shape 4"/>
+          <p:cNvPr id="6" name="Text 4"/>
+          <p:cNvSpPr txBox="1"/>
+          <p:nvPr/>
+        </p:nvSpPr>
+        <p:spPr>
+          <a:xfrm>
+            <a:off x="640080" y="1600200"/>
+            <a:ext cx="10881360" cy="365760"/>
+          </a:xfrm>
+          <a:prstGeom prst="rect">
+            <a:avLst/>
+          </a:prstGeom>
+          <a:noFill/>
+          <a:ln/>
+        </p:spPr>
+        <p:txBody>
+          <a:bodyPr wrap="square" lIns="0" tIns="0" rIns="0" bIns="0" rtlCol="0" anchor="ctr"/>
+          <a:lstStyle/>
+          <a:p>
+            <a:pPr indent="0" marL="0">
+              <a:buNone/>
+            </a:pPr>
+            <a:r>
+              <a:rPr lang="en-US" sz="1150" i="1" dirty="0">
+                <a:solidFill>
+                  <a:srgbClr val="8A93A8"/>
+                </a:solidFill>
+                <a:latin typeface="Calibri" pitchFamily="34" charset="0"/>
+                <a:ea typeface="Calibri" pitchFamily="34" charset="-122"/>
+                <a:cs typeface="Calibri" pitchFamily="34" charset="-120"/>
+              </a:rPr>
+              <a:t>같은 모델(GPT-4o mini)·같은 15개 시나리오에서 RAG·온톨로지·REG·검증을 모두 끈 채로 다시 측정해 정면 비교했습니다.</a:t>
+            </a:r>
+            <a:endParaRPr lang="en-US" sz="1150" dirty="0"/>
+          </a:p>
+        </p:txBody>
+      </p:sp>
+      <p:sp>
+        <p:nvSpPr>
+          <p:cNvPr id="7" name="Shape 5"/>
           <p:cNvSpPr/>
           <p:nvPr/>
         </p:nvSpPr>
         <p:spPr>
           <a:xfrm>
-            <a:off x="640080" y="1783080"/>
-            <a:ext cx="3383280" cy="1874520"/>
+            <a:off x="640080" y="2103120"/>
+            <a:ext cx="3429000" cy="2377440"/>
           </a:xfrm>
           <a:prstGeom prst="roundRect">
             <a:avLst>
-              <a:gd name="adj" fmla="val 3902"/>
+              <a:gd name="adj" fmla="val 3077"/>
             </a:avLst>
           </a:prstGeom>
           <a:solidFill>
             <a:srgbClr val="F3F5FA"/>
           </a:solidFill>
+          <a:ln w="12700">
+            <a:solidFill>
+              <a:srgbClr val="E3E7F0"/>
+            </a:solidFill>
+            <a:prstDash val="solid"/>
+          </a:ln>
+        </p:spPr>
+      </p:sp>
+      <p:sp>
+        <p:nvSpPr>
+          <p:cNvPr id="8" name="Text 6"/>
+          <p:cNvSpPr txBox="1"/>
+          <p:nvPr/>
+        </p:nvSpPr>
+        <p:spPr>
+          <a:xfrm>
+            <a:off x="896112" y="2286000"/>
+            <a:ext cx="2916936" cy="457200"/>
+          </a:xfrm>
+          <a:prstGeom prst="rect">
+            <a:avLst/>
+          </a:prstGeom>
+          <a:noFill/>
+          <a:ln/>
+        </p:spPr>
+        <p:txBody>
+          <a:bodyPr wrap="square" lIns="0" tIns="0" rIns="0" bIns="0" rtlCol="0" anchor="ctr"/>
+          <a:lstStyle/>
+          <a:p>
+            <a:pPr indent="0" marL="0">
+              <a:lnSpc>
+                <a:spcPct val="110000"/>
+              </a:lnSpc>
+              <a:buNone/>
+            </a:pPr>
+            <a:r>
+              <a:rPr lang="en-US" sz="1200" b="1" dirty="0">
+                <a:solidFill>
+                  <a:srgbClr val="1E2761"/>
+                </a:solidFill>
+                <a:latin typeface="Calibri" pitchFamily="34" charset="0"/>
+                <a:ea typeface="Calibri" pitchFamily="34" charset="-122"/>
+                <a:cs typeface="Calibri" pitchFamily="34" charset="-120"/>
+              </a:rPr>
+              <a:t>실제로 실행 가능한 워크플로우</a:t>
+            </a:r>
+            <a:endParaRPr lang="en-US" sz="1200" dirty="0"/>
+          </a:p>
+        </p:txBody>
+      </p:sp>
+      <p:sp>
+        <p:nvSpPr>
+          <p:cNvPr id="9" name="Shape 7"/>
+          <p:cNvSpPr/>
+          <p:nvPr/>
+        </p:nvSpPr>
+        <p:spPr>
+          <a:xfrm>
+            <a:off x="896112" y="2816352"/>
+            <a:ext cx="2916936" cy="0"/>
+          </a:xfrm>
+          <a:prstGeom prst="line">
+            <a:avLst/>
+          </a:prstGeom>
+          <a:noFill/>
           <a:ln w="9525">
             <a:solidFill>
               <a:srgbClr val="E3E7F0"/>
@@ -4467,165 +5218,244 @@
       </p:sp>
       <p:sp>
         <p:nvSpPr>
-          <p:cNvPr id="7" name="Shape 5"/>
-          <p:cNvSpPr/>
-          <p:nvPr/>
-        </p:nvSpPr>
-        <p:spPr>
-          <a:xfrm>
-            <a:off x="868680" y="2011680"/>
-            <a:ext cx="457200" cy="457200"/>
-          </a:xfrm>
-          <a:prstGeom prst="roundRect">
-            <a:avLst>
-              <a:gd name="adj" fmla="val 20000"/>
-            </a:avLst>
-          </a:prstGeom>
-          <a:solidFill>
-            <a:srgbClr val="0EA5E9"/>
-          </a:solidFill>
-          <a:ln/>
-        </p:spPr>
-      </p:sp>
-      <p:sp>
-        <p:nvSpPr>
-          <p:cNvPr id="8" name="Text 6"/>
-          <p:cNvSpPr txBox="1"/>
-          <p:nvPr/>
-        </p:nvSpPr>
-        <p:spPr>
-          <a:xfrm>
-            <a:off x="868680" y="2011680"/>
-            <a:ext cx="457200" cy="457200"/>
-          </a:xfrm>
-          <a:prstGeom prst="rect">
-            <a:avLst/>
-          </a:prstGeom>
-          <a:noFill/>
-          <a:ln/>
-        </p:spPr>
-        <p:txBody>
-          <a:bodyPr wrap="square" lIns="0" tIns="0" rIns="0" bIns="0" rtlCol="0" anchor="ctr"/>
-          <a:lstStyle/>
-          <a:p>
-            <a:pPr algn="ctr" indent="0" marL="0">
-              <a:buNone/>
-            </a:pPr>
-            <a:r>
-              <a:rPr lang="en-US" sz="1600" b="1" dirty="0">
-                <a:solidFill>
-                  <a:srgbClr val="FFFFFF"/>
+          <p:cNvPr id="10" name="Text 8"/>
+          <p:cNvSpPr txBox="1"/>
+          <p:nvPr/>
+        </p:nvSpPr>
+        <p:spPr>
+          <a:xfrm>
+            <a:off x="896112" y="2926080"/>
+            <a:ext cx="2916936" cy="237744"/>
+          </a:xfrm>
+          <a:prstGeom prst="rect">
+            <a:avLst/>
+          </a:prstGeom>
+          <a:noFill/>
+          <a:ln/>
+        </p:spPr>
+        <p:txBody>
+          <a:bodyPr wrap="square" lIns="0" tIns="0" rIns="0" bIns="0" rtlCol="0" anchor="ctr"/>
+          <a:lstStyle/>
+          <a:p>
+            <a:pPr indent="0" marL="0">
+              <a:buNone/>
+            </a:pPr>
+            <a:r>
+              <a:rPr lang="en-US" sz="950" dirty="0">
+                <a:solidFill>
+                  <a:srgbClr val="8A4457"/>
+                </a:solidFill>
+                <a:latin typeface="Calibri" pitchFamily="34" charset="0"/>
+                <a:ea typeface="Calibri" pitchFamily="34" charset="-122"/>
+                <a:cs typeface="Calibri" pitchFamily="34" charset="-120"/>
+              </a:rPr>
+              <a:t>일반 LLM만 사용</a:t>
+            </a:r>
+            <a:endParaRPr lang="en-US" sz="950" dirty="0"/>
+          </a:p>
+        </p:txBody>
+      </p:sp>
+      <p:sp>
+        <p:nvSpPr>
+          <p:cNvPr id="11" name="Text 9"/>
+          <p:cNvSpPr txBox="1"/>
+          <p:nvPr/>
+        </p:nvSpPr>
+        <p:spPr>
+          <a:xfrm>
+            <a:off x="896112" y="3145536"/>
+            <a:ext cx="2916936" cy="420624"/>
+          </a:xfrm>
+          <a:prstGeom prst="rect">
+            <a:avLst/>
+          </a:prstGeom>
+          <a:noFill/>
+          <a:ln/>
+        </p:spPr>
+        <p:txBody>
+          <a:bodyPr wrap="square" lIns="0" tIns="0" rIns="0" bIns="0" rtlCol="0" anchor="ctr"/>
+          <a:lstStyle/>
+          <a:p>
+            <a:pPr indent="0" marL="0">
+              <a:buNone/>
+            </a:pPr>
+            <a:r>
+              <a:rPr lang="en-US" sz="2400" b="1" dirty="0">
+                <a:solidFill>
+                  <a:srgbClr val="C23A57"/>
                 </a:solidFill>
                 <a:latin typeface="Cambria" pitchFamily="34" charset="0"/>
                 <a:ea typeface="Cambria" pitchFamily="34" charset="-122"/>
                 <a:cs typeface="Cambria" pitchFamily="34" charset="-120"/>
               </a:rPr>
-              <a:t>1</a:t>
-            </a:r>
-            <a:endParaRPr lang="en-US" sz="1600" dirty="0"/>
-          </a:p>
-        </p:txBody>
-      </p:sp>
-      <p:sp>
-        <p:nvSpPr>
-          <p:cNvPr id="9" name="Text 7"/>
-          <p:cNvSpPr txBox="1"/>
-          <p:nvPr/>
-        </p:nvSpPr>
-        <p:spPr>
-          <a:xfrm>
-            <a:off x="868680" y="2560320"/>
-            <a:ext cx="2926080" cy="320040"/>
-          </a:xfrm>
-          <a:prstGeom prst="rect">
-            <a:avLst/>
-          </a:prstGeom>
-          <a:noFill/>
-          <a:ln/>
-        </p:spPr>
-        <p:txBody>
-          <a:bodyPr wrap="square" lIns="0" tIns="0" rIns="0" bIns="0" rtlCol="0" anchor="ctr"/>
-          <a:lstStyle/>
-          <a:p>
-            <a:pPr indent="0" marL="0">
-              <a:buNone/>
-            </a:pPr>
-            <a:r>
-              <a:rPr lang="en-US" sz="1300" b="1" dirty="0">
-                <a:solidFill>
-                  <a:srgbClr val="1E2761"/>
-                </a:solidFill>
-                <a:latin typeface="Calibri" pitchFamily="34" charset="0"/>
-                <a:ea typeface="Calibri" pitchFamily="34" charset="-122"/>
-                <a:cs typeface="Calibri" pitchFamily="34" charset="-120"/>
-              </a:rPr>
-              <a:t>플랫폼 확장</a:t>
-            </a:r>
-            <a:endParaRPr lang="en-US" sz="1300" dirty="0"/>
-          </a:p>
-        </p:txBody>
-      </p:sp>
-      <p:sp>
-        <p:nvSpPr>
-          <p:cNvPr id="10" name="Text 8"/>
-          <p:cNvSpPr txBox="1"/>
-          <p:nvPr/>
-        </p:nvSpPr>
-        <p:spPr>
-          <a:xfrm>
-            <a:off x="868680" y="2880360"/>
-            <a:ext cx="2926080" cy="731520"/>
-          </a:xfrm>
-          <a:prstGeom prst="rect">
-            <a:avLst/>
-          </a:prstGeom>
-          <a:noFill/>
-          <a:ln/>
-        </p:spPr>
-        <p:txBody>
-          <a:bodyPr wrap="square" lIns="0" tIns="0" rIns="0" bIns="0" rtlCol="0" anchor="ctr"/>
-          <a:lstStyle/>
-          <a:p>
-            <a:pPr indent="0" marL="0">
-              <a:lnSpc>
-                <a:spcPct val="120000"/>
-              </a:lnSpc>
-              <a:buNone/>
-            </a:pPr>
-            <a:r>
-              <a:rPr lang="en-US" sz="970" dirty="0">
-                <a:solidFill>
-                  <a:srgbClr val="3F4A63"/>
-                </a:solidFill>
-                <a:latin typeface="Calibri" pitchFamily="34" charset="0"/>
-                <a:ea typeface="Calibri" pitchFamily="34" charset="-122"/>
-                <a:cs typeface="Calibri" pitchFamily="34" charset="-120"/>
-              </a:rPr>
-              <a:t>n8n뿐 아니라 Make, Zapier 등 다양한 노코드 자동화 플랫폼으로 지식 데이터베이스를 넓혀, 범용 자동화 학습 플랫폼으로 발전</a:t>
-            </a:r>
-            <a:endParaRPr lang="en-US" sz="970" dirty="0"/>
-          </a:p>
-        </p:txBody>
-      </p:sp>
-      <p:sp>
-        <p:nvSpPr>
-          <p:cNvPr id="11" name="Shape 9"/>
+              <a:t>66.7%</a:t>
+            </a:r>
+            <a:endParaRPr lang="en-US" sz="2400" dirty="0"/>
+          </a:p>
+        </p:txBody>
+      </p:sp>
+      <p:sp>
+        <p:nvSpPr>
+          <p:cNvPr id="12" name="Text 10"/>
+          <p:cNvSpPr txBox="1"/>
+          <p:nvPr/>
+        </p:nvSpPr>
+        <p:spPr>
+          <a:xfrm>
+            <a:off x="896112" y="3639312"/>
+            <a:ext cx="2916936" cy="237744"/>
+          </a:xfrm>
+          <a:prstGeom prst="rect">
+            <a:avLst/>
+          </a:prstGeom>
+          <a:noFill/>
+          <a:ln/>
+        </p:spPr>
+        <p:txBody>
+          <a:bodyPr wrap="square" lIns="0" tIns="0" rIns="0" bIns="0" rtlCol="0" anchor="ctr"/>
+          <a:lstStyle/>
+          <a:p>
+            <a:pPr indent="0" marL="0">
+              <a:buNone/>
+            </a:pPr>
+            <a:r>
+              <a:rPr lang="en-US" sz="950" dirty="0">
+                <a:solidFill>
+                  <a:srgbClr val="1B4E86"/>
+                </a:solidFill>
+                <a:latin typeface="Calibri" pitchFamily="34" charset="0"/>
+                <a:ea typeface="Calibri" pitchFamily="34" charset="-122"/>
+                <a:cs typeface="Calibri" pitchFamily="34" charset="-120"/>
+              </a:rPr>
+              <a:t>FlowGuide AI</a:t>
+            </a:r>
+            <a:endParaRPr lang="en-US" sz="950" dirty="0"/>
+          </a:p>
+        </p:txBody>
+      </p:sp>
+      <p:sp>
+        <p:nvSpPr>
+          <p:cNvPr id="13" name="Text 11"/>
+          <p:cNvSpPr txBox="1"/>
+          <p:nvPr/>
+        </p:nvSpPr>
+        <p:spPr>
+          <a:xfrm>
+            <a:off x="896112" y="3858768"/>
+            <a:ext cx="2916936" cy="420624"/>
+          </a:xfrm>
+          <a:prstGeom prst="rect">
+            <a:avLst/>
+          </a:prstGeom>
+          <a:noFill/>
+          <a:ln/>
+        </p:spPr>
+        <p:txBody>
+          <a:bodyPr wrap="square" lIns="0" tIns="0" rIns="0" bIns="0" rtlCol="0" anchor="ctr"/>
+          <a:lstStyle/>
+          <a:p>
+            <a:pPr indent="0" marL="0">
+              <a:buNone/>
+            </a:pPr>
+            <a:r>
+              <a:rPr lang="en-US" sz="2400" b="1" dirty="0">
+                <a:solidFill>
+                  <a:srgbClr val="0EA5E9"/>
+                </a:solidFill>
+                <a:latin typeface="Cambria" pitchFamily="34" charset="0"/>
+                <a:ea typeface="Cambria" pitchFamily="34" charset="-122"/>
+                <a:cs typeface="Cambria" pitchFamily="34" charset="-120"/>
+              </a:rPr>
+              <a:t>100%</a:t>
+            </a:r>
+            <a:endParaRPr lang="en-US" sz="2400" dirty="0"/>
+          </a:p>
+        </p:txBody>
+      </p:sp>
+      <p:sp>
+        <p:nvSpPr>
+          <p:cNvPr id="14" name="Shape 12"/>
           <p:cNvSpPr/>
           <p:nvPr/>
         </p:nvSpPr>
         <p:spPr>
           <a:xfrm>
-            <a:off x="4242816" y="1783080"/>
-            <a:ext cx="3383280" cy="1874520"/>
+            <a:off x="4343400" y="2103120"/>
+            <a:ext cx="3429000" cy="2377440"/>
           </a:xfrm>
           <a:prstGeom prst="roundRect">
             <a:avLst>
-              <a:gd name="adj" fmla="val 3902"/>
+              <a:gd name="adj" fmla="val 3077"/>
             </a:avLst>
           </a:prstGeom>
           <a:solidFill>
             <a:srgbClr val="F3F5FA"/>
           </a:solidFill>
+          <a:ln w="12700">
+            <a:solidFill>
+              <a:srgbClr val="E3E7F0"/>
+            </a:solidFill>
+            <a:prstDash val="solid"/>
+          </a:ln>
+        </p:spPr>
+      </p:sp>
+      <p:sp>
+        <p:nvSpPr>
+          <p:cNvPr id="15" name="Text 13"/>
+          <p:cNvSpPr txBox="1"/>
+          <p:nvPr/>
+        </p:nvSpPr>
+        <p:spPr>
+          <a:xfrm>
+            <a:off x="4599432" y="2286000"/>
+            <a:ext cx="2916936" cy="457200"/>
+          </a:xfrm>
+          <a:prstGeom prst="rect">
+            <a:avLst/>
+          </a:prstGeom>
+          <a:noFill/>
+          <a:ln/>
+        </p:spPr>
+        <p:txBody>
+          <a:bodyPr wrap="square" lIns="0" tIns="0" rIns="0" bIns="0" rtlCol="0" anchor="ctr"/>
+          <a:lstStyle/>
+          <a:p>
+            <a:pPr indent="0" marL="0">
+              <a:lnSpc>
+                <a:spcPct val="110000"/>
+              </a:lnSpc>
+              <a:buNone/>
+            </a:pPr>
+            <a:r>
+              <a:rPr lang="en-US" sz="1200" b="1" dirty="0">
+                <a:solidFill>
+                  <a:srgbClr val="1E2761"/>
+                </a:solidFill>
+                <a:latin typeface="Calibri" pitchFamily="34" charset="0"/>
+                <a:ea typeface="Calibri" pitchFamily="34" charset="-122"/>
+                <a:cs typeface="Calibri" pitchFamily="34" charset="-120"/>
+              </a:rPr>
+              <a:t>존재하지 않는 노드를 지어낸 비율</a:t>
+            </a:r>
+            <a:endParaRPr lang="en-US" sz="1200" dirty="0"/>
+          </a:p>
+        </p:txBody>
+      </p:sp>
+      <p:sp>
+        <p:nvSpPr>
+          <p:cNvPr id="16" name="Shape 14"/>
+          <p:cNvSpPr/>
+          <p:nvPr/>
+        </p:nvSpPr>
+        <p:spPr>
+          <a:xfrm>
+            <a:off x="4599432" y="2816352"/>
+            <a:ext cx="2916936" cy="0"/>
+          </a:xfrm>
+          <a:prstGeom prst="line">
+            <a:avLst/>
+          </a:prstGeom>
+          <a:noFill/>
           <a:ln w="9525">
             <a:solidFill>
               <a:srgbClr val="E3E7F0"/>
@@ -4636,165 +5466,244 @@
       </p:sp>
       <p:sp>
         <p:nvSpPr>
-          <p:cNvPr id="12" name="Shape 10"/>
-          <p:cNvSpPr/>
-          <p:nvPr/>
-        </p:nvSpPr>
-        <p:spPr>
-          <a:xfrm>
-            <a:off x="4471416" y="2011680"/>
-            <a:ext cx="457200" cy="457200"/>
-          </a:xfrm>
-          <a:prstGeom prst="roundRect">
-            <a:avLst>
-              <a:gd name="adj" fmla="val 20000"/>
-            </a:avLst>
-          </a:prstGeom>
-          <a:solidFill>
-            <a:srgbClr val="1E2761"/>
-          </a:solidFill>
-          <a:ln/>
-        </p:spPr>
-      </p:sp>
-      <p:sp>
-        <p:nvSpPr>
-          <p:cNvPr id="13" name="Text 11"/>
-          <p:cNvSpPr txBox="1"/>
-          <p:nvPr/>
-        </p:nvSpPr>
-        <p:spPr>
-          <a:xfrm>
-            <a:off x="4471416" y="2011680"/>
-            <a:ext cx="457200" cy="457200"/>
-          </a:xfrm>
-          <a:prstGeom prst="rect">
-            <a:avLst/>
-          </a:prstGeom>
-          <a:noFill/>
-          <a:ln/>
-        </p:spPr>
-        <p:txBody>
-          <a:bodyPr wrap="square" lIns="0" tIns="0" rIns="0" bIns="0" rtlCol="0" anchor="ctr"/>
-          <a:lstStyle/>
-          <a:p>
-            <a:pPr algn="ctr" indent="0" marL="0">
-              <a:buNone/>
-            </a:pPr>
-            <a:r>
-              <a:rPr lang="en-US" sz="1600" b="1" dirty="0">
-                <a:solidFill>
-                  <a:srgbClr val="FFFFFF"/>
+          <p:cNvPr id="17" name="Text 15"/>
+          <p:cNvSpPr txBox="1"/>
+          <p:nvPr/>
+        </p:nvSpPr>
+        <p:spPr>
+          <a:xfrm>
+            <a:off x="4599432" y="2926080"/>
+            <a:ext cx="2916936" cy="237744"/>
+          </a:xfrm>
+          <a:prstGeom prst="rect">
+            <a:avLst/>
+          </a:prstGeom>
+          <a:noFill/>
+          <a:ln/>
+        </p:spPr>
+        <p:txBody>
+          <a:bodyPr wrap="square" lIns="0" tIns="0" rIns="0" bIns="0" rtlCol="0" anchor="ctr"/>
+          <a:lstStyle/>
+          <a:p>
+            <a:pPr indent="0" marL="0">
+              <a:buNone/>
+            </a:pPr>
+            <a:r>
+              <a:rPr lang="en-US" sz="950" dirty="0">
+                <a:solidFill>
+                  <a:srgbClr val="8A4457"/>
+                </a:solidFill>
+                <a:latin typeface="Calibri" pitchFamily="34" charset="0"/>
+                <a:ea typeface="Calibri" pitchFamily="34" charset="-122"/>
+                <a:cs typeface="Calibri" pitchFamily="34" charset="-120"/>
+              </a:rPr>
+              <a:t>일반 LLM만 사용</a:t>
+            </a:r>
+            <a:endParaRPr lang="en-US" sz="950" dirty="0"/>
+          </a:p>
+        </p:txBody>
+      </p:sp>
+      <p:sp>
+        <p:nvSpPr>
+          <p:cNvPr id="18" name="Text 16"/>
+          <p:cNvSpPr txBox="1"/>
+          <p:nvPr/>
+        </p:nvSpPr>
+        <p:spPr>
+          <a:xfrm>
+            <a:off x="4599432" y="3145536"/>
+            <a:ext cx="2916936" cy="420624"/>
+          </a:xfrm>
+          <a:prstGeom prst="rect">
+            <a:avLst/>
+          </a:prstGeom>
+          <a:noFill/>
+          <a:ln/>
+        </p:spPr>
+        <p:txBody>
+          <a:bodyPr wrap="square" lIns="0" tIns="0" rIns="0" bIns="0" rtlCol="0" anchor="ctr"/>
+          <a:lstStyle/>
+          <a:p>
+            <a:pPr indent="0" marL="0">
+              <a:buNone/>
+            </a:pPr>
+            <a:r>
+              <a:rPr lang="en-US" sz="2400" b="1" dirty="0">
+                <a:solidFill>
+                  <a:srgbClr val="C23A57"/>
                 </a:solidFill>
                 <a:latin typeface="Cambria" pitchFamily="34" charset="0"/>
                 <a:ea typeface="Cambria" pitchFamily="34" charset="-122"/>
                 <a:cs typeface="Cambria" pitchFamily="34" charset="-120"/>
               </a:rPr>
-              <a:t>2</a:t>
-            </a:r>
-            <a:endParaRPr lang="en-US" sz="1600" dirty="0"/>
-          </a:p>
-        </p:txBody>
-      </p:sp>
-      <p:sp>
-        <p:nvSpPr>
-          <p:cNvPr id="14" name="Text 12"/>
-          <p:cNvSpPr txBox="1"/>
-          <p:nvPr/>
-        </p:nvSpPr>
-        <p:spPr>
-          <a:xfrm>
-            <a:off x="4471416" y="2560320"/>
-            <a:ext cx="2926080" cy="320040"/>
-          </a:xfrm>
-          <a:prstGeom prst="rect">
-            <a:avLst/>
-          </a:prstGeom>
-          <a:noFill/>
-          <a:ln/>
-        </p:spPr>
-        <p:txBody>
-          <a:bodyPr wrap="square" lIns="0" tIns="0" rIns="0" bIns="0" rtlCol="0" anchor="ctr"/>
-          <a:lstStyle/>
-          <a:p>
-            <a:pPr indent="0" marL="0">
-              <a:buNone/>
-            </a:pPr>
-            <a:r>
-              <a:rPr lang="en-US" sz="1300" b="1" dirty="0">
-                <a:solidFill>
-                  <a:srgbClr val="1E2761"/>
-                </a:solidFill>
-                <a:latin typeface="Calibri" pitchFamily="34" charset="0"/>
-                <a:ea typeface="Calibri" pitchFamily="34" charset="-122"/>
-                <a:cs typeface="Calibri" pitchFamily="34" charset="-120"/>
-              </a:rPr>
-              <a:t>교육 현장 활용</a:t>
-            </a:r>
-            <a:endParaRPr lang="en-US" sz="1300" dirty="0"/>
-          </a:p>
-        </p:txBody>
-      </p:sp>
-      <p:sp>
-        <p:nvSpPr>
-          <p:cNvPr id="15" name="Text 13"/>
-          <p:cNvSpPr txBox="1"/>
-          <p:nvPr/>
-        </p:nvSpPr>
-        <p:spPr>
-          <a:xfrm>
-            <a:off x="4471416" y="2880360"/>
-            <a:ext cx="2926080" cy="731520"/>
-          </a:xfrm>
-          <a:prstGeom prst="rect">
-            <a:avLst/>
-          </a:prstGeom>
-          <a:noFill/>
-          <a:ln/>
-        </p:spPr>
-        <p:txBody>
-          <a:bodyPr wrap="square" lIns="0" tIns="0" rIns="0" bIns="0" rtlCol="0" anchor="ctr"/>
-          <a:lstStyle/>
-          <a:p>
-            <a:pPr indent="0" marL="0">
-              <a:lnSpc>
-                <a:spcPct val="120000"/>
-              </a:lnSpc>
-              <a:buNone/>
-            </a:pPr>
-            <a:r>
-              <a:rPr lang="en-US" sz="970" dirty="0">
-                <a:solidFill>
-                  <a:srgbClr val="3F4A63"/>
-                </a:solidFill>
-                <a:latin typeface="Calibri" pitchFamily="34" charset="0"/>
-                <a:ea typeface="Calibri" pitchFamily="34" charset="-122"/>
-                <a:cs typeface="Calibri" pitchFamily="34" charset="-120"/>
-              </a:rPr>
-              <a:t>교내 소프트웨어융합학과 실습 수업과 외부 n8n 도입 교육 자료로 실제 활용</a:t>
-            </a:r>
-            <a:endParaRPr lang="en-US" sz="970" dirty="0"/>
-          </a:p>
-        </p:txBody>
-      </p:sp>
-      <p:sp>
-        <p:nvSpPr>
-          <p:cNvPr id="16" name="Shape 14"/>
+              <a:t>26.7%</a:t>
+            </a:r>
+            <a:endParaRPr lang="en-US" sz="2400" dirty="0"/>
+          </a:p>
+        </p:txBody>
+      </p:sp>
+      <p:sp>
+        <p:nvSpPr>
+          <p:cNvPr id="19" name="Text 17"/>
+          <p:cNvSpPr txBox="1"/>
+          <p:nvPr/>
+        </p:nvSpPr>
+        <p:spPr>
+          <a:xfrm>
+            <a:off x="4599432" y="3639312"/>
+            <a:ext cx="2916936" cy="237744"/>
+          </a:xfrm>
+          <a:prstGeom prst="rect">
+            <a:avLst/>
+          </a:prstGeom>
+          <a:noFill/>
+          <a:ln/>
+        </p:spPr>
+        <p:txBody>
+          <a:bodyPr wrap="square" lIns="0" tIns="0" rIns="0" bIns="0" rtlCol="0" anchor="ctr"/>
+          <a:lstStyle/>
+          <a:p>
+            <a:pPr indent="0" marL="0">
+              <a:buNone/>
+            </a:pPr>
+            <a:r>
+              <a:rPr lang="en-US" sz="950" dirty="0">
+                <a:solidFill>
+                  <a:srgbClr val="1B4E86"/>
+                </a:solidFill>
+                <a:latin typeface="Calibri" pitchFamily="34" charset="0"/>
+                <a:ea typeface="Calibri" pitchFamily="34" charset="-122"/>
+                <a:cs typeface="Calibri" pitchFamily="34" charset="-120"/>
+              </a:rPr>
+              <a:t>FlowGuide AI</a:t>
+            </a:r>
+            <a:endParaRPr lang="en-US" sz="950" dirty="0"/>
+          </a:p>
+        </p:txBody>
+      </p:sp>
+      <p:sp>
+        <p:nvSpPr>
+          <p:cNvPr id="20" name="Text 18"/>
+          <p:cNvSpPr txBox="1"/>
+          <p:nvPr/>
+        </p:nvSpPr>
+        <p:spPr>
+          <a:xfrm>
+            <a:off x="4599432" y="3858768"/>
+            <a:ext cx="2916936" cy="420624"/>
+          </a:xfrm>
+          <a:prstGeom prst="rect">
+            <a:avLst/>
+          </a:prstGeom>
+          <a:noFill/>
+          <a:ln/>
+        </p:spPr>
+        <p:txBody>
+          <a:bodyPr wrap="square" lIns="0" tIns="0" rIns="0" bIns="0" rtlCol="0" anchor="ctr"/>
+          <a:lstStyle/>
+          <a:p>
+            <a:pPr indent="0" marL="0">
+              <a:buNone/>
+            </a:pPr>
+            <a:r>
+              <a:rPr lang="en-US" sz="2400" b="1" dirty="0">
+                <a:solidFill>
+                  <a:srgbClr val="0EA5E9"/>
+                </a:solidFill>
+                <a:latin typeface="Cambria" pitchFamily="34" charset="0"/>
+                <a:ea typeface="Cambria" pitchFamily="34" charset="-122"/>
+                <a:cs typeface="Cambria" pitchFamily="34" charset="-120"/>
+              </a:rPr>
+              <a:t>0%</a:t>
+            </a:r>
+            <a:endParaRPr lang="en-US" sz="2400" dirty="0"/>
+          </a:p>
+        </p:txBody>
+      </p:sp>
+      <p:sp>
+        <p:nvSpPr>
+          <p:cNvPr id="21" name="Shape 19"/>
           <p:cNvSpPr/>
           <p:nvPr/>
         </p:nvSpPr>
         <p:spPr>
           <a:xfrm>
-            <a:off x="7845552" y="1783080"/>
-            <a:ext cx="3383280" cy="1874520"/>
+            <a:off x="8046720" y="2103120"/>
+            <a:ext cx="3429000" cy="2377440"/>
           </a:xfrm>
           <a:prstGeom prst="roundRect">
             <a:avLst>
-              <a:gd name="adj" fmla="val 3902"/>
+              <a:gd name="adj" fmla="val 3077"/>
             </a:avLst>
           </a:prstGeom>
           <a:solidFill>
             <a:srgbClr val="F3F5FA"/>
           </a:solidFill>
+          <a:ln w="12700">
+            <a:solidFill>
+              <a:srgbClr val="E3E7F0"/>
+            </a:solidFill>
+            <a:prstDash val="solid"/>
+          </a:ln>
+        </p:spPr>
+      </p:sp>
+      <p:sp>
+        <p:nvSpPr>
+          <p:cNvPr id="22" name="Text 20"/>
+          <p:cNvSpPr txBox="1"/>
+          <p:nvPr/>
+        </p:nvSpPr>
+        <p:spPr>
+          <a:xfrm>
+            <a:off x="8302752" y="2286000"/>
+            <a:ext cx="2916936" cy="457200"/>
+          </a:xfrm>
+          <a:prstGeom prst="rect">
+            <a:avLst/>
+          </a:prstGeom>
+          <a:noFill/>
+          <a:ln/>
+        </p:spPr>
+        <p:txBody>
+          <a:bodyPr wrap="square" lIns="0" tIns="0" rIns="0" bIns="0" rtlCol="0" anchor="ctr"/>
+          <a:lstStyle/>
+          <a:p>
+            <a:pPr indent="0" marL="0">
+              <a:lnSpc>
+                <a:spcPct val="110000"/>
+              </a:lnSpc>
+              <a:buNone/>
+            </a:pPr>
+            <a:r>
+              <a:rPr lang="en-US" sz="1200" b="1" dirty="0">
+                <a:solidFill>
+                  <a:srgbClr val="1E2761"/>
+                </a:solidFill>
+                <a:latin typeface="Calibri" pitchFamily="34" charset="0"/>
+                <a:ea typeface="Calibri" pitchFamily="34" charset="-122"/>
+                <a:cs typeface="Calibri" pitchFamily="34" charset="-120"/>
+              </a:rPr>
+              <a:t>스스로 고친 오류 (REG)</a:t>
+            </a:r>
+            <a:endParaRPr lang="en-US" sz="1200" dirty="0"/>
+          </a:p>
+        </p:txBody>
+      </p:sp>
+      <p:sp>
+        <p:nvSpPr>
+          <p:cNvPr id="23" name="Shape 21"/>
+          <p:cNvSpPr/>
+          <p:nvPr/>
+        </p:nvSpPr>
+        <p:spPr>
+          <a:xfrm>
+            <a:off x="8302752" y="2816352"/>
+            <a:ext cx="2916936" cy="0"/>
+          </a:xfrm>
+          <a:prstGeom prst="line">
+            <a:avLst/>
+          </a:prstGeom>
+          <a:noFill/>
           <a:ln w="9525">
             <a:solidFill>
               <a:srgbClr val="E3E7F0"/>
@@ -4805,429 +5714,264 @@
       </p:sp>
       <p:sp>
         <p:nvSpPr>
-          <p:cNvPr id="17" name="Shape 15"/>
-          <p:cNvSpPr/>
-          <p:nvPr/>
-        </p:nvSpPr>
-        <p:spPr>
-          <a:xfrm>
-            <a:off x="8074152" y="2011680"/>
-            <a:ext cx="457200" cy="457200"/>
-          </a:xfrm>
-          <a:prstGeom prst="roundRect">
-            <a:avLst>
-              <a:gd name="adj" fmla="val 20000"/>
-            </a:avLst>
-          </a:prstGeom>
-          <a:solidFill>
-            <a:srgbClr val="EA4B71"/>
-          </a:solidFill>
-          <a:ln/>
-        </p:spPr>
-      </p:sp>
-      <p:sp>
-        <p:nvSpPr>
-          <p:cNvPr id="18" name="Text 16"/>
-          <p:cNvSpPr txBox="1"/>
-          <p:nvPr/>
-        </p:nvSpPr>
-        <p:spPr>
-          <a:xfrm>
-            <a:off x="8074152" y="2011680"/>
-            <a:ext cx="457200" cy="457200"/>
-          </a:xfrm>
-          <a:prstGeom prst="rect">
-            <a:avLst/>
-          </a:prstGeom>
-          <a:noFill/>
-          <a:ln/>
-        </p:spPr>
-        <p:txBody>
-          <a:bodyPr wrap="square" lIns="0" tIns="0" rIns="0" bIns="0" rtlCol="0" anchor="ctr"/>
-          <a:lstStyle/>
-          <a:p>
-            <a:pPr algn="ctr" indent="0" marL="0">
-              <a:buNone/>
-            </a:pPr>
-            <a:r>
-              <a:rPr lang="en-US" sz="1600" b="1" dirty="0">
-                <a:solidFill>
-                  <a:srgbClr val="FFFFFF"/>
+          <p:cNvPr id="24" name="Text 22"/>
+          <p:cNvSpPr txBox="1"/>
+          <p:nvPr/>
+        </p:nvSpPr>
+        <p:spPr>
+          <a:xfrm>
+            <a:off x="8302752" y="2926080"/>
+            <a:ext cx="2916936" cy="237744"/>
+          </a:xfrm>
+          <a:prstGeom prst="rect">
+            <a:avLst/>
+          </a:prstGeom>
+          <a:noFill/>
+          <a:ln/>
+        </p:spPr>
+        <p:txBody>
+          <a:bodyPr wrap="square" lIns="0" tIns="0" rIns="0" bIns="0" rtlCol="0" anchor="ctr"/>
+          <a:lstStyle/>
+          <a:p>
+            <a:pPr indent="0" marL="0">
+              <a:buNone/>
+            </a:pPr>
+            <a:r>
+              <a:rPr lang="en-US" sz="950" dirty="0">
+                <a:solidFill>
+                  <a:srgbClr val="8A4457"/>
+                </a:solidFill>
+                <a:latin typeface="Calibri" pitchFamily="34" charset="0"/>
+                <a:ea typeface="Calibri" pitchFamily="34" charset="-122"/>
+                <a:cs typeface="Calibri" pitchFamily="34" charset="-120"/>
+              </a:rPr>
+              <a:t>일반 LLM만 사용</a:t>
+            </a:r>
+            <a:endParaRPr lang="en-US" sz="950" dirty="0"/>
+          </a:p>
+        </p:txBody>
+      </p:sp>
+      <p:sp>
+        <p:nvSpPr>
+          <p:cNvPr id="25" name="Text 23"/>
+          <p:cNvSpPr txBox="1"/>
+          <p:nvPr/>
+        </p:nvSpPr>
+        <p:spPr>
+          <a:xfrm>
+            <a:off x="8302752" y="3145536"/>
+            <a:ext cx="2916936" cy="420624"/>
+          </a:xfrm>
+          <a:prstGeom prst="rect">
+            <a:avLst/>
+          </a:prstGeom>
+          <a:noFill/>
+          <a:ln/>
+        </p:spPr>
+        <p:txBody>
+          <a:bodyPr wrap="square" lIns="0" tIns="0" rIns="0" bIns="0" rtlCol="0" anchor="ctr"/>
+          <a:lstStyle/>
+          <a:p>
+            <a:pPr indent="0" marL="0">
+              <a:buNone/>
+            </a:pPr>
+            <a:r>
+              <a:rPr lang="en-US" sz="2400" b="1" dirty="0">
+                <a:solidFill>
+                  <a:srgbClr val="C23A57"/>
                 </a:solidFill>
                 <a:latin typeface="Cambria" pitchFamily="34" charset="0"/>
                 <a:ea typeface="Cambria" pitchFamily="34" charset="-122"/>
                 <a:cs typeface="Cambria" pitchFamily="34" charset="-120"/>
               </a:rPr>
-              <a:t>3</a:t>
-            </a:r>
-            <a:endParaRPr lang="en-US" sz="1600" dirty="0"/>
-          </a:p>
-        </p:txBody>
-      </p:sp>
-      <p:sp>
-        <p:nvSpPr>
-          <p:cNvPr id="19" name="Text 17"/>
-          <p:cNvSpPr txBox="1"/>
-          <p:nvPr/>
-        </p:nvSpPr>
-        <p:spPr>
-          <a:xfrm>
-            <a:off x="8074152" y="2560320"/>
-            <a:ext cx="2926080" cy="320040"/>
-          </a:xfrm>
-          <a:prstGeom prst="rect">
-            <a:avLst/>
-          </a:prstGeom>
-          <a:noFill/>
-          <a:ln/>
-        </p:spPr>
-        <p:txBody>
-          <a:bodyPr wrap="square" lIns="0" tIns="0" rIns="0" bIns="0" rtlCol="0" anchor="ctr"/>
-          <a:lstStyle/>
-          <a:p>
-            <a:pPr indent="0" marL="0">
-              <a:buNone/>
-            </a:pPr>
-            <a:r>
-              <a:rPr lang="en-US" sz="1300" b="1" dirty="0">
-                <a:solidFill>
-                  <a:srgbClr val="1E2761"/>
-                </a:solidFill>
-                <a:latin typeface="Calibri" pitchFamily="34" charset="0"/>
-                <a:ea typeface="Calibri" pitchFamily="34" charset="-122"/>
-                <a:cs typeface="Calibri" pitchFamily="34" charset="-120"/>
-              </a:rPr>
-              <a:t>정식 배포</a:t>
-            </a:r>
-            <a:endParaRPr lang="en-US" sz="1300" dirty="0"/>
-          </a:p>
-        </p:txBody>
-      </p:sp>
-      <p:sp>
-        <p:nvSpPr>
-          <p:cNvPr id="20" name="Text 18"/>
-          <p:cNvSpPr txBox="1"/>
-          <p:nvPr/>
-        </p:nvSpPr>
-        <p:spPr>
-          <a:xfrm>
-            <a:off x="8074152" y="2880360"/>
-            <a:ext cx="2926080" cy="731520"/>
-          </a:xfrm>
-          <a:prstGeom prst="rect">
-            <a:avLst/>
-          </a:prstGeom>
-          <a:noFill/>
-          <a:ln/>
-        </p:spPr>
-        <p:txBody>
-          <a:bodyPr wrap="square" lIns="0" tIns="0" rIns="0" bIns="0" rtlCol="0" anchor="ctr"/>
-          <a:lstStyle/>
-          <a:p>
-            <a:pPr indent="0" marL="0">
-              <a:lnSpc>
-                <a:spcPct val="120000"/>
-              </a:lnSpc>
-              <a:buNone/>
-            </a:pPr>
-            <a:r>
-              <a:rPr lang="en-US" sz="970" dirty="0">
-                <a:solidFill>
-                  <a:srgbClr val="3F4A63"/>
-                </a:solidFill>
-                <a:latin typeface="Calibri" pitchFamily="34" charset="0"/>
-                <a:ea typeface="Calibri" pitchFamily="34" charset="-122"/>
-                <a:cs typeface="Calibri" pitchFamily="34" charset="-120"/>
-              </a:rPr>
-              <a:t>Chrome 확장 프로그램을 정식 스토어에 올려 실사용자 피드백 기반으로 고도화</a:t>
-            </a:r>
-            <a:endParaRPr lang="en-US" sz="970" dirty="0"/>
-          </a:p>
-        </p:txBody>
-      </p:sp>
-      <p:sp>
-        <p:nvSpPr>
-          <p:cNvPr id="21" name="Shape 19"/>
-          <p:cNvSpPr/>
-          <p:nvPr/>
-        </p:nvSpPr>
-        <p:spPr>
-          <a:xfrm>
-            <a:off x="640080" y="3877056"/>
-            <a:ext cx="3383280" cy="1874520"/>
-          </a:xfrm>
-          <a:prstGeom prst="roundRect">
-            <a:avLst>
-              <a:gd name="adj" fmla="val 3902"/>
-            </a:avLst>
-          </a:prstGeom>
-          <a:solidFill>
-            <a:srgbClr val="F3F5FA"/>
-          </a:solidFill>
-          <a:ln w="9525">
-            <a:solidFill>
-              <a:srgbClr val="E3E7F0"/>
-            </a:solidFill>
-            <a:prstDash val="solid"/>
-          </a:ln>
-        </p:spPr>
-      </p:sp>
-      <p:sp>
-        <p:nvSpPr>
-          <p:cNvPr id="22" name="Shape 20"/>
-          <p:cNvSpPr/>
-          <p:nvPr/>
-        </p:nvSpPr>
-        <p:spPr>
-          <a:xfrm>
-            <a:off x="868680" y="4105656"/>
-            <a:ext cx="457200" cy="457200"/>
-          </a:xfrm>
-          <a:prstGeom prst="roundRect">
-            <a:avLst>
-              <a:gd name="adj" fmla="val 20000"/>
-            </a:avLst>
-          </a:prstGeom>
-          <a:solidFill>
-            <a:srgbClr val="4C3F9E"/>
-          </a:solidFill>
-          <a:ln/>
-        </p:spPr>
-      </p:sp>
-      <p:sp>
-        <p:nvSpPr>
-          <p:cNvPr id="23" name="Text 21"/>
-          <p:cNvSpPr txBox="1"/>
-          <p:nvPr/>
-        </p:nvSpPr>
-        <p:spPr>
-          <a:xfrm>
-            <a:off x="868680" y="4105656"/>
-            <a:ext cx="457200" cy="457200"/>
-          </a:xfrm>
-          <a:prstGeom prst="rect">
-            <a:avLst/>
-          </a:prstGeom>
-          <a:noFill/>
-          <a:ln/>
-        </p:spPr>
-        <p:txBody>
-          <a:bodyPr wrap="square" lIns="0" tIns="0" rIns="0" bIns="0" rtlCol="0" anchor="ctr"/>
-          <a:lstStyle/>
-          <a:p>
-            <a:pPr algn="ctr" indent="0" marL="0">
-              <a:buNone/>
-            </a:pPr>
-            <a:r>
-              <a:rPr lang="en-US" sz="1600" b="1" dirty="0">
-                <a:solidFill>
-                  <a:srgbClr val="FFFFFF"/>
+              <a:t>0건</a:t>
+            </a:r>
+            <a:endParaRPr lang="en-US" sz="2400" dirty="0"/>
+          </a:p>
+        </p:txBody>
+      </p:sp>
+      <p:sp>
+        <p:nvSpPr>
+          <p:cNvPr id="26" name="Text 24"/>
+          <p:cNvSpPr txBox="1"/>
+          <p:nvPr/>
+        </p:nvSpPr>
+        <p:spPr>
+          <a:xfrm>
+            <a:off x="8302752" y="3639312"/>
+            <a:ext cx="2916936" cy="237744"/>
+          </a:xfrm>
+          <a:prstGeom prst="rect">
+            <a:avLst/>
+          </a:prstGeom>
+          <a:noFill/>
+          <a:ln/>
+        </p:spPr>
+        <p:txBody>
+          <a:bodyPr wrap="square" lIns="0" tIns="0" rIns="0" bIns="0" rtlCol="0" anchor="ctr"/>
+          <a:lstStyle/>
+          <a:p>
+            <a:pPr indent="0" marL="0">
+              <a:buNone/>
+            </a:pPr>
+            <a:r>
+              <a:rPr lang="en-US" sz="950" dirty="0">
+                <a:solidFill>
+                  <a:srgbClr val="1B4E86"/>
+                </a:solidFill>
+                <a:latin typeface="Calibri" pitchFamily="34" charset="0"/>
+                <a:ea typeface="Calibri" pitchFamily="34" charset="-122"/>
+                <a:cs typeface="Calibri" pitchFamily="34" charset="-120"/>
+              </a:rPr>
+              <a:t>FlowGuide AI</a:t>
+            </a:r>
+            <a:endParaRPr lang="en-US" sz="950" dirty="0"/>
+          </a:p>
+        </p:txBody>
+      </p:sp>
+      <p:sp>
+        <p:nvSpPr>
+          <p:cNvPr id="27" name="Text 25"/>
+          <p:cNvSpPr txBox="1"/>
+          <p:nvPr/>
+        </p:nvSpPr>
+        <p:spPr>
+          <a:xfrm>
+            <a:off x="8302752" y="3858768"/>
+            <a:ext cx="2916936" cy="420624"/>
+          </a:xfrm>
+          <a:prstGeom prst="rect">
+            <a:avLst/>
+          </a:prstGeom>
+          <a:noFill/>
+          <a:ln/>
+        </p:spPr>
+        <p:txBody>
+          <a:bodyPr wrap="square" lIns="0" tIns="0" rIns="0" bIns="0" rtlCol="0" anchor="ctr"/>
+          <a:lstStyle/>
+          <a:p>
+            <a:pPr indent="0" marL="0">
+              <a:buNone/>
+            </a:pPr>
+            <a:r>
+              <a:rPr lang="en-US" sz="2400" b="1" dirty="0">
+                <a:solidFill>
+                  <a:srgbClr val="0EA5E9"/>
                 </a:solidFill>
                 <a:latin typeface="Cambria" pitchFamily="34" charset="0"/>
                 <a:ea typeface="Cambria" pitchFamily="34" charset="-122"/>
                 <a:cs typeface="Cambria" pitchFamily="34" charset="-120"/>
               </a:rPr>
-              <a:t>4</a:t>
-            </a:r>
-            <a:endParaRPr lang="en-US" sz="1600" dirty="0"/>
-          </a:p>
-        </p:txBody>
-      </p:sp>
-      <p:sp>
-        <p:nvSpPr>
-          <p:cNvPr id="24" name="Text 22"/>
-          <p:cNvSpPr txBox="1"/>
-          <p:nvPr/>
-        </p:nvSpPr>
-        <p:spPr>
-          <a:xfrm>
-            <a:off x="868680" y="4654296"/>
-            <a:ext cx="2926080" cy="320040"/>
-          </a:xfrm>
-          <a:prstGeom prst="rect">
-            <a:avLst/>
-          </a:prstGeom>
-          <a:noFill/>
-          <a:ln/>
-        </p:spPr>
-        <p:txBody>
-          <a:bodyPr wrap="square" lIns="0" tIns="0" rIns="0" bIns="0" rtlCol="0" anchor="ctr"/>
-          <a:lstStyle/>
-          <a:p>
-            <a:pPr indent="0" marL="0">
-              <a:buNone/>
-            </a:pPr>
-            <a:r>
-              <a:rPr lang="en-US" sz="1300" b="1" dirty="0">
-                <a:solidFill>
-                  <a:srgbClr val="1E2761"/>
-                </a:solidFill>
-                <a:latin typeface="Calibri" pitchFamily="34" charset="0"/>
-                <a:ea typeface="Calibri" pitchFamily="34" charset="-122"/>
-                <a:cs typeface="Calibri" pitchFamily="34" charset="-120"/>
-              </a:rPr>
-              <a:t>맞춤 학습 경로</a:t>
-            </a:r>
-            <a:endParaRPr lang="en-US" sz="1300" dirty="0"/>
-          </a:p>
-        </p:txBody>
-      </p:sp>
-      <p:sp>
-        <p:nvSpPr>
-          <p:cNvPr id="25" name="Text 23"/>
-          <p:cNvSpPr txBox="1"/>
-          <p:nvPr/>
-        </p:nvSpPr>
-        <p:spPr>
-          <a:xfrm>
-            <a:off x="868680" y="4974336"/>
-            <a:ext cx="2926080" cy="731520"/>
-          </a:xfrm>
-          <a:prstGeom prst="rect">
-            <a:avLst/>
-          </a:prstGeom>
-          <a:noFill/>
-          <a:ln/>
-        </p:spPr>
-        <p:txBody>
-          <a:bodyPr wrap="square" lIns="0" tIns="0" rIns="0" bIns="0" rtlCol="0" anchor="ctr"/>
-          <a:lstStyle/>
-          <a:p>
-            <a:pPr indent="0" marL="0">
-              <a:lnSpc>
-                <a:spcPct val="120000"/>
-              </a:lnSpc>
-              <a:buNone/>
-            </a:pPr>
-            <a:r>
-              <a:rPr lang="en-US" sz="970" dirty="0">
-                <a:solidFill>
-                  <a:srgbClr val="3F4A63"/>
-                </a:solidFill>
-                <a:latin typeface="Calibri" pitchFamily="34" charset="0"/>
-                <a:ea typeface="Calibri" pitchFamily="34" charset="-122"/>
-                <a:cs typeface="Calibri" pitchFamily="34" charset="-120"/>
-              </a:rPr>
-              <a:t>구현된 학습 경로 추천 기능을 커리큘럼 로직과 연결해 선수 개념 기반 맞춤 학습 경로 자동 생성</a:t>
-            </a:r>
-            <a:endParaRPr lang="en-US" sz="970" dirty="0"/>
-          </a:p>
-        </p:txBody>
-      </p:sp>
-      <p:sp>
-        <p:nvSpPr>
-          <p:cNvPr id="26" name="Shape 24"/>
+              <a:t>평균 2.33건</a:t>
+            </a:r>
+            <a:endParaRPr lang="en-US" sz="2400" dirty="0"/>
+          </a:p>
+        </p:txBody>
+      </p:sp>
+      <p:sp>
+        <p:nvSpPr>
+          <p:cNvPr id="28" name="Shape 26"/>
           <p:cNvSpPr/>
           <p:nvPr/>
         </p:nvSpPr>
         <p:spPr>
           <a:xfrm>
-            <a:off x="4242816" y="3877056"/>
-            <a:ext cx="3383280" cy="1874520"/>
+            <a:off x="640080" y="4709160"/>
+            <a:ext cx="10881360" cy="566928"/>
           </a:xfrm>
           <a:prstGeom prst="roundRect">
             <a:avLst>
-              <a:gd name="adj" fmla="val 3902"/>
+              <a:gd name="adj" fmla="val 12903"/>
             </a:avLst>
           </a:prstGeom>
           <a:solidFill>
-            <a:srgbClr val="F3F5FA"/>
+            <a:srgbClr val="1E2761"/>
           </a:solidFill>
-          <a:ln w="9525">
-            <a:solidFill>
-              <a:srgbClr val="E3E7F0"/>
-            </a:solidFill>
-            <a:prstDash val="solid"/>
-          </a:ln>
-        </p:spPr>
-      </p:sp>
-      <p:sp>
-        <p:nvSpPr>
-          <p:cNvPr id="27" name="Shape 25"/>
-          <p:cNvSpPr/>
-          <p:nvPr/>
-        </p:nvSpPr>
-        <p:spPr>
-          <a:xfrm>
-            <a:off x="4471416" y="4105656"/>
-            <a:ext cx="457200" cy="457200"/>
-          </a:xfrm>
-          <a:prstGeom prst="roundRect">
-            <a:avLst>
-              <a:gd name="adj" fmla="val 20000"/>
-            </a:avLst>
-          </a:prstGeom>
-          <a:solidFill>
-            <a:srgbClr val="3B82C4"/>
-          </a:solidFill>
-          <a:ln/>
-        </p:spPr>
-      </p:sp>
-      <p:sp>
-        <p:nvSpPr>
-          <p:cNvPr id="28" name="Text 26"/>
-          <p:cNvSpPr txBox="1"/>
-          <p:nvPr/>
-        </p:nvSpPr>
-        <p:spPr>
-          <a:xfrm>
-            <a:off x="4471416" y="4105656"/>
-            <a:ext cx="457200" cy="457200"/>
-          </a:xfrm>
-          <a:prstGeom prst="rect">
-            <a:avLst/>
-          </a:prstGeom>
-          <a:noFill/>
-          <a:ln/>
-        </p:spPr>
-        <p:txBody>
-          <a:bodyPr wrap="square" lIns="0" tIns="0" rIns="0" bIns="0" rtlCol="0" anchor="ctr"/>
-          <a:lstStyle/>
-          <a:p>
-            <a:pPr algn="ctr" indent="0" marL="0">
-              <a:buNone/>
-            </a:pPr>
-            <a:r>
-              <a:rPr lang="en-US" sz="1600" b="1" dirty="0">
+          <a:ln/>
+        </p:spPr>
+      </p:sp>
+      <p:sp>
+        <p:nvSpPr>
+          <p:cNvPr id="29" name="Text 27"/>
+          <p:cNvSpPr txBox="1"/>
+          <p:nvPr/>
+        </p:nvSpPr>
+        <p:spPr>
+          <a:xfrm>
+            <a:off x="868680" y="4709160"/>
+            <a:ext cx="10424160" cy="566928"/>
+          </a:xfrm>
+          <a:prstGeom prst="rect">
+            <a:avLst/>
+          </a:prstGeom>
+          <a:noFill/>
+          <a:ln/>
+        </p:spPr>
+        <p:txBody>
+          <a:bodyPr wrap="square" lIns="0" tIns="0" rIns="0" bIns="0" rtlCol="0" anchor="ctr"/>
+          <a:lstStyle/>
+          <a:p>
+            <a:pPr indent="0" marL="0">
+              <a:buNone/>
+            </a:pPr>
+            <a:r>
+              <a:rPr lang="en-US" sz="1300" b="1" dirty="0">
                 <a:solidFill>
                   <a:srgbClr val="FFFFFF"/>
                 </a:solidFill>
-                <a:latin typeface="Cambria" pitchFamily="34" charset="0"/>
-                <a:ea typeface="Cambria" pitchFamily="34" charset="-122"/>
-                <a:cs typeface="Cambria" pitchFamily="34" charset="-120"/>
-              </a:rPr>
-              <a:t>5</a:t>
-            </a:r>
-            <a:endParaRPr lang="en-US" sz="1600" dirty="0"/>
-          </a:p>
-        </p:txBody>
-      </p:sp>
-      <p:sp>
-        <p:nvSpPr>
-          <p:cNvPr id="29" name="Text 27"/>
-          <p:cNvSpPr txBox="1"/>
-          <p:nvPr/>
-        </p:nvSpPr>
-        <p:spPr>
-          <a:xfrm>
-            <a:off x="4471416" y="4654296"/>
-            <a:ext cx="2926080" cy="320040"/>
-          </a:xfrm>
-          <a:prstGeom prst="rect">
-            <a:avLst/>
-          </a:prstGeom>
-          <a:noFill/>
-          <a:ln/>
-        </p:spPr>
-        <p:txBody>
-          <a:bodyPr wrap="square" lIns="0" tIns="0" rIns="0" bIns="0" rtlCol="0" anchor="ctr"/>
-          <a:lstStyle/>
-          <a:p>
-            <a:pPr indent="0" marL="0">
-              <a:buNone/>
-            </a:pPr>
-            <a:r>
-              <a:rPr lang="en-US" sz="1300" b="1" dirty="0">
+                <a:latin typeface="Calibri" pitchFamily="34" charset="0"/>
+                <a:ea typeface="Calibri" pitchFamily="34" charset="-122"/>
+                <a:cs typeface="Calibri" pitchFamily="34" charset="-120"/>
+              </a:rPr>
+              <a:t>같은 GPT-4o mini, 다른 결과 — </a:t>
+            </a:r>
+            <a:pPr indent="0" marL="0">
+              <a:buNone/>
+            </a:pPr>
+            <a:r>
+              <a:rPr lang="en-US" sz="1200" dirty="0">
+                <a:solidFill>
+                  <a:srgbClr val="CBD9FA"/>
+                </a:solidFill>
+                <a:latin typeface="Calibri" pitchFamily="34" charset="0"/>
+                <a:ea typeface="Calibri" pitchFamily="34" charset="-122"/>
+                <a:cs typeface="Calibri" pitchFamily="34" charset="-120"/>
+              </a:rPr>
+              <a:t>ChatGPT는 “워크플로우처럼 보이는 것”을 만들고, FlowGuide AI는 “실제로 n8n에서 동작하는 워크플로우”를 만듭니다.</a:t>
+            </a:r>
+            <a:endParaRPr lang="en-US" sz="1300" dirty="0"/>
+          </a:p>
+        </p:txBody>
+      </p:sp>
+      <p:sp>
+        <p:nvSpPr>
+          <p:cNvPr id="30" name="Text 28"/>
+          <p:cNvSpPr txBox="1"/>
+          <p:nvPr/>
+        </p:nvSpPr>
+        <p:spPr>
+          <a:xfrm>
+            <a:off x="640080" y="5440680"/>
+            <a:ext cx="10881360" cy="777240"/>
+          </a:xfrm>
+          <a:prstGeom prst="rect">
+            <a:avLst/>
+          </a:prstGeom>
+          <a:noFill/>
+          <a:ln/>
+        </p:spPr>
+        <p:txBody>
+          <a:bodyPr wrap="square" lIns="0" tIns="0" rIns="0" bIns="0" rtlCol="0" anchor="ctr"/>
+          <a:lstStyle/>
+          <a:p>
+            <a:pPr indent="0" marL="0">
+              <a:lnSpc>
+                <a:spcPct val="125000"/>
+              </a:lnSpc>
+              <a:buNone/>
+            </a:pPr>
+            <a:r>
+              <a:rPr lang="en-US" sz="1050" b="1" dirty="0">
                 <a:solidFill>
                   <a:srgbClr val="1E2761"/>
                 </a:solidFill>
@@ -5235,41 +5979,16 @@
                 <a:ea typeface="Calibri" pitchFamily="34" charset="-122"/>
                 <a:cs typeface="Calibri" pitchFamily="34" charset="-120"/>
               </a:rPr>
-              <a:t>다국어 · 온프레미스</a:t>
-            </a:r>
-            <a:endParaRPr lang="en-US" sz="1300" dirty="0"/>
-          </a:p>
-        </p:txBody>
-      </p:sp>
-      <p:sp>
-        <p:nvSpPr>
-          <p:cNvPr id="30" name="Text 28"/>
-          <p:cNvSpPr txBox="1"/>
-          <p:nvPr/>
-        </p:nvSpPr>
-        <p:spPr>
-          <a:xfrm>
-            <a:off x="4471416" y="4974336"/>
-            <a:ext cx="2926080" cy="731520"/>
-          </a:xfrm>
-          <a:prstGeom prst="rect">
-            <a:avLst/>
-          </a:prstGeom>
-          <a:noFill/>
-          <a:ln/>
-        </p:spPr>
-        <p:txBody>
-          <a:bodyPr wrap="square" lIns="0" tIns="0" rIns="0" bIns="0" rtlCol="0" anchor="ctr"/>
-          <a:lstStyle/>
-          <a:p>
+              <a:t>비교 방법 — </a:t>
+            </a:r>
             <a:pPr indent="0" marL="0">
               <a:lnSpc>
-                <a:spcPct val="120000"/>
+                <a:spcPct val="125000"/>
               </a:lnSpc>
               <a:buNone/>
             </a:pPr>
             <a:r>
-              <a:rPr lang="en-US" sz="970" dirty="0">
+              <a:rPr lang="en-US" sz="1050" dirty="0">
                 <a:solidFill>
                   <a:srgbClr val="3F4A63"/>
                 </a:solidFill>
@@ -5277,9 +5996,9 @@
                 <a:ea typeface="Calibri" pitchFamily="34" charset="-122"/>
                 <a:cs typeface="Calibri" pitchFamily="34" charset="-120"/>
               </a:rPr>
-              <a:t>다국어 지원 확장 및 기업 내부 n8n 환경을 위한 자체 설치형 배포 검토</a:t>
-            </a:r>
-            <a:endParaRPr lang="en-US" sz="970" dirty="0"/>
+              <a:t>GPT-4o mini에서 RAG·온톨로지·REG·검증을 모두 제거하고, 가공 없는 원본 JSON을 그대로 n8n REST API에 주입해 실제 동작 여부까지 확인했습니다. 존재하지 않는 노드 타입을 쓴 경우 n8n이 생성 시점엔 받아주더라도 실행 시점에 반드시 깨지므로, 이를 “실사용 불가”로 계산에 반영했습니다.</a:t>
+            </a:r>
+            <a:endParaRPr lang="en-US" sz="1050" dirty="0"/>
           </a:p>
         </p:txBody>
       </p:sp>
@@ -5372,6 +6091,2203 @@
 <file path=ppt/slides/slide13.xml><?xml version="1.0" encoding="utf-8"?>
 <p:sld xmlns:a="http://schemas.openxmlformats.org/drawingml/2006/main" xmlns:r="http://schemas.openxmlformats.org/officeDocument/2006/relationships" xmlns:p="http://schemas.openxmlformats.org/presentationml/2006/main">
   <p:cSld name="Slide 13">
+    <p:spTree>
+      <p:nvGrpSpPr>
+        <p:cNvPr id="1" name=""/>
+        <p:cNvGrpSpPr/>
+        <p:nvPr/>
+      </p:nvGrpSpPr>
+      <p:grpSpPr>
+        <a:xfrm>
+          <a:off x="0" y="0"/>
+          <a:ext cx="0" cy="0"/>
+          <a:chOff x="0" y="0"/>
+          <a:chExt cx="0" cy="0"/>
+        </a:xfrm>
+      </p:grpSpPr>
+      <p:sp>
+        <p:nvSpPr>
+          <p:cNvPr id="2" name="Shape 0"/>
+          <p:cNvSpPr/>
+          <p:nvPr/>
+        </p:nvSpPr>
+        <p:spPr>
+          <a:xfrm>
+            <a:off x="10149840" y="320040"/>
+            <a:ext cx="1691640" cy="502920"/>
+          </a:xfrm>
+          <a:prstGeom prst="roundRect">
+            <a:avLst>
+              <a:gd name="adj" fmla="val 21818"/>
+            </a:avLst>
+          </a:prstGeom>
+          <a:solidFill>
+            <a:srgbClr val="1E2761"/>
+          </a:solidFill>
+          <a:ln/>
+        </p:spPr>
+      </p:sp>
+      <p:sp>
+        <p:nvSpPr>
+          <p:cNvPr id="3" name="Text 1"/>
+          <p:cNvSpPr txBox="1"/>
+          <p:nvPr/>
+        </p:nvSpPr>
+        <p:spPr>
+          <a:xfrm>
+            <a:off x="10149840" y="320040"/>
+            <a:ext cx="1691640" cy="502920"/>
+          </a:xfrm>
+          <a:prstGeom prst="rect">
+            <a:avLst/>
+          </a:prstGeom>
+          <a:noFill/>
+          <a:ln/>
+        </p:spPr>
+        <p:txBody>
+          <a:bodyPr wrap="square" lIns="0" tIns="0" rIns="0" bIns="0" rtlCol="0" anchor="ctr"/>
+          <a:lstStyle/>
+          <a:p>
+            <a:pPr algn="ctr" indent="0" marL="0">
+              <a:buNone/>
+            </a:pPr>
+            <a:r>
+              <a:rPr lang="en-US" sz="1200" b="1" dirty="0">
+                <a:solidFill>
+                  <a:srgbClr val="EA4B71"/>
+                </a:solidFill>
+                <a:latin typeface="Calibri" pitchFamily="34" charset="0"/>
+                <a:ea typeface="Calibri" pitchFamily="34" charset="-122"/>
+                <a:cs typeface="Calibri" pitchFamily="34" charset="-120"/>
+              </a:rPr>
+              <a:t>08  </a:t>
+            </a:r>
+            <a:pPr algn="ctr" indent="0" marL="0">
+              <a:buNone/>
+            </a:pPr>
+            <a:r>
+              <a:rPr lang="en-US" sz="950" dirty="0">
+                <a:solidFill>
+                  <a:srgbClr val="FFFFFF"/>
+                </a:solidFill>
+                <a:latin typeface="Calibri" pitchFamily="34" charset="0"/>
+                <a:ea typeface="Calibri" pitchFamily="34" charset="-122"/>
+                <a:cs typeface="Calibri" pitchFamily="34" charset="-120"/>
+              </a:rPr>
+              <a:t>추진 경과</a:t>
+            </a:r>
+            <a:endParaRPr lang="en-US" sz="1200" dirty="0"/>
+          </a:p>
+        </p:txBody>
+      </p:sp>
+      <p:sp>
+        <p:nvSpPr>
+          <p:cNvPr id="4" name="Text 2"/>
+          <p:cNvSpPr txBox="1"/>
+          <p:nvPr/>
+        </p:nvSpPr>
+        <p:spPr>
+          <a:xfrm>
+            <a:off x="640080" y="502920"/>
+            <a:ext cx="7315200" cy="365760"/>
+          </a:xfrm>
+          <a:prstGeom prst="rect">
+            <a:avLst/>
+          </a:prstGeom>
+          <a:noFill/>
+          <a:ln/>
+        </p:spPr>
+        <p:txBody>
+          <a:bodyPr wrap="square" lIns="0" tIns="0" rIns="0" bIns="0" rtlCol="0" anchor="ctr"/>
+          <a:lstStyle/>
+          <a:p>
+            <a:pPr indent="0" marL="0">
+              <a:buNone/>
+            </a:pPr>
+            <a:r>
+              <a:rPr lang="en-US" sz="1300" b="1" spc="200" kern="0" dirty="0">
+                <a:solidFill>
+                  <a:srgbClr val="0EA5E9"/>
+                </a:solidFill>
+                <a:latin typeface="Calibri" pitchFamily="34" charset="0"/>
+                <a:ea typeface="Calibri" pitchFamily="34" charset="-122"/>
+                <a:cs typeface="Calibri" pitchFamily="34" charset="-120"/>
+              </a:rPr>
+              <a:t>TIMELINE</a:t>
+            </a:r>
+            <a:endParaRPr lang="en-US" sz="1300" dirty="0"/>
+          </a:p>
+        </p:txBody>
+      </p:sp>
+      <p:sp>
+        <p:nvSpPr>
+          <p:cNvPr id="5" name="Text 3"/>
+          <p:cNvSpPr txBox="1"/>
+          <p:nvPr/>
+        </p:nvSpPr>
+        <p:spPr>
+          <a:xfrm>
+            <a:off x="640080" y="841248"/>
+            <a:ext cx="8778240" cy="777240"/>
+          </a:xfrm>
+          <a:prstGeom prst="rect">
+            <a:avLst/>
+          </a:prstGeom>
+          <a:noFill/>
+          <a:ln/>
+        </p:spPr>
+        <p:txBody>
+          <a:bodyPr wrap="square" lIns="0" tIns="0" rIns="0" bIns="0" rtlCol="0" anchor="ctr"/>
+          <a:lstStyle/>
+          <a:p>
+            <a:pPr indent="0" marL="0">
+              <a:buNone/>
+            </a:pPr>
+            <a:r>
+              <a:rPr lang="en-US" sz="3000" b="1" dirty="0">
+                <a:solidFill>
+                  <a:srgbClr val="1E2761"/>
+                </a:solidFill>
+                <a:latin typeface="Cambria" pitchFamily="34" charset="0"/>
+                <a:ea typeface="Cambria" pitchFamily="34" charset="-122"/>
+                <a:cs typeface="Cambria" pitchFamily="34" charset="-120"/>
+              </a:rPr>
+              <a:t>5단계로 완성했습니다</a:t>
+            </a:r>
+            <a:endParaRPr lang="en-US" sz="3000" dirty="0"/>
+          </a:p>
+        </p:txBody>
+      </p:sp>
+      <p:sp>
+        <p:nvSpPr>
+          <p:cNvPr id="6" name="Shape 4"/>
+          <p:cNvSpPr/>
+          <p:nvPr/>
+        </p:nvSpPr>
+        <p:spPr>
+          <a:xfrm>
+            <a:off x="1051560" y="2167128"/>
+            <a:ext cx="0" cy="3364992"/>
+          </a:xfrm>
+          <a:prstGeom prst="line">
+            <a:avLst/>
+          </a:prstGeom>
+          <a:noFill/>
+          <a:ln w="25400">
+            <a:solidFill>
+              <a:srgbClr val="E3E7F0"/>
+            </a:solidFill>
+            <a:prstDash val="solid"/>
+          </a:ln>
+        </p:spPr>
+      </p:sp>
+      <p:sp>
+        <p:nvSpPr>
+          <p:cNvPr id="7" name="Shape 5"/>
+          <p:cNvSpPr/>
+          <p:nvPr/>
+        </p:nvSpPr>
+        <p:spPr>
+          <a:xfrm>
+            <a:off x="777240" y="1965960"/>
+            <a:ext cx="548640" cy="548640"/>
+          </a:xfrm>
+          <a:prstGeom prst="ellipse">
+            <a:avLst/>
+          </a:prstGeom>
+          <a:solidFill>
+            <a:srgbClr val="1E2761"/>
+          </a:solidFill>
+          <a:ln/>
+        </p:spPr>
+      </p:sp>
+      <p:sp>
+        <p:nvSpPr>
+          <p:cNvPr id="8" name="Text 6"/>
+          <p:cNvSpPr txBox="1"/>
+          <p:nvPr/>
+        </p:nvSpPr>
+        <p:spPr>
+          <a:xfrm>
+            <a:off x="777240" y="1965960"/>
+            <a:ext cx="548640" cy="548640"/>
+          </a:xfrm>
+          <a:prstGeom prst="rect">
+            <a:avLst/>
+          </a:prstGeom>
+          <a:noFill/>
+          <a:ln/>
+        </p:spPr>
+        <p:txBody>
+          <a:bodyPr wrap="square" lIns="0" tIns="0" rIns="0" bIns="0" rtlCol="0" anchor="ctr"/>
+          <a:lstStyle/>
+          <a:p>
+            <a:pPr algn="ctr" indent="0" marL="0">
+              <a:buNone/>
+            </a:pPr>
+            <a:r>
+              <a:rPr lang="en-US" sz="1600" b="1" dirty="0">
+                <a:solidFill>
+                  <a:srgbClr val="FFFFFF"/>
+                </a:solidFill>
+                <a:latin typeface="Cambria" pitchFamily="34" charset="0"/>
+                <a:ea typeface="Cambria" pitchFamily="34" charset="-122"/>
+                <a:cs typeface="Cambria" pitchFamily="34" charset="-120"/>
+              </a:rPr>
+              <a:t>1</a:t>
+            </a:r>
+            <a:endParaRPr lang="en-US" sz="1600" dirty="0"/>
+          </a:p>
+        </p:txBody>
+      </p:sp>
+      <p:sp>
+        <p:nvSpPr>
+          <p:cNvPr id="9" name="Text 7"/>
+          <p:cNvSpPr txBox="1"/>
+          <p:nvPr/>
+        </p:nvSpPr>
+        <p:spPr>
+          <a:xfrm>
+            <a:off x="1600200" y="1947672"/>
+            <a:ext cx="3291840" cy="365760"/>
+          </a:xfrm>
+          <a:prstGeom prst="rect">
+            <a:avLst/>
+          </a:prstGeom>
+          <a:noFill/>
+          <a:ln/>
+        </p:spPr>
+        <p:txBody>
+          <a:bodyPr wrap="square" lIns="0" tIns="0" rIns="0" bIns="0" rtlCol="0" anchor="ctr"/>
+          <a:lstStyle/>
+          <a:p>
+            <a:pPr indent="0" marL="0">
+              <a:buNone/>
+            </a:pPr>
+            <a:r>
+              <a:rPr lang="en-US" sz="1450" b="1" dirty="0">
+                <a:solidFill>
+                  <a:srgbClr val="1E2761"/>
+                </a:solidFill>
+                <a:latin typeface="Calibri" pitchFamily="34" charset="0"/>
+                <a:ea typeface="Calibri" pitchFamily="34" charset="-122"/>
+                <a:cs typeface="Calibri" pitchFamily="34" charset="-120"/>
+              </a:rPr>
+              <a:t>온톨로지 설계</a:t>
+            </a:r>
+            <a:endParaRPr lang="en-US" sz="1450" dirty="0"/>
+          </a:p>
+        </p:txBody>
+      </p:sp>
+      <p:sp>
+        <p:nvSpPr>
+          <p:cNvPr id="10" name="Text 8"/>
+          <p:cNvSpPr txBox="1"/>
+          <p:nvPr/>
+        </p:nvSpPr>
+        <p:spPr>
+          <a:xfrm>
+            <a:off x="1600200" y="2286000"/>
+            <a:ext cx="3291840" cy="274320"/>
+          </a:xfrm>
+          <a:prstGeom prst="rect">
+            <a:avLst/>
+          </a:prstGeom>
+          <a:noFill/>
+          <a:ln/>
+        </p:spPr>
+        <p:txBody>
+          <a:bodyPr wrap="square" lIns="0" tIns="0" rIns="0" bIns="0" rtlCol="0" anchor="ctr"/>
+          <a:lstStyle/>
+          <a:p>
+            <a:pPr indent="0" marL="0">
+              <a:buNone/>
+            </a:pPr>
+            <a:r>
+              <a:rPr lang="en-US" sz="1050" b="1" dirty="0">
+                <a:solidFill>
+                  <a:srgbClr val="0EA5E9"/>
+                </a:solidFill>
+                <a:latin typeface="Calibri" pitchFamily="34" charset="0"/>
+                <a:ea typeface="Calibri" pitchFamily="34" charset="-122"/>
+                <a:cs typeface="Calibri" pitchFamily="34" charset="-120"/>
+              </a:rPr>
+              <a:t>07.22 – 07.25</a:t>
+            </a:r>
+            <a:endParaRPr lang="en-US" sz="1050" dirty="0"/>
+          </a:p>
+        </p:txBody>
+      </p:sp>
+      <p:sp>
+        <p:nvSpPr>
+          <p:cNvPr id="11" name="Text 9"/>
+          <p:cNvSpPr txBox="1"/>
+          <p:nvPr/>
+        </p:nvSpPr>
+        <p:spPr>
+          <a:xfrm>
+            <a:off x="5074920" y="1965960"/>
+            <a:ext cx="6492240" cy="640080"/>
+          </a:xfrm>
+          <a:prstGeom prst="rect">
+            <a:avLst/>
+          </a:prstGeom>
+          <a:noFill/>
+          <a:ln/>
+        </p:spPr>
+        <p:txBody>
+          <a:bodyPr wrap="square" lIns="0" tIns="0" rIns="0" bIns="0" rtlCol="0" anchor="ctr"/>
+          <a:lstStyle/>
+          <a:p>
+            <a:pPr indent="0" marL="0">
+              <a:lnSpc>
+                <a:spcPct val="120000"/>
+              </a:lnSpc>
+              <a:buNone/>
+            </a:pPr>
+            <a:r>
+              <a:rPr lang="en-US" sz="1150" dirty="0">
+                <a:solidFill>
+                  <a:srgbClr val="3F4A63"/>
+                </a:solidFill>
+                <a:latin typeface="Calibri" pitchFamily="34" charset="0"/>
+                <a:ea typeface="Calibri" pitchFamily="34" charset="-122"/>
+                <a:cs typeface="Calibri" pitchFamily="34" charset="-120"/>
+              </a:rPr>
+              <a:t>453개 노드의 관계·제약조건·모범 패턴을 정리한 지식 데이터베이스 완성</a:t>
+            </a:r>
+            <a:endParaRPr lang="en-US" sz="1150" dirty="0"/>
+          </a:p>
+        </p:txBody>
+      </p:sp>
+      <p:sp>
+        <p:nvSpPr>
+          <p:cNvPr id="12" name="Shape 10"/>
+          <p:cNvSpPr/>
+          <p:nvPr/>
+        </p:nvSpPr>
+        <p:spPr>
+          <a:xfrm>
+            <a:off x="777240" y="2807208"/>
+            <a:ext cx="548640" cy="548640"/>
+          </a:xfrm>
+          <a:prstGeom prst="ellipse">
+            <a:avLst/>
+          </a:prstGeom>
+          <a:solidFill>
+            <a:srgbClr val="1E2761"/>
+          </a:solidFill>
+          <a:ln/>
+        </p:spPr>
+      </p:sp>
+      <p:sp>
+        <p:nvSpPr>
+          <p:cNvPr id="13" name="Text 11"/>
+          <p:cNvSpPr txBox="1"/>
+          <p:nvPr/>
+        </p:nvSpPr>
+        <p:spPr>
+          <a:xfrm>
+            <a:off x="777240" y="2807208"/>
+            <a:ext cx="548640" cy="548640"/>
+          </a:xfrm>
+          <a:prstGeom prst="rect">
+            <a:avLst/>
+          </a:prstGeom>
+          <a:noFill/>
+          <a:ln/>
+        </p:spPr>
+        <p:txBody>
+          <a:bodyPr wrap="square" lIns="0" tIns="0" rIns="0" bIns="0" rtlCol="0" anchor="ctr"/>
+          <a:lstStyle/>
+          <a:p>
+            <a:pPr algn="ctr" indent="0" marL="0">
+              <a:buNone/>
+            </a:pPr>
+            <a:r>
+              <a:rPr lang="en-US" sz="1600" b="1" dirty="0">
+                <a:solidFill>
+                  <a:srgbClr val="FFFFFF"/>
+                </a:solidFill>
+                <a:latin typeface="Cambria" pitchFamily="34" charset="0"/>
+                <a:ea typeface="Cambria" pitchFamily="34" charset="-122"/>
+                <a:cs typeface="Cambria" pitchFamily="34" charset="-120"/>
+              </a:rPr>
+              <a:t>2</a:t>
+            </a:r>
+            <a:endParaRPr lang="en-US" sz="1600" dirty="0"/>
+          </a:p>
+        </p:txBody>
+      </p:sp>
+      <p:sp>
+        <p:nvSpPr>
+          <p:cNvPr id="14" name="Text 12"/>
+          <p:cNvSpPr txBox="1"/>
+          <p:nvPr/>
+        </p:nvSpPr>
+        <p:spPr>
+          <a:xfrm>
+            <a:off x="1600200" y="2788920"/>
+            <a:ext cx="3291840" cy="365760"/>
+          </a:xfrm>
+          <a:prstGeom prst="rect">
+            <a:avLst/>
+          </a:prstGeom>
+          <a:noFill/>
+          <a:ln/>
+        </p:spPr>
+        <p:txBody>
+          <a:bodyPr wrap="square" lIns="0" tIns="0" rIns="0" bIns="0" rtlCol="0" anchor="ctr"/>
+          <a:lstStyle/>
+          <a:p>
+            <a:pPr indent="0" marL="0">
+              <a:buNone/>
+            </a:pPr>
+            <a:r>
+              <a:rPr lang="en-US" sz="1450" b="1" dirty="0">
+                <a:solidFill>
+                  <a:srgbClr val="1E2761"/>
+                </a:solidFill>
+                <a:latin typeface="Calibri" pitchFamily="34" charset="0"/>
+                <a:ea typeface="Calibri" pitchFamily="34" charset="-122"/>
+                <a:cs typeface="Calibri" pitchFamily="34" charset="-120"/>
+              </a:rPr>
+              <a:t>RAG &amp; 검증 엔진 개발</a:t>
+            </a:r>
+            <a:endParaRPr lang="en-US" sz="1450" dirty="0"/>
+          </a:p>
+        </p:txBody>
+      </p:sp>
+      <p:sp>
+        <p:nvSpPr>
+          <p:cNvPr id="15" name="Text 13"/>
+          <p:cNvSpPr txBox="1"/>
+          <p:nvPr/>
+        </p:nvSpPr>
+        <p:spPr>
+          <a:xfrm>
+            <a:off x="1600200" y="3127248"/>
+            <a:ext cx="3291840" cy="274320"/>
+          </a:xfrm>
+          <a:prstGeom prst="rect">
+            <a:avLst/>
+          </a:prstGeom>
+          <a:noFill/>
+          <a:ln/>
+        </p:spPr>
+        <p:txBody>
+          <a:bodyPr wrap="square" lIns="0" tIns="0" rIns="0" bIns="0" rtlCol="0" anchor="ctr"/>
+          <a:lstStyle/>
+          <a:p>
+            <a:pPr indent="0" marL="0">
+              <a:buNone/>
+            </a:pPr>
+            <a:r>
+              <a:rPr lang="en-US" sz="1050" b="1" dirty="0">
+                <a:solidFill>
+                  <a:srgbClr val="0EA5E9"/>
+                </a:solidFill>
+                <a:latin typeface="Calibri" pitchFamily="34" charset="0"/>
+                <a:ea typeface="Calibri" pitchFamily="34" charset="-122"/>
+                <a:cs typeface="Calibri" pitchFamily="34" charset="-120"/>
+              </a:rPr>
+              <a:t>07.26 – 07.30</a:t>
+            </a:r>
+            <a:endParaRPr lang="en-US" sz="1050" dirty="0"/>
+          </a:p>
+        </p:txBody>
+      </p:sp>
+      <p:sp>
+        <p:nvSpPr>
+          <p:cNvPr id="16" name="Text 14"/>
+          <p:cNvSpPr txBox="1"/>
+          <p:nvPr/>
+        </p:nvSpPr>
+        <p:spPr>
+          <a:xfrm>
+            <a:off x="5074920" y="2807208"/>
+            <a:ext cx="6492240" cy="640080"/>
+          </a:xfrm>
+          <a:prstGeom prst="rect">
+            <a:avLst/>
+          </a:prstGeom>
+          <a:noFill/>
+          <a:ln/>
+        </p:spPr>
+        <p:txBody>
+          <a:bodyPr wrap="square" lIns="0" tIns="0" rIns="0" bIns="0" rtlCol="0" anchor="ctr"/>
+          <a:lstStyle/>
+          <a:p>
+            <a:pPr indent="0" marL="0">
+              <a:lnSpc>
+                <a:spcPct val="120000"/>
+              </a:lnSpc>
+              <a:buNone/>
+            </a:pPr>
+            <a:r>
+              <a:rPr lang="en-US" sz="1150" dirty="0">
+                <a:solidFill>
+                  <a:srgbClr val="3F4A63"/>
+                </a:solidFill>
+                <a:latin typeface="Calibri" pitchFamily="34" charset="0"/>
+                <a:ea typeface="Calibri" pitchFamily="34" charset="-122"/>
+                <a:cs typeface="Calibri" pitchFamily="34" charset="-120"/>
+              </a:rPr>
+              <a:t>하이브리드 RAG 검색 엔진, 오타 자동 보정, 4단계 검증 과정 구현</a:t>
+            </a:r>
+            <a:endParaRPr lang="en-US" sz="1150" dirty="0"/>
+          </a:p>
+        </p:txBody>
+      </p:sp>
+      <p:sp>
+        <p:nvSpPr>
+          <p:cNvPr id="17" name="Shape 15"/>
+          <p:cNvSpPr/>
+          <p:nvPr/>
+        </p:nvSpPr>
+        <p:spPr>
+          <a:xfrm>
+            <a:off x="777240" y="3648456"/>
+            <a:ext cx="548640" cy="548640"/>
+          </a:xfrm>
+          <a:prstGeom prst="ellipse">
+            <a:avLst/>
+          </a:prstGeom>
+          <a:solidFill>
+            <a:srgbClr val="1E2761"/>
+          </a:solidFill>
+          <a:ln/>
+        </p:spPr>
+      </p:sp>
+      <p:sp>
+        <p:nvSpPr>
+          <p:cNvPr id="18" name="Text 16"/>
+          <p:cNvSpPr txBox="1"/>
+          <p:nvPr/>
+        </p:nvSpPr>
+        <p:spPr>
+          <a:xfrm>
+            <a:off x="777240" y="3648456"/>
+            <a:ext cx="548640" cy="548640"/>
+          </a:xfrm>
+          <a:prstGeom prst="rect">
+            <a:avLst/>
+          </a:prstGeom>
+          <a:noFill/>
+          <a:ln/>
+        </p:spPr>
+        <p:txBody>
+          <a:bodyPr wrap="square" lIns="0" tIns="0" rIns="0" bIns="0" rtlCol="0" anchor="ctr"/>
+          <a:lstStyle/>
+          <a:p>
+            <a:pPr algn="ctr" indent="0" marL="0">
+              <a:buNone/>
+            </a:pPr>
+            <a:r>
+              <a:rPr lang="en-US" sz="1600" b="1" dirty="0">
+                <a:solidFill>
+                  <a:srgbClr val="FFFFFF"/>
+                </a:solidFill>
+                <a:latin typeface="Cambria" pitchFamily="34" charset="0"/>
+                <a:ea typeface="Cambria" pitchFamily="34" charset="-122"/>
+                <a:cs typeface="Cambria" pitchFamily="34" charset="-120"/>
+              </a:rPr>
+              <a:t>3</a:t>
+            </a:r>
+            <a:endParaRPr lang="en-US" sz="1600" dirty="0"/>
+          </a:p>
+        </p:txBody>
+      </p:sp>
+      <p:sp>
+        <p:nvSpPr>
+          <p:cNvPr id="19" name="Text 17"/>
+          <p:cNvSpPr txBox="1"/>
+          <p:nvPr/>
+        </p:nvSpPr>
+        <p:spPr>
+          <a:xfrm>
+            <a:off x="1600200" y="3630168"/>
+            <a:ext cx="3291840" cy="365760"/>
+          </a:xfrm>
+          <a:prstGeom prst="rect">
+            <a:avLst/>
+          </a:prstGeom>
+          <a:noFill/>
+          <a:ln/>
+        </p:spPr>
+        <p:txBody>
+          <a:bodyPr wrap="square" lIns="0" tIns="0" rIns="0" bIns="0" rtlCol="0" anchor="ctr"/>
+          <a:lstStyle/>
+          <a:p>
+            <a:pPr indent="0" marL="0">
+              <a:buNone/>
+            </a:pPr>
+            <a:r>
+              <a:rPr lang="en-US" sz="1450" b="1" dirty="0">
+                <a:solidFill>
+                  <a:srgbClr val="1E2761"/>
+                </a:solidFill>
+                <a:latin typeface="Calibri" pitchFamily="34" charset="0"/>
+                <a:ea typeface="Calibri" pitchFamily="34" charset="-122"/>
+                <a:cs typeface="Calibri" pitchFamily="34" charset="-120"/>
+              </a:rPr>
+              <a:t>웹 플랫폼 &amp; 확장 연동</a:t>
+            </a:r>
+            <a:endParaRPr lang="en-US" sz="1450" dirty="0"/>
+          </a:p>
+        </p:txBody>
+      </p:sp>
+      <p:sp>
+        <p:nvSpPr>
+          <p:cNvPr id="20" name="Text 18"/>
+          <p:cNvSpPr txBox="1"/>
+          <p:nvPr/>
+        </p:nvSpPr>
+        <p:spPr>
+          <a:xfrm>
+            <a:off x="1600200" y="3968496"/>
+            <a:ext cx="3291840" cy="274320"/>
+          </a:xfrm>
+          <a:prstGeom prst="rect">
+            <a:avLst/>
+          </a:prstGeom>
+          <a:noFill/>
+          <a:ln/>
+        </p:spPr>
+        <p:txBody>
+          <a:bodyPr wrap="square" lIns="0" tIns="0" rIns="0" bIns="0" rtlCol="0" anchor="ctr"/>
+          <a:lstStyle/>
+          <a:p>
+            <a:pPr indent="0" marL="0">
+              <a:buNone/>
+            </a:pPr>
+            <a:r>
+              <a:rPr lang="en-US" sz="1050" b="1" dirty="0">
+                <a:solidFill>
+                  <a:srgbClr val="0EA5E9"/>
+                </a:solidFill>
+                <a:latin typeface="Calibri" pitchFamily="34" charset="0"/>
+                <a:ea typeface="Calibri" pitchFamily="34" charset="-122"/>
+                <a:cs typeface="Calibri" pitchFamily="34" charset="-120"/>
+              </a:rPr>
+              <a:t>07.31 – 08.04</a:t>
+            </a:r>
+            <a:endParaRPr lang="en-US" sz="1050" dirty="0"/>
+          </a:p>
+        </p:txBody>
+      </p:sp>
+      <p:sp>
+        <p:nvSpPr>
+          <p:cNvPr id="21" name="Text 19"/>
+          <p:cNvSpPr txBox="1"/>
+          <p:nvPr/>
+        </p:nvSpPr>
+        <p:spPr>
+          <a:xfrm>
+            <a:off x="5074920" y="3648456"/>
+            <a:ext cx="6492240" cy="640080"/>
+          </a:xfrm>
+          <a:prstGeom prst="rect">
+            <a:avLst/>
+          </a:prstGeom>
+          <a:noFill/>
+          <a:ln/>
+        </p:spPr>
+        <p:txBody>
+          <a:bodyPr wrap="square" lIns="0" tIns="0" rIns="0" bIns="0" rtlCol="0" anchor="ctr"/>
+          <a:lstStyle/>
+          <a:p>
+            <a:pPr indent="0" marL="0">
+              <a:lnSpc>
+                <a:spcPct val="120000"/>
+              </a:lnSpc>
+              <a:buNone/>
+            </a:pPr>
+            <a:r>
+              <a:rPr lang="en-US" sz="1150" dirty="0">
+                <a:solidFill>
+                  <a:srgbClr val="3F4A63"/>
+                </a:solidFill>
+                <a:latin typeface="Calibri" pitchFamily="34" charset="0"/>
+                <a:ea typeface="Calibri" pitchFamily="34" charset="-122"/>
+                <a:cs typeface="Calibri" pitchFamily="34" charset="-120"/>
+              </a:rPr>
+              <a:t>Next.js 챗봇 · FastAPI 백엔드 · Chrome 확장을 실제 도메인에 배포</a:t>
+            </a:r>
+            <a:endParaRPr lang="en-US" sz="1150" dirty="0"/>
+          </a:p>
+        </p:txBody>
+      </p:sp>
+      <p:sp>
+        <p:nvSpPr>
+          <p:cNvPr id="22" name="Shape 20"/>
+          <p:cNvSpPr/>
+          <p:nvPr/>
+        </p:nvSpPr>
+        <p:spPr>
+          <a:xfrm>
+            <a:off x="777240" y="4489704"/>
+            <a:ext cx="548640" cy="548640"/>
+          </a:xfrm>
+          <a:prstGeom prst="ellipse">
+            <a:avLst/>
+          </a:prstGeom>
+          <a:solidFill>
+            <a:srgbClr val="EA4B71"/>
+          </a:solidFill>
+          <a:ln/>
+        </p:spPr>
+      </p:sp>
+      <p:sp>
+        <p:nvSpPr>
+          <p:cNvPr id="23" name="Text 21"/>
+          <p:cNvSpPr txBox="1"/>
+          <p:nvPr/>
+        </p:nvSpPr>
+        <p:spPr>
+          <a:xfrm>
+            <a:off x="777240" y="4489704"/>
+            <a:ext cx="548640" cy="548640"/>
+          </a:xfrm>
+          <a:prstGeom prst="rect">
+            <a:avLst/>
+          </a:prstGeom>
+          <a:noFill/>
+          <a:ln/>
+        </p:spPr>
+        <p:txBody>
+          <a:bodyPr wrap="square" lIns="0" tIns="0" rIns="0" bIns="0" rtlCol="0" anchor="ctr"/>
+          <a:lstStyle/>
+          <a:p>
+            <a:pPr algn="ctr" indent="0" marL="0">
+              <a:buNone/>
+            </a:pPr>
+            <a:r>
+              <a:rPr lang="en-US" sz="1600" b="1" dirty="0">
+                <a:solidFill>
+                  <a:srgbClr val="FFFFFF"/>
+                </a:solidFill>
+                <a:latin typeface="Cambria" pitchFamily="34" charset="0"/>
+                <a:ea typeface="Cambria" pitchFamily="34" charset="-122"/>
+                <a:cs typeface="Cambria" pitchFamily="34" charset="-120"/>
+              </a:rPr>
+              <a:t>4</a:t>
+            </a:r>
+            <a:endParaRPr lang="en-US" sz="1600" dirty="0"/>
+          </a:p>
+        </p:txBody>
+      </p:sp>
+      <p:sp>
+        <p:nvSpPr>
+          <p:cNvPr id="24" name="Text 22"/>
+          <p:cNvSpPr txBox="1"/>
+          <p:nvPr/>
+        </p:nvSpPr>
+        <p:spPr>
+          <a:xfrm>
+            <a:off x="1600200" y="4471416"/>
+            <a:ext cx="3291840" cy="365760"/>
+          </a:xfrm>
+          <a:prstGeom prst="rect">
+            <a:avLst/>
+          </a:prstGeom>
+          <a:noFill/>
+          <a:ln/>
+        </p:spPr>
+        <p:txBody>
+          <a:bodyPr wrap="square" lIns="0" tIns="0" rIns="0" bIns="0" rtlCol="0" anchor="ctr"/>
+          <a:lstStyle/>
+          <a:p>
+            <a:pPr indent="0" marL="0">
+              <a:buNone/>
+            </a:pPr>
+            <a:r>
+              <a:rPr lang="en-US" sz="1450" b="1" dirty="0">
+                <a:solidFill>
+                  <a:srgbClr val="1E2761"/>
+                </a:solidFill>
+                <a:latin typeface="Calibri" pitchFamily="34" charset="0"/>
+                <a:ea typeface="Calibri" pitchFamily="34" charset="-122"/>
+                <a:cs typeface="Calibri" pitchFamily="34" charset="-120"/>
+              </a:rPr>
+              <a:t>통합 테스트 및 품질 점검</a:t>
+            </a:r>
+            <a:endParaRPr lang="en-US" sz="1450" dirty="0"/>
+          </a:p>
+        </p:txBody>
+      </p:sp>
+      <p:sp>
+        <p:nvSpPr>
+          <p:cNvPr id="25" name="Text 23"/>
+          <p:cNvSpPr txBox="1"/>
+          <p:nvPr/>
+        </p:nvSpPr>
+        <p:spPr>
+          <a:xfrm>
+            <a:off x="5074920" y="4489704"/>
+            <a:ext cx="6492240" cy="640080"/>
+          </a:xfrm>
+          <a:prstGeom prst="rect">
+            <a:avLst/>
+          </a:prstGeom>
+          <a:noFill/>
+          <a:ln/>
+        </p:spPr>
+        <p:txBody>
+          <a:bodyPr wrap="square" lIns="0" tIns="0" rIns="0" bIns="0" rtlCol="0" anchor="ctr"/>
+          <a:lstStyle/>
+          <a:p>
+            <a:pPr indent="0" marL="0">
+              <a:lnSpc>
+                <a:spcPct val="120000"/>
+              </a:lnSpc>
+              <a:buNone/>
+            </a:pPr>
+            <a:r>
+              <a:rPr lang="en-US" sz="1150" dirty="0">
+                <a:solidFill>
+                  <a:srgbClr val="3F4A63"/>
+                </a:solidFill>
+                <a:latin typeface="Calibri" pitchFamily="34" charset="0"/>
+                <a:ea typeface="Calibri" pitchFamily="34" charset="-122"/>
+                <a:cs typeface="Calibri" pitchFamily="34" charset="-120"/>
+              </a:rPr>
+              <a:t>8개 이상 시나리오 QA로 실제 결함 10건 이상 발견 및 수정</a:t>
+            </a:r>
+            <a:endParaRPr lang="en-US" sz="1150" dirty="0"/>
+          </a:p>
+        </p:txBody>
+      </p:sp>
+      <p:sp>
+        <p:nvSpPr>
+          <p:cNvPr id="26" name="Shape 24"/>
+          <p:cNvSpPr/>
+          <p:nvPr/>
+        </p:nvSpPr>
+        <p:spPr>
+          <a:xfrm>
+            <a:off x="777240" y="5330952"/>
+            <a:ext cx="548640" cy="548640"/>
+          </a:xfrm>
+          <a:prstGeom prst="ellipse">
+            <a:avLst/>
+          </a:prstGeom>
+          <a:solidFill>
+            <a:srgbClr val="EA4B71"/>
+          </a:solidFill>
+          <a:ln/>
+        </p:spPr>
+      </p:sp>
+      <p:sp>
+        <p:nvSpPr>
+          <p:cNvPr id="27" name="Text 25"/>
+          <p:cNvSpPr txBox="1"/>
+          <p:nvPr/>
+        </p:nvSpPr>
+        <p:spPr>
+          <a:xfrm>
+            <a:off x="777240" y="5330952"/>
+            <a:ext cx="548640" cy="548640"/>
+          </a:xfrm>
+          <a:prstGeom prst="rect">
+            <a:avLst/>
+          </a:prstGeom>
+          <a:noFill/>
+          <a:ln/>
+        </p:spPr>
+        <p:txBody>
+          <a:bodyPr wrap="square" lIns="0" tIns="0" rIns="0" bIns="0" rtlCol="0" anchor="ctr"/>
+          <a:lstStyle/>
+          <a:p>
+            <a:pPr algn="ctr" indent="0" marL="0">
+              <a:buNone/>
+            </a:pPr>
+            <a:r>
+              <a:rPr lang="en-US" sz="1600" b="1" dirty="0">
+                <a:solidFill>
+                  <a:srgbClr val="FFFFFF"/>
+                </a:solidFill>
+                <a:latin typeface="Cambria" pitchFamily="34" charset="0"/>
+                <a:ea typeface="Cambria" pitchFamily="34" charset="-122"/>
+                <a:cs typeface="Cambria" pitchFamily="34" charset="-120"/>
+              </a:rPr>
+              <a:t>5</a:t>
+            </a:r>
+            <a:endParaRPr lang="en-US" sz="1600" dirty="0"/>
+          </a:p>
+        </p:txBody>
+      </p:sp>
+      <p:sp>
+        <p:nvSpPr>
+          <p:cNvPr id="28" name="Text 26"/>
+          <p:cNvSpPr txBox="1"/>
+          <p:nvPr/>
+        </p:nvSpPr>
+        <p:spPr>
+          <a:xfrm>
+            <a:off x="1600200" y="5312664"/>
+            <a:ext cx="3291840" cy="365760"/>
+          </a:xfrm>
+          <a:prstGeom prst="rect">
+            <a:avLst/>
+          </a:prstGeom>
+          <a:noFill/>
+          <a:ln/>
+        </p:spPr>
+        <p:txBody>
+          <a:bodyPr wrap="square" lIns="0" tIns="0" rIns="0" bIns="0" rtlCol="0" anchor="ctr"/>
+          <a:lstStyle/>
+          <a:p>
+            <a:pPr indent="0" marL="0">
+              <a:buNone/>
+            </a:pPr>
+            <a:r>
+              <a:rPr lang="en-US" sz="1450" b="1" dirty="0">
+                <a:solidFill>
+                  <a:srgbClr val="1E2761"/>
+                </a:solidFill>
+                <a:latin typeface="Calibri" pitchFamily="34" charset="0"/>
+                <a:ea typeface="Calibri" pitchFamily="34" charset="-122"/>
+                <a:cs typeface="Calibri" pitchFamily="34" charset="-120"/>
+              </a:rPr>
+              <a:t>최종 검증 및 시연 준비</a:t>
+            </a:r>
+            <a:endParaRPr lang="en-US" sz="1450" dirty="0"/>
+          </a:p>
+        </p:txBody>
+      </p:sp>
+      <p:sp>
+        <p:nvSpPr>
+          <p:cNvPr id="29" name="Text 27"/>
+          <p:cNvSpPr txBox="1"/>
+          <p:nvPr/>
+        </p:nvSpPr>
+        <p:spPr>
+          <a:xfrm>
+            <a:off x="5074920" y="5330952"/>
+            <a:ext cx="6492240" cy="640080"/>
+          </a:xfrm>
+          <a:prstGeom prst="rect">
+            <a:avLst/>
+          </a:prstGeom>
+          <a:noFill/>
+          <a:ln/>
+        </p:spPr>
+        <p:txBody>
+          <a:bodyPr wrap="square" lIns="0" tIns="0" rIns="0" bIns="0" rtlCol="0" anchor="ctr"/>
+          <a:lstStyle/>
+          <a:p>
+            <a:pPr indent="0" marL="0">
+              <a:lnSpc>
+                <a:spcPct val="120000"/>
+              </a:lnSpc>
+              <a:buNone/>
+            </a:pPr>
+            <a:r>
+              <a:rPr lang="en-US" sz="1150" dirty="0">
+                <a:solidFill>
+                  <a:srgbClr val="3F4A63"/>
+                </a:solidFill>
+                <a:latin typeface="Calibri" pitchFamily="34" charset="0"/>
+                <a:ea typeface="Calibri" pitchFamily="34" charset="-122"/>
+                <a:cs typeface="Calibri" pitchFamily="34" charset="-120"/>
+              </a:rPr>
+              <a:t>회원가입부터 워크플로우 자동 생성까지 전 과정 정상 동작 최종 확인</a:t>
+            </a:r>
+            <a:endParaRPr lang="en-US" sz="1150" dirty="0"/>
+          </a:p>
+        </p:txBody>
+      </p:sp>
+      <p:sp>
+        <p:nvSpPr>
+          <p:cNvPr id="30" name="Text 28"/>
+          <p:cNvSpPr txBox="1"/>
+          <p:nvPr/>
+        </p:nvSpPr>
+        <p:spPr>
+          <a:xfrm>
+            <a:off x="457200" y="6510528"/>
+            <a:ext cx="2743200" cy="274320"/>
+          </a:xfrm>
+          <a:prstGeom prst="rect">
+            <a:avLst/>
+          </a:prstGeom>
+          <a:noFill/>
+          <a:ln/>
+        </p:spPr>
+        <p:txBody>
+          <a:bodyPr wrap="square" lIns="0" tIns="0" rIns="0" bIns="0" rtlCol="0" anchor="ctr"/>
+          <a:lstStyle/>
+          <a:p>
+            <a:pPr indent="0" marL="0">
+              <a:buNone/>
+            </a:pPr>
+            <a:r>
+              <a:rPr lang="en-US" sz="900" dirty="0">
+                <a:solidFill>
+                  <a:srgbClr val="8A93A8"/>
+                </a:solidFill>
+                <a:latin typeface="Calibri" pitchFamily="34" charset="0"/>
+                <a:ea typeface="Calibri" pitchFamily="34" charset="-122"/>
+                <a:cs typeface="Calibri" pitchFamily="34" charset="-120"/>
+              </a:rPr>
+              <a:t>FlowGuide AI</a:t>
+            </a:r>
+            <a:endParaRPr lang="en-US" sz="900" dirty="0"/>
+          </a:p>
+        </p:txBody>
+      </p:sp>
+      <p:sp>
+        <p:nvSpPr>
+          <p:cNvPr id="31" name="Text 29"/>
+          <p:cNvSpPr txBox="1"/>
+          <p:nvPr/>
+        </p:nvSpPr>
+        <p:spPr>
+          <a:xfrm>
+            <a:off x="11338560" y="6510528"/>
+            <a:ext cx="457200" cy="274320"/>
+          </a:xfrm>
+          <a:prstGeom prst="rect">
+            <a:avLst/>
+          </a:prstGeom>
+          <a:noFill/>
+          <a:ln/>
+        </p:spPr>
+        <p:txBody>
+          <a:bodyPr wrap="square" lIns="0" tIns="0" rIns="0" bIns="0" rtlCol="0" anchor="ctr"/>
+          <a:lstStyle/>
+          <a:p>
+            <a:pPr algn="r" indent="0" marL="0">
+              <a:buNone/>
+            </a:pPr>
+            <a:r>
+              <a:rPr lang="en-US" sz="900" dirty="0">
+                <a:solidFill>
+                  <a:srgbClr val="8A93A8"/>
+                </a:solidFill>
+                <a:latin typeface="Calibri" pitchFamily="34" charset="0"/>
+                <a:ea typeface="Calibri" pitchFamily="34" charset="-122"/>
+                <a:cs typeface="Calibri" pitchFamily="34" charset="-120"/>
+              </a:rPr>
+              <a:t>13</a:t>
+            </a:r>
+            <a:endParaRPr lang="en-US" sz="900" dirty="0"/>
+          </a:p>
+        </p:txBody>
+      </p:sp>
+    </p:spTree>
+  </p:cSld>
+  <p:clrMapOvr>
+    <a:masterClrMapping/>
+  </p:clrMapOvr>
+</p:sld>
+</file>
+
+<file path=ppt/slides/slide14.xml><?xml version="1.0" encoding="utf-8"?>
+<p:sld xmlns:a="http://schemas.openxmlformats.org/drawingml/2006/main" xmlns:r="http://schemas.openxmlformats.org/officeDocument/2006/relationships" xmlns:p="http://schemas.openxmlformats.org/presentationml/2006/main">
+  <p:cSld name="Slide 14">
+    <p:spTree>
+      <p:nvGrpSpPr>
+        <p:cNvPr id="1" name=""/>
+        <p:cNvGrpSpPr/>
+        <p:nvPr/>
+      </p:nvGrpSpPr>
+      <p:grpSpPr>
+        <a:xfrm>
+          <a:off x="0" y="0"/>
+          <a:ext cx="0" cy="0"/>
+          <a:chOff x="0" y="0"/>
+          <a:chExt cx="0" cy="0"/>
+        </a:xfrm>
+      </p:grpSpPr>
+      <p:sp>
+        <p:nvSpPr>
+          <p:cNvPr id="2" name="Shape 0"/>
+          <p:cNvSpPr/>
+          <p:nvPr/>
+        </p:nvSpPr>
+        <p:spPr>
+          <a:xfrm>
+            <a:off x="10149840" y="320040"/>
+            <a:ext cx="1691640" cy="502920"/>
+          </a:xfrm>
+          <a:prstGeom prst="roundRect">
+            <a:avLst>
+              <a:gd name="adj" fmla="val 21818"/>
+            </a:avLst>
+          </a:prstGeom>
+          <a:solidFill>
+            <a:srgbClr val="1E2761"/>
+          </a:solidFill>
+          <a:ln/>
+        </p:spPr>
+      </p:sp>
+      <p:sp>
+        <p:nvSpPr>
+          <p:cNvPr id="3" name="Text 1"/>
+          <p:cNvSpPr txBox="1"/>
+          <p:nvPr/>
+        </p:nvSpPr>
+        <p:spPr>
+          <a:xfrm>
+            <a:off x="10149840" y="320040"/>
+            <a:ext cx="1691640" cy="502920"/>
+          </a:xfrm>
+          <a:prstGeom prst="rect">
+            <a:avLst/>
+          </a:prstGeom>
+          <a:noFill/>
+          <a:ln/>
+        </p:spPr>
+        <p:txBody>
+          <a:bodyPr wrap="square" lIns="0" tIns="0" rIns="0" bIns="0" rtlCol="0" anchor="ctr"/>
+          <a:lstStyle/>
+          <a:p>
+            <a:pPr algn="ctr" indent="0" marL="0">
+              <a:buNone/>
+            </a:pPr>
+            <a:r>
+              <a:rPr lang="en-US" sz="1200" b="1" dirty="0">
+                <a:solidFill>
+                  <a:srgbClr val="EA4B71"/>
+                </a:solidFill>
+                <a:latin typeface="Calibri" pitchFamily="34" charset="0"/>
+                <a:ea typeface="Calibri" pitchFamily="34" charset="-122"/>
+                <a:cs typeface="Calibri" pitchFamily="34" charset="-120"/>
+              </a:rPr>
+              <a:t>08  </a:t>
+            </a:r>
+            <a:pPr algn="ctr" indent="0" marL="0">
+              <a:buNone/>
+            </a:pPr>
+            <a:r>
+              <a:rPr lang="en-US" sz="950" dirty="0">
+                <a:solidFill>
+                  <a:srgbClr val="FFFFFF"/>
+                </a:solidFill>
+                <a:latin typeface="Calibri" pitchFamily="34" charset="0"/>
+                <a:ea typeface="Calibri" pitchFamily="34" charset="-122"/>
+                <a:cs typeface="Calibri" pitchFamily="34" charset="-120"/>
+              </a:rPr>
+              <a:t>기대효과 · 향후 계획</a:t>
+            </a:r>
+            <a:endParaRPr lang="en-US" sz="1200" dirty="0"/>
+          </a:p>
+        </p:txBody>
+      </p:sp>
+      <p:sp>
+        <p:nvSpPr>
+          <p:cNvPr id="4" name="Text 2"/>
+          <p:cNvSpPr txBox="1"/>
+          <p:nvPr/>
+        </p:nvSpPr>
+        <p:spPr>
+          <a:xfrm>
+            <a:off x="640080" y="502920"/>
+            <a:ext cx="7315200" cy="365760"/>
+          </a:xfrm>
+          <a:prstGeom prst="rect">
+            <a:avLst/>
+          </a:prstGeom>
+          <a:noFill/>
+          <a:ln/>
+        </p:spPr>
+        <p:txBody>
+          <a:bodyPr wrap="square" lIns="0" tIns="0" rIns="0" bIns="0" rtlCol="0" anchor="ctr"/>
+          <a:lstStyle/>
+          <a:p>
+            <a:pPr indent="0" marL="0">
+              <a:buNone/>
+            </a:pPr>
+            <a:r>
+              <a:rPr lang="en-US" sz="1300" b="1" spc="200" kern="0" dirty="0">
+                <a:solidFill>
+                  <a:srgbClr val="0EA5E9"/>
+                </a:solidFill>
+                <a:latin typeface="Calibri" pitchFamily="34" charset="0"/>
+                <a:ea typeface="Calibri" pitchFamily="34" charset="-122"/>
+                <a:cs typeface="Calibri" pitchFamily="34" charset="-120"/>
+              </a:rPr>
+              <a:t>NEXT</a:t>
+            </a:r>
+            <a:endParaRPr lang="en-US" sz="1300" dirty="0"/>
+          </a:p>
+        </p:txBody>
+      </p:sp>
+      <p:sp>
+        <p:nvSpPr>
+          <p:cNvPr id="5" name="Text 3"/>
+          <p:cNvSpPr txBox="1"/>
+          <p:nvPr/>
+        </p:nvSpPr>
+        <p:spPr>
+          <a:xfrm>
+            <a:off x="640080" y="841248"/>
+            <a:ext cx="8778240" cy="777240"/>
+          </a:xfrm>
+          <a:prstGeom prst="rect">
+            <a:avLst/>
+          </a:prstGeom>
+          <a:noFill/>
+          <a:ln/>
+        </p:spPr>
+        <p:txBody>
+          <a:bodyPr wrap="square" lIns="0" tIns="0" rIns="0" bIns="0" rtlCol="0" anchor="ctr"/>
+          <a:lstStyle/>
+          <a:p>
+            <a:pPr indent="0" marL="0">
+              <a:buNone/>
+            </a:pPr>
+            <a:r>
+              <a:rPr lang="en-US" sz="3000" b="1" dirty="0">
+                <a:solidFill>
+                  <a:srgbClr val="1E2761"/>
+                </a:solidFill>
+                <a:latin typeface="Cambria" pitchFamily="34" charset="0"/>
+                <a:ea typeface="Cambria" pitchFamily="34" charset="-122"/>
+                <a:cs typeface="Cambria" pitchFamily="34" charset="-120"/>
+              </a:rPr>
+              <a:t>여기서 더 나아갈 계획입니다</a:t>
+            </a:r>
+            <a:endParaRPr lang="en-US" sz="3000" dirty="0"/>
+          </a:p>
+        </p:txBody>
+      </p:sp>
+      <p:sp>
+        <p:nvSpPr>
+          <p:cNvPr id="6" name="Shape 4"/>
+          <p:cNvSpPr/>
+          <p:nvPr/>
+        </p:nvSpPr>
+        <p:spPr>
+          <a:xfrm>
+            <a:off x="640080" y="1783080"/>
+            <a:ext cx="3383280" cy="1874520"/>
+          </a:xfrm>
+          <a:prstGeom prst="roundRect">
+            <a:avLst>
+              <a:gd name="adj" fmla="val 3902"/>
+            </a:avLst>
+          </a:prstGeom>
+          <a:solidFill>
+            <a:srgbClr val="F3F5FA"/>
+          </a:solidFill>
+          <a:ln w="9525">
+            <a:solidFill>
+              <a:srgbClr val="E3E7F0"/>
+            </a:solidFill>
+            <a:prstDash val="solid"/>
+          </a:ln>
+        </p:spPr>
+      </p:sp>
+      <p:sp>
+        <p:nvSpPr>
+          <p:cNvPr id="7" name="Shape 5"/>
+          <p:cNvSpPr/>
+          <p:nvPr/>
+        </p:nvSpPr>
+        <p:spPr>
+          <a:xfrm>
+            <a:off x="868680" y="2011680"/>
+            <a:ext cx="457200" cy="457200"/>
+          </a:xfrm>
+          <a:prstGeom prst="roundRect">
+            <a:avLst>
+              <a:gd name="adj" fmla="val 20000"/>
+            </a:avLst>
+          </a:prstGeom>
+          <a:solidFill>
+            <a:srgbClr val="0EA5E9"/>
+          </a:solidFill>
+          <a:ln/>
+        </p:spPr>
+      </p:sp>
+      <p:sp>
+        <p:nvSpPr>
+          <p:cNvPr id="8" name="Text 6"/>
+          <p:cNvSpPr txBox="1"/>
+          <p:nvPr/>
+        </p:nvSpPr>
+        <p:spPr>
+          <a:xfrm>
+            <a:off x="868680" y="2011680"/>
+            <a:ext cx="457200" cy="457200"/>
+          </a:xfrm>
+          <a:prstGeom prst="rect">
+            <a:avLst/>
+          </a:prstGeom>
+          <a:noFill/>
+          <a:ln/>
+        </p:spPr>
+        <p:txBody>
+          <a:bodyPr wrap="square" lIns="0" tIns="0" rIns="0" bIns="0" rtlCol="0" anchor="ctr"/>
+          <a:lstStyle/>
+          <a:p>
+            <a:pPr algn="ctr" indent="0" marL="0">
+              <a:buNone/>
+            </a:pPr>
+            <a:r>
+              <a:rPr lang="en-US" sz="1600" b="1" dirty="0">
+                <a:solidFill>
+                  <a:srgbClr val="FFFFFF"/>
+                </a:solidFill>
+                <a:latin typeface="Cambria" pitchFamily="34" charset="0"/>
+                <a:ea typeface="Cambria" pitchFamily="34" charset="-122"/>
+                <a:cs typeface="Cambria" pitchFamily="34" charset="-120"/>
+              </a:rPr>
+              <a:t>1</a:t>
+            </a:r>
+            <a:endParaRPr lang="en-US" sz="1600" dirty="0"/>
+          </a:p>
+        </p:txBody>
+      </p:sp>
+      <p:sp>
+        <p:nvSpPr>
+          <p:cNvPr id="9" name="Text 7"/>
+          <p:cNvSpPr txBox="1"/>
+          <p:nvPr/>
+        </p:nvSpPr>
+        <p:spPr>
+          <a:xfrm>
+            <a:off x="868680" y="2560320"/>
+            <a:ext cx="2926080" cy="320040"/>
+          </a:xfrm>
+          <a:prstGeom prst="rect">
+            <a:avLst/>
+          </a:prstGeom>
+          <a:noFill/>
+          <a:ln/>
+        </p:spPr>
+        <p:txBody>
+          <a:bodyPr wrap="square" lIns="0" tIns="0" rIns="0" bIns="0" rtlCol="0" anchor="ctr"/>
+          <a:lstStyle/>
+          <a:p>
+            <a:pPr indent="0" marL="0">
+              <a:buNone/>
+            </a:pPr>
+            <a:r>
+              <a:rPr lang="en-US" sz="1300" b="1" dirty="0">
+                <a:solidFill>
+                  <a:srgbClr val="1E2761"/>
+                </a:solidFill>
+                <a:latin typeface="Calibri" pitchFamily="34" charset="0"/>
+                <a:ea typeface="Calibri" pitchFamily="34" charset="-122"/>
+                <a:cs typeface="Calibri" pitchFamily="34" charset="-120"/>
+              </a:rPr>
+              <a:t>플랫폼 확장</a:t>
+            </a:r>
+            <a:endParaRPr lang="en-US" sz="1300" dirty="0"/>
+          </a:p>
+        </p:txBody>
+      </p:sp>
+      <p:sp>
+        <p:nvSpPr>
+          <p:cNvPr id="10" name="Text 8"/>
+          <p:cNvSpPr txBox="1"/>
+          <p:nvPr/>
+        </p:nvSpPr>
+        <p:spPr>
+          <a:xfrm>
+            <a:off x="868680" y="2880360"/>
+            <a:ext cx="2926080" cy="731520"/>
+          </a:xfrm>
+          <a:prstGeom prst="rect">
+            <a:avLst/>
+          </a:prstGeom>
+          <a:noFill/>
+          <a:ln/>
+        </p:spPr>
+        <p:txBody>
+          <a:bodyPr wrap="square" lIns="0" tIns="0" rIns="0" bIns="0" rtlCol="0" anchor="ctr"/>
+          <a:lstStyle/>
+          <a:p>
+            <a:pPr indent="0" marL="0">
+              <a:lnSpc>
+                <a:spcPct val="120000"/>
+              </a:lnSpc>
+              <a:buNone/>
+            </a:pPr>
+            <a:r>
+              <a:rPr lang="en-US" sz="970" dirty="0">
+                <a:solidFill>
+                  <a:srgbClr val="3F4A63"/>
+                </a:solidFill>
+                <a:latin typeface="Calibri" pitchFamily="34" charset="0"/>
+                <a:ea typeface="Calibri" pitchFamily="34" charset="-122"/>
+                <a:cs typeface="Calibri" pitchFamily="34" charset="-120"/>
+              </a:rPr>
+              <a:t>n8n뿐 아니라 Make, Zapier 등 다양한 노코드 자동화 플랫폼으로 지식 데이터베이스를 넓혀, 범용 자동화 학습 플랫폼으로 발전</a:t>
+            </a:r>
+            <a:endParaRPr lang="en-US" sz="970" dirty="0"/>
+          </a:p>
+        </p:txBody>
+      </p:sp>
+      <p:sp>
+        <p:nvSpPr>
+          <p:cNvPr id="11" name="Shape 9"/>
+          <p:cNvSpPr/>
+          <p:nvPr/>
+        </p:nvSpPr>
+        <p:spPr>
+          <a:xfrm>
+            <a:off x="4242816" y="1783080"/>
+            <a:ext cx="3383280" cy="1874520"/>
+          </a:xfrm>
+          <a:prstGeom prst="roundRect">
+            <a:avLst>
+              <a:gd name="adj" fmla="val 3902"/>
+            </a:avLst>
+          </a:prstGeom>
+          <a:solidFill>
+            <a:srgbClr val="F3F5FA"/>
+          </a:solidFill>
+          <a:ln w="9525">
+            <a:solidFill>
+              <a:srgbClr val="E3E7F0"/>
+            </a:solidFill>
+            <a:prstDash val="solid"/>
+          </a:ln>
+        </p:spPr>
+      </p:sp>
+      <p:sp>
+        <p:nvSpPr>
+          <p:cNvPr id="12" name="Shape 10"/>
+          <p:cNvSpPr/>
+          <p:nvPr/>
+        </p:nvSpPr>
+        <p:spPr>
+          <a:xfrm>
+            <a:off x="4471416" y="2011680"/>
+            <a:ext cx="457200" cy="457200"/>
+          </a:xfrm>
+          <a:prstGeom prst="roundRect">
+            <a:avLst>
+              <a:gd name="adj" fmla="val 20000"/>
+            </a:avLst>
+          </a:prstGeom>
+          <a:solidFill>
+            <a:srgbClr val="1E2761"/>
+          </a:solidFill>
+          <a:ln/>
+        </p:spPr>
+      </p:sp>
+      <p:sp>
+        <p:nvSpPr>
+          <p:cNvPr id="13" name="Text 11"/>
+          <p:cNvSpPr txBox="1"/>
+          <p:nvPr/>
+        </p:nvSpPr>
+        <p:spPr>
+          <a:xfrm>
+            <a:off x="4471416" y="2011680"/>
+            <a:ext cx="457200" cy="457200"/>
+          </a:xfrm>
+          <a:prstGeom prst="rect">
+            <a:avLst/>
+          </a:prstGeom>
+          <a:noFill/>
+          <a:ln/>
+        </p:spPr>
+        <p:txBody>
+          <a:bodyPr wrap="square" lIns="0" tIns="0" rIns="0" bIns="0" rtlCol="0" anchor="ctr"/>
+          <a:lstStyle/>
+          <a:p>
+            <a:pPr algn="ctr" indent="0" marL="0">
+              <a:buNone/>
+            </a:pPr>
+            <a:r>
+              <a:rPr lang="en-US" sz="1600" b="1" dirty="0">
+                <a:solidFill>
+                  <a:srgbClr val="FFFFFF"/>
+                </a:solidFill>
+                <a:latin typeface="Cambria" pitchFamily="34" charset="0"/>
+                <a:ea typeface="Cambria" pitchFamily="34" charset="-122"/>
+                <a:cs typeface="Cambria" pitchFamily="34" charset="-120"/>
+              </a:rPr>
+              <a:t>2</a:t>
+            </a:r>
+            <a:endParaRPr lang="en-US" sz="1600" dirty="0"/>
+          </a:p>
+        </p:txBody>
+      </p:sp>
+      <p:sp>
+        <p:nvSpPr>
+          <p:cNvPr id="14" name="Text 12"/>
+          <p:cNvSpPr txBox="1"/>
+          <p:nvPr/>
+        </p:nvSpPr>
+        <p:spPr>
+          <a:xfrm>
+            <a:off x="4471416" y="2560320"/>
+            <a:ext cx="2926080" cy="320040"/>
+          </a:xfrm>
+          <a:prstGeom prst="rect">
+            <a:avLst/>
+          </a:prstGeom>
+          <a:noFill/>
+          <a:ln/>
+        </p:spPr>
+        <p:txBody>
+          <a:bodyPr wrap="square" lIns="0" tIns="0" rIns="0" bIns="0" rtlCol="0" anchor="ctr"/>
+          <a:lstStyle/>
+          <a:p>
+            <a:pPr indent="0" marL="0">
+              <a:buNone/>
+            </a:pPr>
+            <a:r>
+              <a:rPr lang="en-US" sz="1300" b="1" dirty="0">
+                <a:solidFill>
+                  <a:srgbClr val="1E2761"/>
+                </a:solidFill>
+                <a:latin typeface="Calibri" pitchFamily="34" charset="0"/>
+                <a:ea typeface="Calibri" pitchFamily="34" charset="-122"/>
+                <a:cs typeface="Calibri" pitchFamily="34" charset="-120"/>
+              </a:rPr>
+              <a:t>교육 현장 활용</a:t>
+            </a:r>
+            <a:endParaRPr lang="en-US" sz="1300" dirty="0"/>
+          </a:p>
+        </p:txBody>
+      </p:sp>
+      <p:sp>
+        <p:nvSpPr>
+          <p:cNvPr id="15" name="Text 13"/>
+          <p:cNvSpPr txBox="1"/>
+          <p:nvPr/>
+        </p:nvSpPr>
+        <p:spPr>
+          <a:xfrm>
+            <a:off x="4471416" y="2880360"/>
+            <a:ext cx="2926080" cy="731520"/>
+          </a:xfrm>
+          <a:prstGeom prst="rect">
+            <a:avLst/>
+          </a:prstGeom>
+          <a:noFill/>
+          <a:ln/>
+        </p:spPr>
+        <p:txBody>
+          <a:bodyPr wrap="square" lIns="0" tIns="0" rIns="0" bIns="0" rtlCol="0" anchor="ctr"/>
+          <a:lstStyle/>
+          <a:p>
+            <a:pPr indent="0" marL="0">
+              <a:lnSpc>
+                <a:spcPct val="120000"/>
+              </a:lnSpc>
+              <a:buNone/>
+            </a:pPr>
+            <a:r>
+              <a:rPr lang="en-US" sz="970" dirty="0">
+                <a:solidFill>
+                  <a:srgbClr val="3F4A63"/>
+                </a:solidFill>
+                <a:latin typeface="Calibri" pitchFamily="34" charset="0"/>
+                <a:ea typeface="Calibri" pitchFamily="34" charset="-122"/>
+                <a:cs typeface="Calibri" pitchFamily="34" charset="-120"/>
+              </a:rPr>
+              <a:t>교내 소프트웨어융합학과 실습 수업과 외부 n8n 도입 교육 자료로 실제 활용</a:t>
+            </a:r>
+            <a:endParaRPr lang="en-US" sz="970" dirty="0"/>
+          </a:p>
+        </p:txBody>
+      </p:sp>
+      <p:sp>
+        <p:nvSpPr>
+          <p:cNvPr id="16" name="Shape 14"/>
+          <p:cNvSpPr/>
+          <p:nvPr/>
+        </p:nvSpPr>
+        <p:spPr>
+          <a:xfrm>
+            <a:off x="7845552" y="1783080"/>
+            <a:ext cx="3383280" cy="1874520"/>
+          </a:xfrm>
+          <a:prstGeom prst="roundRect">
+            <a:avLst>
+              <a:gd name="adj" fmla="val 3902"/>
+            </a:avLst>
+          </a:prstGeom>
+          <a:solidFill>
+            <a:srgbClr val="F3F5FA"/>
+          </a:solidFill>
+          <a:ln w="9525">
+            <a:solidFill>
+              <a:srgbClr val="E3E7F0"/>
+            </a:solidFill>
+            <a:prstDash val="solid"/>
+          </a:ln>
+        </p:spPr>
+      </p:sp>
+      <p:sp>
+        <p:nvSpPr>
+          <p:cNvPr id="17" name="Shape 15"/>
+          <p:cNvSpPr/>
+          <p:nvPr/>
+        </p:nvSpPr>
+        <p:spPr>
+          <a:xfrm>
+            <a:off x="8074152" y="2011680"/>
+            <a:ext cx="457200" cy="457200"/>
+          </a:xfrm>
+          <a:prstGeom prst="roundRect">
+            <a:avLst>
+              <a:gd name="adj" fmla="val 20000"/>
+            </a:avLst>
+          </a:prstGeom>
+          <a:solidFill>
+            <a:srgbClr val="EA4B71"/>
+          </a:solidFill>
+          <a:ln/>
+        </p:spPr>
+      </p:sp>
+      <p:sp>
+        <p:nvSpPr>
+          <p:cNvPr id="18" name="Text 16"/>
+          <p:cNvSpPr txBox="1"/>
+          <p:nvPr/>
+        </p:nvSpPr>
+        <p:spPr>
+          <a:xfrm>
+            <a:off x="8074152" y="2011680"/>
+            <a:ext cx="457200" cy="457200"/>
+          </a:xfrm>
+          <a:prstGeom prst="rect">
+            <a:avLst/>
+          </a:prstGeom>
+          <a:noFill/>
+          <a:ln/>
+        </p:spPr>
+        <p:txBody>
+          <a:bodyPr wrap="square" lIns="0" tIns="0" rIns="0" bIns="0" rtlCol="0" anchor="ctr"/>
+          <a:lstStyle/>
+          <a:p>
+            <a:pPr algn="ctr" indent="0" marL="0">
+              <a:buNone/>
+            </a:pPr>
+            <a:r>
+              <a:rPr lang="en-US" sz="1600" b="1" dirty="0">
+                <a:solidFill>
+                  <a:srgbClr val="FFFFFF"/>
+                </a:solidFill>
+                <a:latin typeface="Cambria" pitchFamily="34" charset="0"/>
+                <a:ea typeface="Cambria" pitchFamily="34" charset="-122"/>
+                <a:cs typeface="Cambria" pitchFamily="34" charset="-120"/>
+              </a:rPr>
+              <a:t>3</a:t>
+            </a:r>
+            <a:endParaRPr lang="en-US" sz="1600" dirty="0"/>
+          </a:p>
+        </p:txBody>
+      </p:sp>
+      <p:sp>
+        <p:nvSpPr>
+          <p:cNvPr id="19" name="Text 17"/>
+          <p:cNvSpPr txBox="1"/>
+          <p:nvPr/>
+        </p:nvSpPr>
+        <p:spPr>
+          <a:xfrm>
+            <a:off x="8074152" y="2560320"/>
+            <a:ext cx="2926080" cy="320040"/>
+          </a:xfrm>
+          <a:prstGeom prst="rect">
+            <a:avLst/>
+          </a:prstGeom>
+          <a:noFill/>
+          <a:ln/>
+        </p:spPr>
+        <p:txBody>
+          <a:bodyPr wrap="square" lIns="0" tIns="0" rIns="0" bIns="0" rtlCol="0" anchor="ctr"/>
+          <a:lstStyle/>
+          <a:p>
+            <a:pPr indent="0" marL="0">
+              <a:buNone/>
+            </a:pPr>
+            <a:r>
+              <a:rPr lang="en-US" sz="1300" b="1" dirty="0">
+                <a:solidFill>
+                  <a:srgbClr val="1E2761"/>
+                </a:solidFill>
+                <a:latin typeface="Calibri" pitchFamily="34" charset="0"/>
+                <a:ea typeface="Calibri" pitchFamily="34" charset="-122"/>
+                <a:cs typeface="Calibri" pitchFamily="34" charset="-120"/>
+              </a:rPr>
+              <a:t>정식 배포</a:t>
+            </a:r>
+            <a:endParaRPr lang="en-US" sz="1300" dirty="0"/>
+          </a:p>
+        </p:txBody>
+      </p:sp>
+      <p:sp>
+        <p:nvSpPr>
+          <p:cNvPr id="20" name="Text 18"/>
+          <p:cNvSpPr txBox="1"/>
+          <p:nvPr/>
+        </p:nvSpPr>
+        <p:spPr>
+          <a:xfrm>
+            <a:off x="8074152" y="2880360"/>
+            <a:ext cx="2926080" cy="731520"/>
+          </a:xfrm>
+          <a:prstGeom prst="rect">
+            <a:avLst/>
+          </a:prstGeom>
+          <a:noFill/>
+          <a:ln/>
+        </p:spPr>
+        <p:txBody>
+          <a:bodyPr wrap="square" lIns="0" tIns="0" rIns="0" bIns="0" rtlCol="0" anchor="ctr"/>
+          <a:lstStyle/>
+          <a:p>
+            <a:pPr indent="0" marL="0">
+              <a:lnSpc>
+                <a:spcPct val="120000"/>
+              </a:lnSpc>
+              <a:buNone/>
+            </a:pPr>
+            <a:r>
+              <a:rPr lang="en-US" sz="970" dirty="0">
+                <a:solidFill>
+                  <a:srgbClr val="3F4A63"/>
+                </a:solidFill>
+                <a:latin typeface="Calibri" pitchFamily="34" charset="0"/>
+                <a:ea typeface="Calibri" pitchFamily="34" charset="-122"/>
+                <a:cs typeface="Calibri" pitchFamily="34" charset="-120"/>
+              </a:rPr>
+              <a:t>Chrome 확장 프로그램을 정식 스토어에 올려 실사용자 피드백 기반으로 고도화</a:t>
+            </a:r>
+            <a:endParaRPr lang="en-US" sz="970" dirty="0"/>
+          </a:p>
+        </p:txBody>
+      </p:sp>
+      <p:sp>
+        <p:nvSpPr>
+          <p:cNvPr id="21" name="Shape 19"/>
+          <p:cNvSpPr/>
+          <p:nvPr/>
+        </p:nvSpPr>
+        <p:spPr>
+          <a:xfrm>
+            <a:off x="640080" y="3877056"/>
+            <a:ext cx="3383280" cy="1874520"/>
+          </a:xfrm>
+          <a:prstGeom prst="roundRect">
+            <a:avLst>
+              <a:gd name="adj" fmla="val 3902"/>
+            </a:avLst>
+          </a:prstGeom>
+          <a:solidFill>
+            <a:srgbClr val="F3F5FA"/>
+          </a:solidFill>
+          <a:ln w="9525">
+            <a:solidFill>
+              <a:srgbClr val="E3E7F0"/>
+            </a:solidFill>
+            <a:prstDash val="solid"/>
+          </a:ln>
+        </p:spPr>
+      </p:sp>
+      <p:sp>
+        <p:nvSpPr>
+          <p:cNvPr id="22" name="Shape 20"/>
+          <p:cNvSpPr/>
+          <p:nvPr/>
+        </p:nvSpPr>
+        <p:spPr>
+          <a:xfrm>
+            <a:off x="868680" y="4105656"/>
+            <a:ext cx="457200" cy="457200"/>
+          </a:xfrm>
+          <a:prstGeom prst="roundRect">
+            <a:avLst>
+              <a:gd name="adj" fmla="val 20000"/>
+            </a:avLst>
+          </a:prstGeom>
+          <a:solidFill>
+            <a:srgbClr val="4C3F9E"/>
+          </a:solidFill>
+          <a:ln/>
+        </p:spPr>
+      </p:sp>
+      <p:sp>
+        <p:nvSpPr>
+          <p:cNvPr id="23" name="Text 21"/>
+          <p:cNvSpPr txBox="1"/>
+          <p:nvPr/>
+        </p:nvSpPr>
+        <p:spPr>
+          <a:xfrm>
+            <a:off x="868680" y="4105656"/>
+            <a:ext cx="457200" cy="457200"/>
+          </a:xfrm>
+          <a:prstGeom prst="rect">
+            <a:avLst/>
+          </a:prstGeom>
+          <a:noFill/>
+          <a:ln/>
+        </p:spPr>
+        <p:txBody>
+          <a:bodyPr wrap="square" lIns="0" tIns="0" rIns="0" bIns="0" rtlCol="0" anchor="ctr"/>
+          <a:lstStyle/>
+          <a:p>
+            <a:pPr algn="ctr" indent="0" marL="0">
+              <a:buNone/>
+            </a:pPr>
+            <a:r>
+              <a:rPr lang="en-US" sz="1600" b="1" dirty="0">
+                <a:solidFill>
+                  <a:srgbClr val="FFFFFF"/>
+                </a:solidFill>
+                <a:latin typeface="Cambria" pitchFamily="34" charset="0"/>
+                <a:ea typeface="Cambria" pitchFamily="34" charset="-122"/>
+                <a:cs typeface="Cambria" pitchFamily="34" charset="-120"/>
+              </a:rPr>
+              <a:t>4</a:t>
+            </a:r>
+            <a:endParaRPr lang="en-US" sz="1600" dirty="0"/>
+          </a:p>
+        </p:txBody>
+      </p:sp>
+      <p:sp>
+        <p:nvSpPr>
+          <p:cNvPr id="24" name="Text 22"/>
+          <p:cNvSpPr txBox="1"/>
+          <p:nvPr/>
+        </p:nvSpPr>
+        <p:spPr>
+          <a:xfrm>
+            <a:off x="868680" y="4654296"/>
+            <a:ext cx="2926080" cy="320040"/>
+          </a:xfrm>
+          <a:prstGeom prst="rect">
+            <a:avLst/>
+          </a:prstGeom>
+          <a:noFill/>
+          <a:ln/>
+        </p:spPr>
+        <p:txBody>
+          <a:bodyPr wrap="square" lIns="0" tIns="0" rIns="0" bIns="0" rtlCol="0" anchor="ctr"/>
+          <a:lstStyle/>
+          <a:p>
+            <a:pPr indent="0" marL="0">
+              <a:buNone/>
+            </a:pPr>
+            <a:r>
+              <a:rPr lang="en-US" sz="1300" b="1" dirty="0">
+                <a:solidFill>
+                  <a:srgbClr val="1E2761"/>
+                </a:solidFill>
+                <a:latin typeface="Calibri" pitchFamily="34" charset="0"/>
+                <a:ea typeface="Calibri" pitchFamily="34" charset="-122"/>
+                <a:cs typeface="Calibri" pitchFamily="34" charset="-120"/>
+              </a:rPr>
+              <a:t>맞춤 학습 경로</a:t>
+            </a:r>
+            <a:endParaRPr lang="en-US" sz="1300" dirty="0"/>
+          </a:p>
+        </p:txBody>
+      </p:sp>
+      <p:sp>
+        <p:nvSpPr>
+          <p:cNvPr id="25" name="Text 23"/>
+          <p:cNvSpPr txBox="1"/>
+          <p:nvPr/>
+        </p:nvSpPr>
+        <p:spPr>
+          <a:xfrm>
+            <a:off x="868680" y="4974336"/>
+            <a:ext cx="2926080" cy="731520"/>
+          </a:xfrm>
+          <a:prstGeom prst="rect">
+            <a:avLst/>
+          </a:prstGeom>
+          <a:noFill/>
+          <a:ln/>
+        </p:spPr>
+        <p:txBody>
+          <a:bodyPr wrap="square" lIns="0" tIns="0" rIns="0" bIns="0" rtlCol="0" anchor="ctr"/>
+          <a:lstStyle/>
+          <a:p>
+            <a:pPr indent="0" marL="0">
+              <a:lnSpc>
+                <a:spcPct val="120000"/>
+              </a:lnSpc>
+              <a:buNone/>
+            </a:pPr>
+            <a:r>
+              <a:rPr lang="en-US" sz="970" dirty="0">
+                <a:solidFill>
+                  <a:srgbClr val="3F4A63"/>
+                </a:solidFill>
+                <a:latin typeface="Calibri" pitchFamily="34" charset="0"/>
+                <a:ea typeface="Calibri" pitchFamily="34" charset="-122"/>
+                <a:cs typeface="Calibri" pitchFamily="34" charset="-120"/>
+              </a:rPr>
+              <a:t>구현된 학습 경로 추천 기능을 커리큘럼 로직과 연결해 선수 개념 기반 맞춤 학습 경로 자동 생성</a:t>
+            </a:r>
+            <a:endParaRPr lang="en-US" sz="970" dirty="0"/>
+          </a:p>
+        </p:txBody>
+      </p:sp>
+      <p:sp>
+        <p:nvSpPr>
+          <p:cNvPr id="26" name="Shape 24"/>
+          <p:cNvSpPr/>
+          <p:nvPr/>
+        </p:nvSpPr>
+        <p:spPr>
+          <a:xfrm>
+            <a:off x="4242816" y="3877056"/>
+            <a:ext cx="3383280" cy="1874520"/>
+          </a:xfrm>
+          <a:prstGeom prst="roundRect">
+            <a:avLst>
+              <a:gd name="adj" fmla="val 3902"/>
+            </a:avLst>
+          </a:prstGeom>
+          <a:solidFill>
+            <a:srgbClr val="F3F5FA"/>
+          </a:solidFill>
+          <a:ln w="9525">
+            <a:solidFill>
+              <a:srgbClr val="E3E7F0"/>
+            </a:solidFill>
+            <a:prstDash val="solid"/>
+          </a:ln>
+        </p:spPr>
+      </p:sp>
+      <p:sp>
+        <p:nvSpPr>
+          <p:cNvPr id="27" name="Shape 25"/>
+          <p:cNvSpPr/>
+          <p:nvPr/>
+        </p:nvSpPr>
+        <p:spPr>
+          <a:xfrm>
+            <a:off x="4471416" y="4105656"/>
+            <a:ext cx="457200" cy="457200"/>
+          </a:xfrm>
+          <a:prstGeom prst="roundRect">
+            <a:avLst>
+              <a:gd name="adj" fmla="val 20000"/>
+            </a:avLst>
+          </a:prstGeom>
+          <a:solidFill>
+            <a:srgbClr val="3B82C4"/>
+          </a:solidFill>
+          <a:ln/>
+        </p:spPr>
+      </p:sp>
+      <p:sp>
+        <p:nvSpPr>
+          <p:cNvPr id="28" name="Text 26"/>
+          <p:cNvSpPr txBox="1"/>
+          <p:nvPr/>
+        </p:nvSpPr>
+        <p:spPr>
+          <a:xfrm>
+            <a:off x="4471416" y="4105656"/>
+            <a:ext cx="457200" cy="457200"/>
+          </a:xfrm>
+          <a:prstGeom prst="rect">
+            <a:avLst/>
+          </a:prstGeom>
+          <a:noFill/>
+          <a:ln/>
+        </p:spPr>
+        <p:txBody>
+          <a:bodyPr wrap="square" lIns="0" tIns="0" rIns="0" bIns="0" rtlCol="0" anchor="ctr"/>
+          <a:lstStyle/>
+          <a:p>
+            <a:pPr algn="ctr" indent="0" marL="0">
+              <a:buNone/>
+            </a:pPr>
+            <a:r>
+              <a:rPr lang="en-US" sz="1600" b="1" dirty="0">
+                <a:solidFill>
+                  <a:srgbClr val="FFFFFF"/>
+                </a:solidFill>
+                <a:latin typeface="Cambria" pitchFamily="34" charset="0"/>
+                <a:ea typeface="Cambria" pitchFamily="34" charset="-122"/>
+                <a:cs typeface="Cambria" pitchFamily="34" charset="-120"/>
+              </a:rPr>
+              <a:t>5</a:t>
+            </a:r>
+            <a:endParaRPr lang="en-US" sz="1600" dirty="0"/>
+          </a:p>
+        </p:txBody>
+      </p:sp>
+      <p:sp>
+        <p:nvSpPr>
+          <p:cNvPr id="29" name="Text 27"/>
+          <p:cNvSpPr txBox="1"/>
+          <p:nvPr/>
+        </p:nvSpPr>
+        <p:spPr>
+          <a:xfrm>
+            <a:off x="4471416" y="4654296"/>
+            <a:ext cx="2926080" cy="320040"/>
+          </a:xfrm>
+          <a:prstGeom prst="rect">
+            <a:avLst/>
+          </a:prstGeom>
+          <a:noFill/>
+          <a:ln/>
+        </p:spPr>
+        <p:txBody>
+          <a:bodyPr wrap="square" lIns="0" tIns="0" rIns="0" bIns="0" rtlCol="0" anchor="ctr"/>
+          <a:lstStyle/>
+          <a:p>
+            <a:pPr indent="0" marL="0">
+              <a:buNone/>
+            </a:pPr>
+            <a:r>
+              <a:rPr lang="en-US" sz="1300" b="1" dirty="0">
+                <a:solidFill>
+                  <a:srgbClr val="1E2761"/>
+                </a:solidFill>
+                <a:latin typeface="Calibri" pitchFamily="34" charset="0"/>
+                <a:ea typeface="Calibri" pitchFamily="34" charset="-122"/>
+                <a:cs typeface="Calibri" pitchFamily="34" charset="-120"/>
+              </a:rPr>
+              <a:t>다국어 · 온프레미스</a:t>
+            </a:r>
+            <a:endParaRPr lang="en-US" sz="1300" dirty="0"/>
+          </a:p>
+        </p:txBody>
+      </p:sp>
+      <p:sp>
+        <p:nvSpPr>
+          <p:cNvPr id="30" name="Text 28"/>
+          <p:cNvSpPr txBox="1"/>
+          <p:nvPr/>
+        </p:nvSpPr>
+        <p:spPr>
+          <a:xfrm>
+            <a:off x="4471416" y="4974336"/>
+            <a:ext cx="2926080" cy="731520"/>
+          </a:xfrm>
+          <a:prstGeom prst="rect">
+            <a:avLst/>
+          </a:prstGeom>
+          <a:noFill/>
+          <a:ln/>
+        </p:spPr>
+        <p:txBody>
+          <a:bodyPr wrap="square" lIns="0" tIns="0" rIns="0" bIns="0" rtlCol="0" anchor="ctr"/>
+          <a:lstStyle/>
+          <a:p>
+            <a:pPr indent="0" marL="0">
+              <a:lnSpc>
+                <a:spcPct val="120000"/>
+              </a:lnSpc>
+              <a:buNone/>
+            </a:pPr>
+            <a:r>
+              <a:rPr lang="en-US" sz="970" dirty="0">
+                <a:solidFill>
+                  <a:srgbClr val="3F4A63"/>
+                </a:solidFill>
+                <a:latin typeface="Calibri" pitchFamily="34" charset="0"/>
+                <a:ea typeface="Calibri" pitchFamily="34" charset="-122"/>
+                <a:cs typeface="Calibri" pitchFamily="34" charset="-120"/>
+              </a:rPr>
+              <a:t>다국어 지원 확장 및 기업 내부 n8n 환경을 위한 자체 설치형 배포 검토</a:t>
+            </a:r>
+            <a:endParaRPr lang="en-US" sz="970" dirty="0"/>
+          </a:p>
+        </p:txBody>
+      </p:sp>
+      <p:sp>
+        <p:nvSpPr>
+          <p:cNvPr id="31" name="Text 29"/>
+          <p:cNvSpPr txBox="1"/>
+          <p:nvPr/>
+        </p:nvSpPr>
+        <p:spPr>
+          <a:xfrm>
+            <a:off x="457200" y="6510528"/>
+            <a:ext cx="2743200" cy="274320"/>
+          </a:xfrm>
+          <a:prstGeom prst="rect">
+            <a:avLst/>
+          </a:prstGeom>
+          <a:noFill/>
+          <a:ln/>
+        </p:spPr>
+        <p:txBody>
+          <a:bodyPr wrap="square" lIns="0" tIns="0" rIns="0" bIns="0" rtlCol="0" anchor="ctr"/>
+          <a:lstStyle/>
+          <a:p>
+            <a:pPr indent="0" marL="0">
+              <a:buNone/>
+            </a:pPr>
+            <a:r>
+              <a:rPr lang="en-US" sz="900" dirty="0">
+                <a:solidFill>
+                  <a:srgbClr val="8A93A8"/>
+                </a:solidFill>
+                <a:latin typeface="Calibri" pitchFamily="34" charset="0"/>
+                <a:ea typeface="Calibri" pitchFamily="34" charset="-122"/>
+                <a:cs typeface="Calibri" pitchFamily="34" charset="-120"/>
+              </a:rPr>
+              <a:t>FlowGuide AI</a:t>
+            </a:r>
+            <a:endParaRPr lang="en-US" sz="900" dirty="0"/>
+          </a:p>
+        </p:txBody>
+      </p:sp>
+      <p:sp>
+        <p:nvSpPr>
+          <p:cNvPr id="32" name="Text 30"/>
+          <p:cNvSpPr txBox="1"/>
+          <p:nvPr/>
+        </p:nvSpPr>
+        <p:spPr>
+          <a:xfrm>
+            <a:off x="11338560" y="6510528"/>
+            <a:ext cx="457200" cy="274320"/>
+          </a:xfrm>
+          <a:prstGeom prst="rect">
+            <a:avLst/>
+          </a:prstGeom>
+          <a:noFill/>
+          <a:ln/>
+        </p:spPr>
+        <p:txBody>
+          <a:bodyPr wrap="square" lIns="0" tIns="0" rIns="0" bIns="0" rtlCol="0" anchor="ctr"/>
+          <a:lstStyle/>
+          <a:p>
+            <a:pPr algn="r" indent="0" marL="0">
+              <a:buNone/>
+            </a:pPr>
+            <a:r>
+              <a:rPr lang="en-US" sz="900" dirty="0">
+                <a:solidFill>
+                  <a:srgbClr val="8A93A8"/>
+                </a:solidFill>
+                <a:latin typeface="Calibri" pitchFamily="34" charset="0"/>
+                <a:ea typeface="Calibri" pitchFamily="34" charset="-122"/>
+                <a:cs typeface="Calibri" pitchFamily="34" charset="-120"/>
+              </a:rPr>
+              <a:t>14</a:t>
+            </a:r>
+            <a:endParaRPr lang="en-US" sz="900" dirty="0"/>
+          </a:p>
+        </p:txBody>
+      </p:sp>
+    </p:spTree>
+  </p:cSld>
+  <p:clrMapOvr>
+    <a:masterClrMapping/>
+  </p:clrMapOvr>
+</p:sld>
+</file>
+
+<file path=ppt/slides/slide15.xml><?xml version="1.0" encoding="utf-8"?>
+<p:sld xmlns:a="http://schemas.openxmlformats.org/drawingml/2006/main" xmlns:r="http://schemas.openxmlformats.org/officeDocument/2006/relationships" xmlns:p="http://schemas.openxmlformats.org/presentationml/2006/main">
+  <p:cSld name="Slide 15">
     <p:bg>
       <p:bgPr>
         <a:solidFill>
@@ -5723,7 +8639,7 @@
                 <a:ea typeface="Calibri" pitchFamily="34" charset="-122"/>
                 <a:cs typeface="Calibri" pitchFamily="34" charset="-120"/>
               </a:rPr>
-              <a:t>13</a:t>
+              <a:t>15</a:t>
             </a:r>
             <a:endParaRPr lang="en-US" sz="900" dirty="0"/>
           </a:p>
@@ -5737,9 +8653,9 @@
 </p:sld>
 </file>
 
-<file path=ppt/slides/slide14.xml><?xml version="1.0" encoding="utf-8"?>
+<file path=ppt/slides/slide16.xml><?xml version="1.0" encoding="utf-8"?>
 <p:sld xmlns:a="http://schemas.openxmlformats.org/drawingml/2006/main" xmlns:r="http://schemas.openxmlformats.org/officeDocument/2006/relationships" xmlns:p="http://schemas.openxmlformats.org/presentationml/2006/main">
-  <p:cSld name="Slide 14">
+  <p:cSld name="Slide 16">
     <p:bg>
       <p:bgPr>
         <a:solidFill>
